--- a/workshop-rad/exports/workshop-voorstel-RAD_120min.pptx
+++ b/workshop-rad/exports/workshop-voorstel-RAD_120min.pptx
@@ -842,7 +842,7 @@
           <a:lstStyle/>
           <a:p>
             <a:r>
-              <a:t>Evaluatie en vervolg (8 min). Vraag eerst toestemming: de antwoorden zijn anoniem en dienen om te bepalen of er een vervolg komt. Terugblik (3 min) via de reflectie-skill of de peiling; meerkeuzevraag (2 min); open vraag (3 min). Formulering: workshop-rad/skills/workshop-reflectie/references/vragenset.md.</a:t>
+              <a:t>Evaluatie en afsluiting (16 min, één blok). Vraag eerst toestemming: de antwoorden zijn anoniem en dienen om te bepalen of er een vervolg komt. Terugblik (4 min) via de reflectie-skill of de peiling; meerkeuzevraag (2 min); open vraag (4 min); daarna de afsluiting (6 min). Formulering: workshop-rad/skills/workshop-reflectie/references/vragenset.md.</a:t>
             </a:r>
           </a:p>
         </p:txBody>
@@ -6949,7 +6949,7 @@
                 <a:ea typeface="General Sans" pitchFamily="34" charset="-122"/>
                 <a:cs typeface="General Sans" pitchFamily="34" charset="-120"/>
               </a:rPr>
-              <a:t>Evaluatie en vervolg</a:t>
+              <a:t>Evaluatie en afsluiting</a:t>
             </a:r>
             <a:endParaRPr lang="en-US" sz="3400" dirty="0"/>
           </a:p>
@@ -8195,7 +8195,7 @@
                 <a:ea typeface="Georgia" pitchFamily="34" charset="-122"/>
                 <a:cs typeface="Georgia" pitchFamily="34" charset="-120"/>
               </a:rPr>
-              <a:t>8 minuten, na de laatste uitleg en vóór de interactieve afsluiting. De antwoorden bepalen of en hoe CEDA een vervolg inricht.</a:t>
+              <a:t>Evaluatie en afsluiting vormen één blok van 16 minuten, na de laatste uitleg. De antwoorden bepalen of en hoe CEDA een vervolg inricht.</a:t>
             </a:r>
             <a:endParaRPr lang="en-US" sz="1800" dirty="0"/>
           </a:p>
@@ -8481,7 +8481,7 @@
                 <a:ea typeface="General Sans" pitchFamily="34" charset="-122"/>
                 <a:cs typeface="General Sans" pitchFamily="34" charset="-120"/>
               </a:rPr>
-              <a:t>één workshop, elf blokken</a:t>
+              <a:t>één workshop, tien blokken</a:t>
             </a:r>
             <a:endParaRPr lang="en-US" sz="1300" dirty="0"/>
           </a:p>
@@ -9173,7 +9173,7 @@
         <p:spPr>
           <a:xfrm>
             <a:off x="548640" y="1188720"/>
-            <a:ext cx="443103" cy="310896"/>
+            <a:ext cx="445008" cy="310896"/>
           </a:xfrm>
           <a:prstGeom prst="roundRect">
             <a:avLst>
@@ -9207,7 +9207,7 @@
         <p:spPr>
           <a:xfrm>
             <a:off x="548640" y="1188720"/>
-            <a:ext cx="443103" cy="310896"/>
+            <a:ext cx="445008" cy="310896"/>
           </a:xfrm>
           <a:prstGeom prst="rect">
             <a:avLst/>
@@ -9245,8 +9245,8 @@
         </p:nvSpPr>
         <p:spPr>
           <a:xfrm>
-            <a:off x="1037463" y="1188720"/>
-            <a:ext cx="531723" cy="310896"/>
+            <a:off x="1039368" y="1188720"/>
+            <a:ext cx="534009" cy="310896"/>
           </a:xfrm>
           <a:prstGeom prst="roundRect">
             <a:avLst>
@@ -9279,8 +9279,8 @@
         </p:nvSpPr>
         <p:spPr>
           <a:xfrm>
-            <a:off x="1037463" y="1188720"/>
-            <a:ext cx="531723" cy="310896"/>
+            <a:off x="1039368" y="1188720"/>
+            <a:ext cx="534009" cy="310896"/>
           </a:xfrm>
           <a:prstGeom prst="rect">
             <a:avLst/>
@@ -9318,8 +9318,8 @@
         </p:nvSpPr>
         <p:spPr>
           <a:xfrm>
-            <a:off x="1614906" y="1188720"/>
-            <a:ext cx="531723" cy="310896"/>
+            <a:off x="1619097" y="1188720"/>
+            <a:ext cx="534009" cy="310896"/>
           </a:xfrm>
           <a:prstGeom prst="roundRect">
             <a:avLst>
@@ -9352,8 +9352,8 @@
         </p:nvSpPr>
         <p:spPr>
           <a:xfrm>
-            <a:off x="1614906" y="1188720"/>
-            <a:ext cx="531723" cy="310896"/>
+            <a:off x="1619097" y="1188720"/>
+            <a:ext cx="534009" cy="310896"/>
           </a:xfrm>
           <a:prstGeom prst="rect">
             <a:avLst/>
@@ -9391,8 +9391,8 @@
         </p:nvSpPr>
         <p:spPr>
           <a:xfrm>
-            <a:off x="2192350" y="1188720"/>
-            <a:ext cx="708964" cy="310896"/>
+            <a:off x="2198827" y="1188720"/>
+            <a:ext cx="712012" cy="310896"/>
           </a:xfrm>
           <a:prstGeom prst="roundRect">
             <a:avLst>
@@ -9425,8 +9425,8 @@
         </p:nvSpPr>
         <p:spPr>
           <a:xfrm>
-            <a:off x="2192350" y="1188720"/>
-            <a:ext cx="708964" cy="310896"/>
+            <a:off x="2198827" y="1188720"/>
+            <a:ext cx="712012" cy="310896"/>
           </a:xfrm>
           <a:prstGeom prst="rect">
             <a:avLst/>
@@ -9464,8 +9464,8 @@
         </p:nvSpPr>
         <p:spPr>
           <a:xfrm>
-            <a:off x="2947035" y="1188720"/>
-            <a:ext cx="443103" cy="310896"/>
+            <a:off x="2956560" y="1188720"/>
+            <a:ext cx="445008" cy="310896"/>
           </a:xfrm>
           <a:prstGeom prst="roundRect">
             <a:avLst>
@@ -9498,8 +9498,8 @@
         </p:nvSpPr>
         <p:spPr>
           <a:xfrm>
-            <a:off x="2947035" y="1188720"/>
-            <a:ext cx="443103" cy="310896"/>
+            <a:off x="2956560" y="1188720"/>
+            <a:ext cx="445008" cy="310896"/>
           </a:xfrm>
           <a:prstGeom prst="rect">
             <a:avLst/>
@@ -9537,8 +9537,8 @@
         </p:nvSpPr>
         <p:spPr>
           <a:xfrm>
-            <a:off x="3435858" y="1188720"/>
-            <a:ext cx="1949653" cy="310896"/>
+            <a:off x="3447288" y="1188720"/>
+            <a:ext cx="1958035" cy="310896"/>
           </a:xfrm>
           <a:prstGeom prst="roundRect">
             <a:avLst>
@@ -9571,8 +9571,8 @@
         </p:nvSpPr>
         <p:spPr>
           <a:xfrm>
-            <a:off x="3435858" y="1188720"/>
-            <a:ext cx="1949653" cy="310896"/>
+            <a:off x="3447288" y="1188720"/>
+            <a:ext cx="1958035" cy="310896"/>
           </a:xfrm>
           <a:prstGeom prst="rect">
             <a:avLst/>
@@ -9610,8 +9610,8 @@
         </p:nvSpPr>
         <p:spPr>
           <a:xfrm>
-            <a:off x="5431231" y="1188720"/>
-            <a:ext cx="1329309" cy="310896"/>
+            <a:off x="5451043" y="1188720"/>
+            <a:ext cx="1335024" cy="310896"/>
           </a:xfrm>
           <a:prstGeom prst="roundRect">
             <a:avLst>
@@ -9644,8 +9644,8 @@
         </p:nvSpPr>
         <p:spPr>
           <a:xfrm>
-            <a:off x="5431231" y="1188720"/>
-            <a:ext cx="1329309" cy="310896"/>
+            <a:off x="5451043" y="1188720"/>
+            <a:ext cx="1335024" cy="310896"/>
           </a:xfrm>
           <a:prstGeom prst="rect">
             <a:avLst/>
@@ -9683,8 +9683,8 @@
         </p:nvSpPr>
         <p:spPr>
           <a:xfrm>
-            <a:off x="6806260" y="1188720"/>
-            <a:ext cx="1949653" cy="310896"/>
+            <a:off x="6831787" y="1188720"/>
+            <a:ext cx="1958035" cy="310896"/>
           </a:xfrm>
           <a:prstGeom prst="roundRect">
             <a:avLst>
@@ -9717,8 +9717,8 @@
         </p:nvSpPr>
         <p:spPr>
           <a:xfrm>
-            <a:off x="6806260" y="1188720"/>
-            <a:ext cx="1949653" cy="310896"/>
+            <a:off x="6831787" y="1188720"/>
+            <a:ext cx="1958035" cy="310896"/>
           </a:xfrm>
           <a:prstGeom prst="rect">
             <a:avLst/>
@@ -9756,8 +9756,8 @@
         </p:nvSpPr>
         <p:spPr>
           <a:xfrm>
-            <a:off x="8801633" y="1188720"/>
-            <a:ext cx="1329309" cy="310896"/>
+            <a:off x="8835542" y="1188720"/>
+            <a:ext cx="1335024" cy="310896"/>
           </a:xfrm>
           <a:prstGeom prst="roundRect">
             <a:avLst>
@@ -9790,8 +9790,8 @@
         </p:nvSpPr>
         <p:spPr>
           <a:xfrm>
-            <a:off x="8801633" y="1188720"/>
-            <a:ext cx="1329309" cy="310896"/>
+            <a:off x="8835542" y="1188720"/>
+            <a:ext cx="1335024" cy="310896"/>
           </a:xfrm>
           <a:prstGeom prst="rect">
             <a:avLst/>
@@ -9829,8 +9829,8 @@
         </p:nvSpPr>
         <p:spPr>
           <a:xfrm>
-            <a:off x="10176662" y="1188720"/>
-            <a:ext cx="708964" cy="310896"/>
+            <a:off x="10216286" y="1188720"/>
+            <a:ext cx="1424025" cy="310896"/>
           </a:xfrm>
           <a:prstGeom prst="roundRect">
             <a:avLst>
@@ -9863,8 +9863,8 @@
         </p:nvSpPr>
         <p:spPr>
           <a:xfrm>
-            <a:off x="10176662" y="1188720"/>
-            <a:ext cx="708964" cy="310896"/>
+            <a:off x="10216286" y="1188720"/>
+            <a:ext cx="1424025" cy="310896"/>
           </a:xfrm>
           <a:prstGeom prst="rect">
             <a:avLst/>
@@ -9888,7 +9888,7 @@
                 <a:ea typeface="General Sans" pitchFamily="34" charset="-122"/>
                 <a:cs typeface="General Sans" pitchFamily="34" charset="-120"/>
               </a:rPr>
-              <a:t>8 min</a:t>
+              <a:t>16 min</a:t>
             </a:r>
             <a:endParaRPr lang="en-US" sz="1000" dirty="0"/>
           </a:p>
@@ -9896,19 +9896,2546 @@
       </p:sp>
       <p:sp>
         <p:nvSpPr>
-          <p:cNvPr id="23" name="Shape 17"/>
+          <p:cNvPr id="25" name="Shape 19"/>
           <p:cNvSpPr/>
           <p:nvPr/>
         </p:nvSpPr>
         <p:spPr>
           <a:xfrm>
-            <a:off x="10931347" y="1188720"/>
-            <a:ext cx="708964" cy="310896"/>
+            <a:off x="548640" y="1691640"/>
+            <a:ext cx="11091672" cy="384048"/>
           </a:xfrm>
           <a:prstGeom prst="roundRect">
             <a:avLst>
-              <a:gd name="adj" fmla="val 23529"/>
+              <a:gd name="adj" fmla="val 31818"/>
             </a:avLst>
+          </a:prstGeom>
+          <a:solidFill>
+            <a:srgbClr val="FFFFFF"/>
+          </a:solidFill>
+          <a:ln w="12700">
+            <a:solidFill>
+              <a:srgbClr val="FFFFFF"/>
+            </a:solidFill>
+            <a:prstDash val="solid"/>
+          </a:ln>
+        </p:spPr>
+        <p:txBody>
+          <a:bodyPr/>
+          <a:lstStyle/>
+          <a:p>
+            <a:endParaRPr lang="en-NL"/>
+          </a:p>
+        </p:txBody>
+      </p:sp>
+      <p:sp>
+        <p:nvSpPr>
+          <p:cNvPr id="26" name="Shape 20"/>
+          <p:cNvSpPr/>
+          <p:nvPr/>
+        </p:nvSpPr>
+        <p:spPr>
+          <a:xfrm>
+            <a:off x="640080" y="1737360"/>
+            <a:ext cx="292608" cy="292608"/>
+          </a:xfrm>
+          <a:prstGeom prst="ellipse">
+            <a:avLst/>
+          </a:prstGeom>
+          <a:solidFill>
+            <a:srgbClr val="F4D74B"/>
+          </a:solidFill>
+          <a:ln w="12700">
+            <a:solidFill>
+              <a:srgbClr val="F4D74B"/>
+            </a:solidFill>
+            <a:prstDash val="solid"/>
+          </a:ln>
+        </p:spPr>
+        <p:txBody>
+          <a:bodyPr/>
+          <a:lstStyle/>
+          <a:p>
+            <a:endParaRPr lang="en-NL"/>
+          </a:p>
+        </p:txBody>
+      </p:sp>
+      <p:sp>
+        <p:nvSpPr>
+          <p:cNvPr id="27" name="Text 21"/>
+          <p:cNvSpPr txBox="1"/>
+          <p:nvPr/>
+        </p:nvSpPr>
+        <p:spPr>
+          <a:xfrm>
+            <a:off x="640080" y="1737360"/>
+            <a:ext cx="292608" cy="292608"/>
+          </a:xfrm>
+          <a:prstGeom prst="rect">
+            <a:avLst/>
+          </a:prstGeom>
+          <a:noFill/>
+          <a:ln/>
+        </p:spPr>
+        <p:txBody>
+          <a:bodyPr wrap="square" lIns="0" tIns="0" rIns="0" bIns="0" rtlCol="0" anchor="ctr"/>
+          <a:lstStyle/>
+          <a:p>
+            <a:pPr marL="0" indent="0" algn="ctr">
+              <a:buNone/>
+            </a:pPr>
+            <a:r>
+              <a:rPr lang="en-US" sz="1100" b="1" dirty="0">
+                <a:solidFill>
+                  <a:srgbClr val="3D68EC"/>
+                </a:solidFill>
+                <a:latin typeface="General Sans" pitchFamily="34" charset="0"/>
+                <a:ea typeface="General Sans" pitchFamily="34" charset="-122"/>
+                <a:cs typeface="General Sans" pitchFamily="34" charset="-120"/>
+              </a:rPr>
+              <a:t>1</a:t>
+            </a:r>
+            <a:endParaRPr lang="en-US" sz="1100" dirty="0"/>
+          </a:p>
+        </p:txBody>
+      </p:sp>
+      <p:sp>
+        <p:nvSpPr>
+          <p:cNvPr id="28" name="Text 22"/>
+          <p:cNvSpPr txBox="1"/>
+          <p:nvPr/>
+        </p:nvSpPr>
+        <p:spPr>
+          <a:xfrm>
+            <a:off x="1097280" y="1691640"/>
+            <a:ext cx="640080" cy="384048"/>
+          </a:xfrm>
+          <a:prstGeom prst="rect">
+            <a:avLst/>
+          </a:prstGeom>
+          <a:noFill/>
+          <a:ln/>
+        </p:spPr>
+        <p:txBody>
+          <a:bodyPr wrap="square" lIns="0" tIns="0" rIns="0" bIns="0" rtlCol="0" anchor="ctr"/>
+          <a:lstStyle/>
+          <a:p>
+            <a:pPr marL="0" indent="0">
+              <a:buNone/>
+            </a:pPr>
+            <a:r>
+              <a:rPr lang="en-US" sz="1200" b="1" dirty="0">
+                <a:solidFill>
+                  <a:srgbClr val="3D68EC"/>
+                </a:solidFill>
+                <a:latin typeface="General Sans" pitchFamily="34" charset="0"/>
+                <a:ea typeface="General Sans" pitchFamily="34" charset="-122"/>
+                <a:cs typeface="General Sans" pitchFamily="34" charset="-120"/>
+              </a:rPr>
+              <a:t>0:00</a:t>
+            </a:r>
+            <a:endParaRPr lang="en-US" sz="1200" dirty="0"/>
+          </a:p>
+        </p:txBody>
+      </p:sp>
+      <p:sp>
+        <p:nvSpPr>
+          <p:cNvPr id="29" name="Text 23"/>
+          <p:cNvSpPr txBox="1"/>
+          <p:nvPr/>
+        </p:nvSpPr>
+        <p:spPr>
+          <a:xfrm>
+            <a:off x="1783080" y="1691640"/>
+            <a:ext cx="2834640" cy="384048"/>
+          </a:xfrm>
+          <a:prstGeom prst="rect">
+            <a:avLst/>
+          </a:prstGeom>
+          <a:noFill/>
+          <a:ln/>
+        </p:spPr>
+        <p:txBody>
+          <a:bodyPr wrap="square" lIns="0" tIns="0" rIns="0" bIns="0" rtlCol="0" anchor="ctr"/>
+          <a:lstStyle/>
+          <a:p>
+            <a:pPr marL="0" indent="0">
+              <a:buNone/>
+            </a:pPr>
+            <a:r>
+              <a:rPr lang="en-US" sz="1300" b="1" dirty="0">
+                <a:solidFill>
+                  <a:srgbClr val="000000"/>
+                </a:solidFill>
+                <a:latin typeface="General Sans" pitchFamily="34" charset="0"/>
+                <a:ea typeface="General Sans" pitchFamily="34" charset="-122"/>
+                <a:cs typeface="General Sans" pitchFamily="34" charset="-120"/>
+              </a:rPr>
+              <a:t>Intro (CEDA)</a:t>
+            </a:r>
+            <a:endParaRPr lang="en-US" sz="1300" dirty="0"/>
+          </a:p>
+        </p:txBody>
+      </p:sp>
+      <p:sp>
+        <p:nvSpPr>
+          <p:cNvPr id="30" name="Text 24"/>
+          <p:cNvSpPr txBox="1"/>
+          <p:nvPr/>
+        </p:nvSpPr>
+        <p:spPr>
+          <a:xfrm>
+            <a:off x="4617720" y="1691640"/>
+            <a:ext cx="640080" cy="384048"/>
+          </a:xfrm>
+          <a:prstGeom prst="rect">
+            <a:avLst/>
+          </a:prstGeom>
+          <a:noFill/>
+          <a:ln/>
+        </p:spPr>
+        <p:txBody>
+          <a:bodyPr wrap="square" lIns="0" tIns="0" rIns="0" bIns="0" rtlCol="0" anchor="ctr"/>
+          <a:lstStyle/>
+          <a:p>
+            <a:pPr marL="0" indent="0">
+              <a:buNone/>
+            </a:pPr>
+            <a:r>
+              <a:rPr lang="en-US" sz="1200" dirty="0">
+                <a:solidFill>
+                  <a:srgbClr val="3D68EC"/>
+                </a:solidFill>
+                <a:latin typeface="General Sans" pitchFamily="34" charset="0"/>
+                <a:ea typeface="General Sans" pitchFamily="34" charset="-122"/>
+                <a:cs typeface="General Sans" pitchFamily="34" charset="-120"/>
+              </a:rPr>
+              <a:t>5 min</a:t>
+            </a:r>
+            <a:endParaRPr lang="en-US" sz="1200" dirty="0"/>
+          </a:p>
+        </p:txBody>
+      </p:sp>
+      <p:sp>
+        <p:nvSpPr>
+          <p:cNvPr id="31" name="Text 25"/>
+          <p:cNvSpPr txBox="1"/>
+          <p:nvPr/>
+        </p:nvSpPr>
+        <p:spPr>
+          <a:xfrm>
+            <a:off x="5303520" y="1691640"/>
+            <a:ext cx="6245352" cy="384048"/>
+          </a:xfrm>
+          <a:prstGeom prst="rect">
+            <a:avLst/>
+          </a:prstGeom>
+          <a:noFill/>
+          <a:ln/>
+        </p:spPr>
+        <p:txBody>
+          <a:bodyPr wrap="square" lIns="0" tIns="0" rIns="0" bIns="0" rtlCol="0" anchor="ctr"/>
+          <a:lstStyle/>
+          <a:p>
+            <a:pPr marL="0" indent="0">
+              <a:buNone/>
+            </a:pPr>
+            <a:r>
+              <a:rPr lang="en-US" sz="1100" dirty="0">
+                <a:solidFill>
+                  <a:srgbClr val="000000"/>
+                </a:solidFill>
+                <a:latin typeface="General Sans" pitchFamily="34" charset="0"/>
+                <a:ea typeface="General Sans" pitchFamily="34" charset="-122"/>
+                <a:cs typeface="General Sans" pitchFamily="34" charset="-120"/>
+              </a:rPr>
+              <a:t>Waarom agentic data science, en wat gaan we doen?</a:t>
+            </a:r>
+            <a:endParaRPr lang="en-US" sz="1100" dirty="0"/>
+          </a:p>
+        </p:txBody>
+      </p:sp>
+      <p:sp>
+        <p:nvSpPr>
+          <p:cNvPr id="32" name="Shape 19"/>
+          <p:cNvSpPr/>
+          <p:nvPr/>
+        </p:nvSpPr>
+        <p:spPr>
+          <a:xfrm>
+            <a:off x="548640" y="2112264"/>
+            <a:ext cx="11091672" cy="384048"/>
+          </a:xfrm>
+          <a:prstGeom prst="roundRect">
+            <a:avLst>
+              <a:gd name="adj" fmla="val 31818"/>
+            </a:avLst>
+          </a:prstGeom>
+          <a:solidFill>
+            <a:srgbClr val="FFFFFF"/>
+          </a:solidFill>
+          <a:ln w="12700">
+            <a:solidFill>
+              <a:srgbClr val="FFFFFF"/>
+            </a:solidFill>
+            <a:prstDash val="solid"/>
+          </a:ln>
+        </p:spPr>
+        <p:txBody>
+          <a:bodyPr/>
+          <a:lstStyle/>
+          <a:p>
+            <a:endParaRPr lang="en-NL"/>
+          </a:p>
+        </p:txBody>
+      </p:sp>
+      <p:sp>
+        <p:nvSpPr>
+          <p:cNvPr id="33" name="Shape 20"/>
+          <p:cNvSpPr/>
+          <p:nvPr/>
+        </p:nvSpPr>
+        <p:spPr>
+          <a:xfrm>
+            <a:off x="640080" y="2157984"/>
+            <a:ext cx="292608" cy="292608"/>
+          </a:xfrm>
+          <a:prstGeom prst="ellipse">
+            <a:avLst/>
+          </a:prstGeom>
+          <a:solidFill>
+            <a:srgbClr val="F4D74B"/>
+          </a:solidFill>
+          <a:ln w="12700">
+            <a:solidFill>
+              <a:srgbClr val="F4D74B"/>
+            </a:solidFill>
+            <a:prstDash val="solid"/>
+          </a:ln>
+        </p:spPr>
+        <p:txBody>
+          <a:bodyPr/>
+          <a:lstStyle/>
+          <a:p>
+            <a:endParaRPr lang="en-NL"/>
+          </a:p>
+        </p:txBody>
+      </p:sp>
+      <p:sp>
+        <p:nvSpPr>
+          <p:cNvPr id="34" name="Text 21"/>
+          <p:cNvSpPr txBox="1"/>
+          <p:nvPr/>
+        </p:nvSpPr>
+        <p:spPr>
+          <a:xfrm>
+            <a:off x="640080" y="2157984"/>
+            <a:ext cx="292608" cy="292608"/>
+          </a:xfrm>
+          <a:prstGeom prst="rect">
+            <a:avLst/>
+          </a:prstGeom>
+          <a:noFill/>
+          <a:ln/>
+        </p:spPr>
+        <p:txBody>
+          <a:bodyPr wrap="square" lIns="0" tIns="0" rIns="0" bIns="0" rtlCol="0" anchor="ctr"/>
+          <a:lstStyle/>
+          <a:p>
+            <a:pPr marL="0" indent="0" algn="ctr">
+              <a:buNone/>
+            </a:pPr>
+            <a:r>
+              <a:rPr lang="en-US" sz="1100" b="1" dirty="0">
+                <a:solidFill>
+                  <a:srgbClr val="3D68EC"/>
+                </a:solidFill>
+                <a:latin typeface="General Sans" pitchFamily="34" charset="0"/>
+                <a:ea typeface="General Sans" pitchFamily="34" charset="-122"/>
+                <a:cs typeface="General Sans" pitchFamily="34" charset="-120"/>
+              </a:rPr>
+              <a:t>2</a:t>
+            </a:r>
+            <a:endParaRPr lang="en-US" sz="1100" dirty="0"/>
+          </a:p>
+        </p:txBody>
+      </p:sp>
+      <p:sp>
+        <p:nvSpPr>
+          <p:cNvPr id="35" name="Text 22"/>
+          <p:cNvSpPr txBox="1"/>
+          <p:nvPr/>
+        </p:nvSpPr>
+        <p:spPr>
+          <a:xfrm>
+            <a:off x="1097280" y="2112264"/>
+            <a:ext cx="640080" cy="384048"/>
+          </a:xfrm>
+          <a:prstGeom prst="rect">
+            <a:avLst/>
+          </a:prstGeom>
+          <a:noFill/>
+          <a:ln/>
+        </p:spPr>
+        <p:txBody>
+          <a:bodyPr wrap="square" lIns="0" tIns="0" rIns="0" bIns="0" rtlCol="0" anchor="ctr"/>
+          <a:lstStyle/>
+          <a:p>
+            <a:pPr marL="0" indent="0">
+              <a:buNone/>
+            </a:pPr>
+            <a:r>
+              <a:rPr lang="en-US" sz="1200" b="1" dirty="0">
+                <a:solidFill>
+                  <a:srgbClr val="3D68EC"/>
+                </a:solidFill>
+                <a:latin typeface="General Sans" pitchFamily="34" charset="0"/>
+                <a:ea typeface="General Sans" pitchFamily="34" charset="-122"/>
+                <a:cs typeface="General Sans" pitchFamily="34" charset="-120"/>
+              </a:rPr>
+              <a:t>0:05</a:t>
+            </a:r>
+            <a:endParaRPr lang="en-US" sz="1200" dirty="0"/>
+          </a:p>
+        </p:txBody>
+      </p:sp>
+      <p:sp>
+        <p:nvSpPr>
+          <p:cNvPr id="36" name="Text 23"/>
+          <p:cNvSpPr txBox="1"/>
+          <p:nvPr/>
+        </p:nvSpPr>
+        <p:spPr>
+          <a:xfrm>
+            <a:off x="1783080" y="2112264"/>
+            <a:ext cx="2834640" cy="384048"/>
+          </a:xfrm>
+          <a:prstGeom prst="rect">
+            <a:avLst/>
+          </a:prstGeom>
+          <a:noFill/>
+          <a:ln/>
+        </p:spPr>
+        <p:txBody>
+          <a:bodyPr wrap="square" lIns="0" tIns="0" rIns="0" bIns="0" rtlCol="0" anchor="ctr"/>
+          <a:lstStyle/>
+          <a:p>
+            <a:pPr marL="0" indent="0">
+              <a:buNone/>
+            </a:pPr>
+            <a:r>
+              <a:rPr lang="en-US" sz="1300" b="1" dirty="0">
+                <a:solidFill>
+                  <a:srgbClr val="000000"/>
+                </a:solidFill>
+                <a:latin typeface="General Sans" pitchFamily="34" charset="0"/>
+                <a:ea typeface="General Sans" pitchFamily="34" charset="-122"/>
+                <a:cs typeface="General Sans" pitchFamily="34" charset="-120"/>
+              </a:rPr>
+              <a:t>Synthetische data</a:t>
+            </a:r>
+            <a:endParaRPr lang="en-US" sz="1300" dirty="0"/>
+          </a:p>
+        </p:txBody>
+      </p:sp>
+      <p:sp>
+        <p:nvSpPr>
+          <p:cNvPr id="37" name="Text 24"/>
+          <p:cNvSpPr txBox="1"/>
+          <p:nvPr/>
+        </p:nvSpPr>
+        <p:spPr>
+          <a:xfrm>
+            <a:off x="4617720" y="2112264"/>
+            <a:ext cx="640080" cy="384048"/>
+          </a:xfrm>
+          <a:prstGeom prst="rect">
+            <a:avLst/>
+          </a:prstGeom>
+          <a:noFill/>
+          <a:ln/>
+        </p:spPr>
+        <p:txBody>
+          <a:bodyPr wrap="square" lIns="0" tIns="0" rIns="0" bIns="0" rtlCol="0" anchor="ctr"/>
+          <a:lstStyle/>
+          <a:p>
+            <a:pPr marL="0" indent="0">
+              <a:buNone/>
+            </a:pPr>
+            <a:r>
+              <a:rPr lang="en-US" sz="1200" dirty="0">
+                <a:solidFill>
+                  <a:srgbClr val="3D68EC"/>
+                </a:solidFill>
+                <a:latin typeface="General Sans" pitchFamily="34" charset="0"/>
+                <a:ea typeface="General Sans" pitchFamily="34" charset="-122"/>
+                <a:cs typeface="General Sans" pitchFamily="34" charset="-120"/>
+              </a:rPr>
+              <a:t>6 min</a:t>
+            </a:r>
+            <a:endParaRPr lang="en-US" sz="1200" dirty="0"/>
+          </a:p>
+        </p:txBody>
+      </p:sp>
+      <p:sp>
+        <p:nvSpPr>
+          <p:cNvPr id="38" name="Text 25"/>
+          <p:cNvSpPr txBox="1"/>
+          <p:nvPr/>
+        </p:nvSpPr>
+        <p:spPr>
+          <a:xfrm>
+            <a:off x="5303520" y="2112264"/>
+            <a:ext cx="6245352" cy="384048"/>
+          </a:xfrm>
+          <a:prstGeom prst="rect">
+            <a:avLst/>
+          </a:prstGeom>
+          <a:noFill/>
+          <a:ln/>
+        </p:spPr>
+        <p:txBody>
+          <a:bodyPr wrap="square" lIns="0" tIns="0" rIns="0" bIns="0" rtlCol="0" anchor="ctr"/>
+          <a:lstStyle/>
+          <a:p>
+            <a:pPr marL="0" indent="0">
+              <a:buNone/>
+            </a:pPr>
+            <a:r>
+              <a:rPr lang="en-US" sz="1100" dirty="0">
+                <a:solidFill>
+                  <a:srgbClr val="000000"/>
+                </a:solidFill>
+                <a:latin typeface="General Sans" pitchFamily="34" charset="0"/>
+                <a:ea typeface="General Sans" pitchFamily="34" charset="-122"/>
+                <a:cs typeface="General Sans" pitchFamily="34" charset="-120"/>
+              </a:rPr>
+              <a:t>Wat is het, waarom gebruiken we het, wat kun je er (niet) mee?</a:t>
+            </a:r>
+            <a:endParaRPr lang="en-US" sz="1100" dirty="0"/>
+          </a:p>
+        </p:txBody>
+      </p:sp>
+      <p:sp>
+        <p:nvSpPr>
+          <p:cNvPr id="39" name="Shape 19"/>
+          <p:cNvSpPr/>
+          <p:nvPr/>
+        </p:nvSpPr>
+        <p:spPr>
+          <a:xfrm>
+            <a:off x="548640" y="2532888"/>
+            <a:ext cx="11091672" cy="384048"/>
+          </a:xfrm>
+          <a:prstGeom prst="roundRect">
+            <a:avLst>
+              <a:gd name="adj" fmla="val 31818"/>
+            </a:avLst>
+          </a:prstGeom>
+          <a:solidFill>
+            <a:srgbClr val="FFFFFF"/>
+          </a:solidFill>
+          <a:ln w="12700">
+            <a:solidFill>
+              <a:srgbClr val="FFFFFF"/>
+            </a:solidFill>
+            <a:prstDash val="solid"/>
+          </a:ln>
+        </p:spPr>
+        <p:txBody>
+          <a:bodyPr/>
+          <a:lstStyle/>
+          <a:p>
+            <a:endParaRPr lang="en-NL"/>
+          </a:p>
+        </p:txBody>
+      </p:sp>
+      <p:sp>
+        <p:nvSpPr>
+          <p:cNvPr id="40" name="Shape 20"/>
+          <p:cNvSpPr/>
+          <p:nvPr/>
+        </p:nvSpPr>
+        <p:spPr>
+          <a:xfrm>
+            <a:off x="640080" y="2578608"/>
+            <a:ext cx="292608" cy="292608"/>
+          </a:xfrm>
+          <a:prstGeom prst="ellipse">
+            <a:avLst/>
+          </a:prstGeom>
+          <a:solidFill>
+            <a:srgbClr val="F4D74B"/>
+          </a:solidFill>
+          <a:ln w="12700">
+            <a:solidFill>
+              <a:srgbClr val="F4D74B"/>
+            </a:solidFill>
+            <a:prstDash val="solid"/>
+          </a:ln>
+        </p:spPr>
+        <p:txBody>
+          <a:bodyPr/>
+          <a:lstStyle/>
+          <a:p>
+            <a:endParaRPr lang="en-NL"/>
+          </a:p>
+        </p:txBody>
+      </p:sp>
+      <p:sp>
+        <p:nvSpPr>
+          <p:cNvPr id="41" name="Text 21"/>
+          <p:cNvSpPr txBox="1"/>
+          <p:nvPr/>
+        </p:nvSpPr>
+        <p:spPr>
+          <a:xfrm>
+            <a:off x="640080" y="2578608"/>
+            <a:ext cx="292608" cy="292608"/>
+          </a:xfrm>
+          <a:prstGeom prst="rect">
+            <a:avLst/>
+          </a:prstGeom>
+          <a:noFill/>
+          <a:ln/>
+        </p:spPr>
+        <p:txBody>
+          <a:bodyPr wrap="square" lIns="0" tIns="0" rIns="0" bIns="0" rtlCol="0" anchor="ctr"/>
+          <a:lstStyle/>
+          <a:p>
+            <a:pPr marL="0" indent="0" algn="ctr">
+              <a:buNone/>
+            </a:pPr>
+            <a:r>
+              <a:rPr lang="en-US" sz="1100" b="1" dirty="0">
+                <a:solidFill>
+                  <a:srgbClr val="3D68EC"/>
+                </a:solidFill>
+                <a:latin typeface="General Sans" pitchFamily="34" charset="0"/>
+                <a:ea typeface="General Sans" pitchFamily="34" charset="-122"/>
+                <a:cs typeface="General Sans" pitchFamily="34" charset="-120"/>
+              </a:rPr>
+              <a:t>3</a:t>
+            </a:r>
+            <a:endParaRPr lang="en-US" sz="1100" dirty="0"/>
+          </a:p>
+        </p:txBody>
+      </p:sp>
+      <p:sp>
+        <p:nvSpPr>
+          <p:cNvPr id="42" name="Text 22"/>
+          <p:cNvSpPr txBox="1"/>
+          <p:nvPr/>
+        </p:nvSpPr>
+        <p:spPr>
+          <a:xfrm>
+            <a:off x="1097280" y="2532888"/>
+            <a:ext cx="640080" cy="384048"/>
+          </a:xfrm>
+          <a:prstGeom prst="rect">
+            <a:avLst/>
+          </a:prstGeom>
+          <a:noFill/>
+          <a:ln/>
+        </p:spPr>
+        <p:txBody>
+          <a:bodyPr wrap="square" lIns="0" tIns="0" rIns="0" bIns="0" rtlCol="0" anchor="ctr"/>
+          <a:lstStyle/>
+          <a:p>
+            <a:pPr marL="0" indent="0">
+              <a:buNone/>
+            </a:pPr>
+            <a:r>
+              <a:rPr lang="en-US" sz="1200" b="1" dirty="0">
+                <a:solidFill>
+                  <a:srgbClr val="3D68EC"/>
+                </a:solidFill>
+                <a:latin typeface="General Sans" pitchFamily="34" charset="0"/>
+                <a:ea typeface="General Sans" pitchFamily="34" charset="-122"/>
+                <a:cs typeface="General Sans" pitchFamily="34" charset="-120"/>
+              </a:rPr>
+              <a:t>0:11</a:t>
+            </a:r>
+            <a:endParaRPr lang="en-US" sz="1200" dirty="0"/>
+          </a:p>
+        </p:txBody>
+      </p:sp>
+      <p:sp>
+        <p:nvSpPr>
+          <p:cNvPr id="43" name="Text 23"/>
+          <p:cNvSpPr txBox="1"/>
+          <p:nvPr/>
+        </p:nvSpPr>
+        <p:spPr>
+          <a:xfrm>
+            <a:off x="1783080" y="2532888"/>
+            <a:ext cx="2834640" cy="384048"/>
+          </a:xfrm>
+          <a:prstGeom prst="rect">
+            <a:avLst/>
+          </a:prstGeom>
+          <a:noFill/>
+          <a:ln/>
+        </p:spPr>
+        <p:txBody>
+          <a:bodyPr wrap="square" lIns="0" tIns="0" rIns="0" bIns="0" rtlCol="0" anchor="ctr"/>
+          <a:lstStyle/>
+          <a:p>
+            <a:pPr marL="0" indent="0">
+              <a:buNone/>
+            </a:pPr>
+            <a:r>
+              <a:rPr lang="en-US" sz="1300" b="1" dirty="0">
+                <a:solidFill>
+                  <a:srgbClr val="000000"/>
+                </a:solidFill>
+                <a:latin typeface="General Sans" pitchFamily="34" charset="0"/>
+                <a:ea typeface="General Sans" pitchFamily="34" charset="-122"/>
+                <a:cs typeface="General Sans" pitchFamily="34" charset="-120"/>
+              </a:rPr>
+              <a:t>De opdracht en casus</a:t>
+            </a:r>
+            <a:endParaRPr lang="en-US" sz="1300" dirty="0"/>
+          </a:p>
+        </p:txBody>
+      </p:sp>
+      <p:sp>
+        <p:nvSpPr>
+          <p:cNvPr id="44" name="Text 24"/>
+          <p:cNvSpPr txBox="1"/>
+          <p:nvPr/>
+        </p:nvSpPr>
+        <p:spPr>
+          <a:xfrm>
+            <a:off x="4617720" y="2532888"/>
+            <a:ext cx="640080" cy="384048"/>
+          </a:xfrm>
+          <a:prstGeom prst="rect">
+            <a:avLst/>
+          </a:prstGeom>
+          <a:noFill/>
+          <a:ln/>
+        </p:spPr>
+        <p:txBody>
+          <a:bodyPr wrap="square" lIns="0" tIns="0" rIns="0" bIns="0" rtlCol="0" anchor="ctr"/>
+          <a:lstStyle/>
+          <a:p>
+            <a:pPr marL="0" indent="0">
+              <a:buNone/>
+            </a:pPr>
+            <a:r>
+              <a:rPr lang="en-US" sz="1200" dirty="0">
+                <a:solidFill>
+                  <a:srgbClr val="3D68EC"/>
+                </a:solidFill>
+                <a:latin typeface="General Sans" pitchFamily="34" charset="0"/>
+                <a:ea typeface="General Sans" pitchFamily="34" charset="-122"/>
+                <a:cs typeface="General Sans" pitchFamily="34" charset="-120"/>
+              </a:rPr>
+              <a:t>6 min</a:t>
+            </a:r>
+            <a:endParaRPr lang="en-US" sz="1200" dirty="0"/>
+          </a:p>
+        </p:txBody>
+      </p:sp>
+      <p:sp>
+        <p:nvSpPr>
+          <p:cNvPr id="45" name="Text 25"/>
+          <p:cNvSpPr txBox="1"/>
+          <p:nvPr/>
+        </p:nvSpPr>
+        <p:spPr>
+          <a:xfrm>
+            <a:off x="5303520" y="2532888"/>
+            <a:ext cx="6245352" cy="384048"/>
+          </a:xfrm>
+          <a:prstGeom prst="rect">
+            <a:avLst/>
+          </a:prstGeom>
+          <a:noFill/>
+          <a:ln/>
+        </p:spPr>
+        <p:txBody>
+          <a:bodyPr wrap="square" lIns="0" tIns="0" rIns="0" bIns="0" rtlCol="0" anchor="ctr"/>
+          <a:lstStyle/>
+          <a:p>
+            <a:pPr marL="0" indent="0">
+              <a:buNone/>
+            </a:pPr>
+            <a:r>
+              <a:rPr lang="en-US" sz="1100" dirty="0">
+                <a:solidFill>
+                  <a:srgbClr val="000000"/>
+                </a:solidFill>
+                <a:latin typeface="General Sans" pitchFamily="34" charset="0"/>
+                <a:ea typeface="General Sans" pitchFamily="34" charset="-122"/>
+                <a:cs typeface="General Sans" pitchFamily="34" charset="-120"/>
+              </a:rPr>
+              <a:t>Casusvraag, werken in tweetallen en het eindproduct</a:t>
+            </a:r>
+            <a:endParaRPr lang="en-US" sz="1100" dirty="0"/>
+          </a:p>
+        </p:txBody>
+      </p:sp>
+      <p:sp>
+        <p:nvSpPr>
+          <p:cNvPr id="46" name="Shape 19"/>
+          <p:cNvSpPr/>
+          <p:nvPr/>
+        </p:nvSpPr>
+        <p:spPr>
+          <a:xfrm>
+            <a:off x="548640" y="2953512"/>
+            <a:ext cx="11091672" cy="384048"/>
+          </a:xfrm>
+          <a:prstGeom prst="roundRect">
+            <a:avLst>
+              <a:gd name="adj" fmla="val 31818"/>
+            </a:avLst>
+          </a:prstGeom>
+          <a:solidFill>
+            <a:srgbClr val="FFFFFF"/>
+          </a:solidFill>
+          <a:ln w="12700">
+            <a:solidFill>
+              <a:srgbClr val="FFFFFF"/>
+            </a:solidFill>
+            <a:prstDash val="solid"/>
+          </a:ln>
+        </p:spPr>
+        <p:txBody>
+          <a:bodyPr/>
+          <a:lstStyle/>
+          <a:p>
+            <a:endParaRPr lang="en-NL"/>
+          </a:p>
+        </p:txBody>
+      </p:sp>
+      <p:sp>
+        <p:nvSpPr>
+          <p:cNvPr id="47" name="Shape 20"/>
+          <p:cNvSpPr/>
+          <p:nvPr/>
+        </p:nvSpPr>
+        <p:spPr>
+          <a:xfrm>
+            <a:off x="640080" y="2999232"/>
+            <a:ext cx="292608" cy="292608"/>
+          </a:xfrm>
+          <a:prstGeom prst="ellipse">
+            <a:avLst/>
+          </a:prstGeom>
+          <a:solidFill>
+            <a:srgbClr val="F4D74B"/>
+          </a:solidFill>
+          <a:ln w="12700">
+            <a:solidFill>
+              <a:srgbClr val="F4D74B"/>
+            </a:solidFill>
+            <a:prstDash val="solid"/>
+          </a:ln>
+        </p:spPr>
+        <p:txBody>
+          <a:bodyPr/>
+          <a:lstStyle/>
+          <a:p>
+            <a:endParaRPr lang="en-NL"/>
+          </a:p>
+        </p:txBody>
+      </p:sp>
+      <p:sp>
+        <p:nvSpPr>
+          <p:cNvPr id="48" name="Text 21"/>
+          <p:cNvSpPr txBox="1"/>
+          <p:nvPr/>
+        </p:nvSpPr>
+        <p:spPr>
+          <a:xfrm>
+            <a:off x="640080" y="2999232"/>
+            <a:ext cx="292608" cy="292608"/>
+          </a:xfrm>
+          <a:prstGeom prst="rect">
+            <a:avLst/>
+          </a:prstGeom>
+          <a:noFill/>
+          <a:ln/>
+        </p:spPr>
+        <p:txBody>
+          <a:bodyPr wrap="square" lIns="0" tIns="0" rIns="0" bIns="0" rtlCol="0" anchor="ctr"/>
+          <a:lstStyle/>
+          <a:p>
+            <a:pPr marL="0" indent="0" algn="ctr">
+              <a:buNone/>
+            </a:pPr>
+            <a:r>
+              <a:rPr lang="en-US" sz="1100" b="1" dirty="0">
+                <a:solidFill>
+                  <a:srgbClr val="3D68EC"/>
+                </a:solidFill>
+                <a:latin typeface="General Sans" pitchFamily="34" charset="0"/>
+                <a:ea typeface="General Sans" pitchFamily="34" charset="-122"/>
+                <a:cs typeface="General Sans" pitchFamily="34" charset="-120"/>
+              </a:rPr>
+              <a:t>4</a:t>
+            </a:r>
+            <a:endParaRPr lang="en-US" sz="1100" dirty="0"/>
+          </a:p>
+        </p:txBody>
+      </p:sp>
+      <p:sp>
+        <p:nvSpPr>
+          <p:cNvPr id="49" name="Text 22"/>
+          <p:cNvSpPr txBox="1"/>
+          <p:nvPr/>
+        </p:nvSpPr>
+        <p:spPr>
+          <a:xfrm>
+            <a:off x="1097280" y="2953512"/>
+            <a:ext cx="640080" cy="384048"/>
+          </a:xfrm>
+          <a:prstGeom prst="rect">
+            <a:avLst/>
+          </a:prstGeom>
+          <a:noFill/>
+          <a:ln/>
+        </p:spPr>
+        <p:txBody>
+          <a:bodyPr wrap="square" lIns="0" tIns="0" rIns="0" bIns="0" rtlCol="0" anchor="ctr"/>
+          <a:lstStyle/>
+          <a:p>
+            <a:pPr marL="0" indent="0">
+              <a:buNone/>
+            </a:pPr>
+            <a:r>
+              <a:rPr lang="en-US" sz="1200" b="1" dirty="0">
+                <a:solidFill>
+                  <a:srgbClr val="3D68EC"/>
+                </a:solidFill>
+                <a:latin typeface="General Sans" pitchFamily="34" charset="0"/>
+                <a:ea typeface="General Sans" pitchFamily="34" charset="-122"/>
+                <a:cs typeface="General Sans" pitchFamily="34" charset="-120"/>
+              </a:rPr>
+              <a:t>0:17</a:t>
+            </a:r>
+            <a:endParaRPr lang="en-US" sz="1200" dirty="0"/>
+          </a:p>
+        </p:txBody>
+      </p:sp>
+      <p:sp>
+        <p:nvSpPr>
+          <p:cNvPr id="50" name="Text 23"/>
+          <p:cNvSpPr txBox="1"/>
+          <p:nvPr/>
+        </p:nvSpPr>
+        <p:spPr>
+          <a:xfrm>
+            <a:off x="1783080" y="2953512"/>
+            <a:ext cx="2834640" cy="384048"/>
+          </a:xfrm>
+          <a:prstGeom prst="rect">
+            <a:avLst/>
+          </a:prstGeom>
+          <a:noFill/>
+          <a:ln/>
+        </p:spPr>
+        <p:txBody>
+          <a:bodyPr wrap="square" lIns="0" tIns="0" rIns="0" bIns="0" rtlCol="0" anchor="ctr"/>
+          <a:lstStyle/>
+          <a:p>
+            <a:pPr marL="0" indent="0">
+              <a:buNone/>
+            </a:pPr>
+            <a:r>
+              <a:rPr lang="en-US" sz="1300" b="1" dirty="0">
+                <a:solidFill>
+                  <a:srgbClr val="000000"/>
+                </a:solidFill>
+                <a:latin typeface="General Sans" pitchFamily="34" charset="0"/>
+                <a:ea typeface="General Sans" pitchFamily="34" charset="-122"/>
+                <a:cs typeface="General Sans" pitchFamily="34" charset="-120"/>
+              </a:rPr>
+              <a:t>Skills en prompts</a:t>
+            </a:r>
+            <a:endParaRPr lang="en-US" sz="1300" dirty="0"/>
+          </a:p>
+        </p:txBody>
+      </p:sp>
+      <p:sp>
+        <p:nvSpPr>
+          <p:cNvPr id="51" name="Text 24"/>
+          <p:cNvSpPr txBox="1"/>
+          <p:nvPr/>
+        </p:nvSpPr>
+        <p:spPr>
+          <a:xfrm>
+            <a:off x="4617720" y="2953512"/>
+            <a:ext cx="640080" cy="384048"/>
+          </a:xfrm>
+          <a:prstGeom prst="rect">
+            <a:avLst/>
+          </a:prstGeom>
+          <a:noFill/>
+          <a:ln/>
+        </p:spPr>
+        <p:txBody>
+          <a:bodyPr wrap="square" lIns="0" tIns="0" rIns="0" bIns="0" rtlCol="0" anchor="ctr"/>
+          <a:lstStyle/>
+          <a:p>
+            <a:pPr marL="0" indent="0">
+              <a:buNone/>
+            </a:pPr>
+            <a:r>
+              <a:rPr lang="en-US" sz="1200" dirty="0">
+                <a:solidFill>
+                  <a:srgbClr val="3D68EC"/>
+                </a:solidFill>
+                <a:latin typeface="General Sans" pitchFamily="34" charset="0"/>
+                <a:ea typeface="General Sans" pitchFamily="34" charset="-122"/>
+                <a:cs typeface="General Sans" pitchFamily="34" charset="-120"/>
+              </a:rPr>
+              <a:t>8 min</a:t>
+            </a:r>
+            <a:endParaRPr lang="en-US" sz="1200" dirty="0"/>
+          </a:p>
+        </p:txBody>
+      </p:sp>
+      <p:sp>
+        <p:nvSpPr>
+          <p:cNvPr id="52" name="Text 25"/>
+          <p:cNvSpPr txBox="1"/>
+          <p:nvPr/>
+        </p:nvSpPr>
+        <p:spPr>
+          <a:xfrm>
+            <a:off x="5303520" y="2953512"/>
+            <a:ext cx="6245352" cy="384048"/>
+          </a:xfrm>
+          <a:prstGeom prst="rect">
+            <a:avLst/>
+          </a:prstGeom>
+          <a:noFill/>
+          <a:ln/>
+        </p:spPr>
+        <p:txBody>
+          <a:bodyPr wrap="square" lIns="0" tIns="0" rIns="0" bIns="0" rtlCol="0" anchor="ctr"/>
+          <a:lstStyle/>
+          <a:p>
+            <a:pPr marL="0" indent="0">
+              <a:buNone/>
+            </a:pPr>
+            <a:r>
+              <a:rPr lang="en-US" sz="1100" dirty="0">
+                <a:solidFill>
+                  <a:srgbClr val="000000"/>
+                </a:solidFill>
+                <a:latin typeface="General Sans" pitchFamily="34" charset="0"/>
+                <a:ea typeface="General Sans" pitchFamily="34" charset="-122"/>
+                <a:cs typeface="General Sans" pitchFamily="34" charset="-120"/>
+              </a:rPr>
+              <a:t>Wat is een skill, en waarom loont het om er één te maken?</a:t>
+            </a:r>
+            <a:endParaRPr lang="en-US" sz="1100" dirty="0"/>
+          </a:p>
+        </p:txBody>
+      </p:sp>
+      <p:sp>
+        <p:nvSpPr>
+          <p:cNvPr id="53" name="Shape 19"/>
+          <p:cNvSpPr/>
+          <p:nvPr/>
+        </p:nvSpPr>
+        <p:spPr>
+          <a:xfrm>
+            <a:off x="548640" y="3374136"/>
+            <a:ext cx="11091672" cy="384048"/>
+          </a:xfrm>
+          <a:prstGeom prst="roundRect">
+            <a:avLst>
+              <a:gd name="adj" fmla="val 31818"/>
+            </a:avLst>
+          </a:prstGeom>
+          <a:solidFill>
+            <a:srgbClr val="FFFFFF"/>
+          </a:solidFill>
+          <a:ln w="12700">
+            <a:solidFill>
+              <a:srgbClr val="FFFFFF"/>
+            </a:solidFill>
+            <a:prstDash val="solid"/>
+          </a:ln>
+        </p:spPr>
+        <p:txBody>
+          <a:bodyPr/>
+          <a:lstStyle/>
+          <a:p>
+            <a:endParaRPr lang="en-NL"/>
+          </a:p>
+        </p:txBody>
+      </p:sp>
+      <p:sp>
+        <p:nvSpPr>
+          <p:cNvPr id="54" name="Shape 20"/>
+          <p:cNvSpPr/>
+          <p:nvPr/>
+        </p:nvSpPr>
+        <p:spPr>
+          <a:xfrm>
+            <a:off x="640080" y="3419856"/>
+            <a:ext cx="292608" cy="292608"/>
+          </a:xfrm>
+          <a:prstGeom prst="ellipse">
+            <a:avLst/>
+          </a:prstGeom>
+          <a:solidFill>
+            <a:srgbClr val="F4D74B"/>
+          </a:solidFill>
+          <a:ln w="12700">
+            <a:solidFill>
+              <a:srgbClr val="F4D74B"/>
+            </a:solidFill>
+            <a:prstDash val="solid"/>
+          </a:ln>
+        </p:spPr>
+        <p:txBody>
+          <a:bodyPr/>
+          <a:lstStyle/>
+          <a:p>
+            <a:endParaRPr lang="en-NL"/>
+          </a:p>
+        </p:txBody>
+      </p:sp>
+      <p:sp>
+        <p:nvSpPr>
+          <p:cNvPr id="55" name="Text 21"/>
+          <p:cNvSpPr txBox="1"/>
+          <p:nvPr/>
+        </p:nvSpPr>
+        <p:spPr>
+          <a:xfrm>
+            <a:off x="640080" y="3419856"/>
+            <a:ext cx="292608" cy="292608"/>
+          </a:xfrm>
+          <a:prstGeom prst="rect">
+            <a:avLst/>
+          </a:prstGeom>
+          <a:noFill/>
+          <a:ln/>
+        </p:spPr>
+        <p:txBody>
+          <a:bodyPr wrap="square" lIns="0" tIns="0" rIns="0" bIns="0" rtlCol="0" anchor="ctr"/>
+          <a:lstStyle/>
+          <a:p>
+            <a:pPr marL="0" indent="0" algn="ctr">
+              <a:buNone/>
+            </a:pPr>
+            <a:r>
+              <a:rPr lang="en-US" sz="1100" b="1" dirty="0">
+                <a:solidFill>
+                  <a:srgbClr val="3D68EC"/>
+                </a:solidFill>
+                <a:latin typeface="General Sans" pitchFamily="34" charset="0"/>
+                <a:ea typeface="General Sans" pitchFamily="34" charset="-122"/>
+                <a:cs typeface="General Sans" pitchFamily="34" charset="-120"/>
+              </a:rPr>
+              <a:t>5</a:t>
+            </a:r>
+            <a:endParaRPr lang="en-US" sz="1100" dirty="0"/>
+          </a:p>
+        </p:txBody>
+      </p:sp>
+      <p:sp>
+        <p:nvSpPr>
+          <p:cNvPr id="56" name="Text 22"/>
+          <p:cNvSpPr txBox="1"/>
+          <p:nvPr/>
+        </p:nvSpPr>
+        <p:spPr>
+          <a:xfrm>
+            <a:off x="1097280" y="3374136"/>
+            <a:ext cx="640080" cy="384048"/>
+          </a:xfrm>
+          <a:prstGeom prst="rect">
+            <a:avLst/>
+          </a:prstGeom>
+          <a:noFill/>
+          <a:ln/>
+        </p:spPr>
+        <p:txBody>
+          <a:bodyPr wrap="square" lIns="0" tIns="0" rIns="0" bIns="0" rtlCol="0" anchor="ctr"/>
+          <a:lstStyle/>
+          <a:p>
+            <a:pPr marL="0" indent="0">
+              <a:buNone/>
+            </a:pPr>
+            <a:r>
+              <a:rPr lang="en-US" sz="1200" b="1" dirty="0">
+                <a:solidFill>
+                  <a:srgbClr val="3D68EC"/>
+                </a:solidFill>
+                <a:latin typeface="General Sans" pitchFamily="34" charset="0"/>
+                <a:ea typeface="General Sans" pitchFamily="34" charset="-122"/>
+                <a:cs typeface="General Sans" pitchFamily="34" charset="-120"/>
+              </a:rPr>
+              <a:t>0:25</a:t>
+            </a:r>
+            <a:endParaRPr lang="en-US" sz="1200" dirty="0"/>
+          </a:p>
+        </p:txBody>
+      </p:sp>
+      <p:sp>
+        <p:nvSpPr>
+          <p:cNvPr id="57" name="Text 23"/>
+          <p:cNvSpPr txBox="1"/>
+          <p:nvPr/>
+        </p:nvSpPr>
+        <p:spPr>
+          <a:xfrm>
+            <a:off x="1783080" y="3374136"/>
+            <a:ext cx="2834640" cy="384048"/>
+          </a:xfrm>
+          <a:prstGeom prst="rect">
+            <a:avLst/>
+          </a:prstGeom>
+          <a:noFill/>
+          <a:ln/>
+        </p:spPr>
+        <p:txBody>
+          <a:bodyPr wrap="square" lIns="0" tIns="0" rIns="0" bIns="0" rtlCol="0" anchor="ctr"/>
+          <a:lstStyle/>
+          <a:p>
+            <a:pPr marL="0" indent="0">
+              <a:buNone/>
+            </a:pPr>
+            <a:r>
+              <a:rPr lang="en-US" sz="1300" b="1" dirty="0">
+                <a:solidFill>
+                  <a:srgbClr val="000000"/>
+                </a:solidFill>
+                <a:latin typeface="General Sans" pitchFamily="34" charset="0"/>
+                <a:ea typeface="General Sans" pitchFamily="34" charset="-122"/>
+                <a:cs typeface="General Sans" pitchFamily="34" charset="-120"/>
+              </a:rPr>
+              <a:t>Devcontainer + voorbeeldprompt</a:t>
+            </a:r>
+            <a:endParaRPr lang="en-US" sz="1300" dirty="0"/>
+          </a:p>
+        </p:txBody>
+      </p:sp>
+      <p:sp>
+        <p:nvSpPr>
+          <p:cNvPr id="58" name="Text 24"/>
+          <p:cNvSpPr txBox="1"/>
+          <p:nvPr/>
+        </p:nvSpPr>
+        <p:spPr>
+          <a:xfrm>
+            <a:off x="4617720" y="3374136"/>
+            <a:ext cx="640080" cy="384048"/>
+          </a:xfrm>
+          <a:prstGeom prst="rect">
+            <a:avLst/>
+          </a:prstGeom>
+          <a:noFill/>
+          <a:ln/>
+        </p:spPr>
+        <p:txBody>
+          <a:bodyPr wrap="square" lIns="0" tIns="0" rIns="0" bIns="0" rtlCol="0" anchor="ctr"/>
+          <a:lstStyle/>
+          <a:p>
+            <a:pPr marL="0" indent="0">
+              <a:buNone/>
+            </a:pPr>
+            <a:r>
+              <a:rPr lang="en-US" sz="1200" dirty="0">
+                <a:solidFill>
+                  <a:srgbClr val="3D68EC"/>
+                </a:solidFill>
+                <a:latin typeface="General Sans" pitchFamily="34" charset="0"/>
+                <a:ea typeface="General Sans" pitchFamily="34" charset="-122"/>
+                <a:cs typeface="General Sans" pitchFamily="34" charset="-120"/>
+              </a:rPr>
+              <a:t>5 min</a:t>
+            </a:r>
+            <a:endParaRPr lang="en-US" sz="1200" dirty="0"/>
+          </a:p>
+        </p:txBody>
+      </p:sp>
+      <p:sp>
+        <p:nvSpPr>
+          <p:cNvPr id="59" name="Text 25"/>
+          <p:cNvSpPr txBox="1"/>
+          <p:nvPr/>
+        </p:nvSpPr>
+        <p:spPr>
+          <a:xfrm>
+            <a:off x="5303520" y="3374136"/>
+            <a:ext cx="6245352" cy="384048"/>
+          </a:xfrm>
+          <a:prstGeom prst="rect">
+            <a:avLst/>
+          </a:prstGeom>
+          <a:noFill/>
+          <a:ln/>
+        </p:spPr>
+        <p:txBody>
+          <a:bodyPr wrap="square" lIns="0" tIns="0" rIns="0" bIns="0" rtlCol="0" anchor="ctr"/>
+          <a:lstStyle/>
+          <a:p>
+            <a:pPr marL="0" indent="0">
+              <a:buNone/>
+            </a:pPr>
+            <a:r>
+              <a:rPr lang="en-US" sz="1100" dirty="0">
+                <a:solidFill>
+                  <a:srgbClr val="000000"/>
+                </a:solidFill>
+                <a:latin typeface="General Sans" pitchFamily="34" charset="0"/>
+                <a:ea typeface="General Sans" pitchFamily="34" charset="-122"/>
+                <a:cs typeface="General Sans" pitchFamily="34" charset="-120"/>
+              </a:rPr>
+              <a:t>Kijk hoe je de agent aanspreekt</a:t>
+            </a:r>
+            <a:endParaRPr lang="en-US" sz="1100" dirty="0"/>
+          </a:p>
+        </p:txBody>
+      </p:sp>
+      <p:sp>
+        <p:nvSpPr>
+          <p:cNvPr id="60" name="Shape 33"/>
+          <p:cNvSpPr/>
+          <p:nvPr/>
+        </p:nvSpPr>
+        <p:spPr>
+          <a:xfrm>
+            <a:off x="548640" y="3794760"/>
+            <a:ext cx="11091672" cy="384048"/>
+          </a:xfrm>
+          <a:prstGeom prst="roundRect">
+            <a:avLst>
+              <a:gd name="adj" fmla="val 31818"/>
+            </a:avLst>
+          </a:prstGeom>
+          <a:solidFill>
+            <a:srgbClr val="FFFFFF"/>
+          </a:solidFill>
+          <a:ln w="12700">
+            <a:solidFill>
+              <a:srgbClr val="FFFFFF"/>
+            </a:solidFill>
+            <a:prstDash val="solid"/>
+          </a:ln>
+        </p:spPr>
+        <p:txBody>
+          <a:bodyPr/>
+          <a:lstStyle/>
+          <a:p>
+            <a:endParaRPr lang="en-NL"/>
+          </a:p>
+        </p:txBody>
+      </p:sp>
+      <p:sp>
+        <p:nvSpPr>
+          <p:cNvPr id="61" name="Shape 34"/>
+          <p:cNvSpPr/>
+          <p:nvPr/>
+        </p:nvSpPr>
+        <p:spPr>
+          <a:xfrm>
+            <a:off x="640080" y="3840480"/>
+            <a:ext cx="292608" cy="292608"/>
+          </a:xfrm>
+          <a:prstGeom prst="ellipse">
+            <a:avLst/>
+          </a:prstGeom>
+          <a:solidFill>
+            <a:srgbClr val="3D68EC"/>
+          </a:solidFill>
+          <a:ln w="12700">
+            <a:solidFill>
+              <a:srgbClr val="3D68EC"/>
+            </a:solidFill>
+            <a:prstDash val="solid"/>
+          </a:ln>
+        </p:spPr>
+        <p:txBody>
+          <a:bodyPr/>
+          <a:lstStyle/>
+          <a:p>
+            <a:endParaRPr lang="en-NL"/>
+          </a:p>
+        </p:txBody>
+      </p:sp>
+      <p:sp>
+        <p:nvSpPr>
+          <p:cNvPr id="62" name="Text 35"/>
+          <p:cNvSpPr txBox="1"/>
+          <p:nvPr/>
+        </p:nvSpPr>
+        <p:spPr>
+          <a:xfrm>
+            <a:off x="640080" y="3840480"/>
+            <a:ext cx="292608" cy="292608"/>
+          </a:xfrm>
+          <a:prstGeom prst="rect">
+            <a:avLst/>
+          </a:prstGeom>
+          <a:noFill/>
+          <a:ln/>
+        </p:spPr>
+        <p:txBody>
+          <a:bodyPr wrap="square" lIns="0" tIns="0" rIns="0" bIns="0" rtlCol="0" anchor="ctr"/>
+          <a:lstStyle/>
+          <a:p>
+            <a:pPr marL="0" indent="0" algn="ctr">
+              <a:buNone/>
+            </a:pPr>
+            <a:r>
+              <a:rPr lang="en-US" sz="1100" b="1" dirty="0">
+                <a:solidFill>
+                  <a:srgbClr val="F4D74B"/>
+                </a:solidFill>
+                <a:latin typeface="General Sans" pitchFamily="34" charset="0"/>
+                <a:ea typeface="General Sans" pitchFamily="34" charset="-122"/>
+                <a:cs typeface="General Sans" pitchFamily="34" charset="-120"/>
+              </a:rPr>
+              <a:t>6</a:t>
+            </a:r>
+            <a:endParaRPr lang="en-US" sz="1100" dirty="0"/>
+          </a:p>
+        </p:txBody>
+      </p:sp>
+      <p:sp>
+        <p:nvSpPr>
+          <p:cNvPr id="63" name="Text 36"/>
+          <p:cNvSpPr txBox="1"/>
+          <p:nvPr/>
+        </p:nvSpPr>
+        <p:spPr>
+          <a:xfrm>
+            <a:off x="1097280" y="3794760"/>
+            <a:ext cx="640080" cy="384048"/>
+          </a:xfrm>
+          <a:prstGeom prst="rect">
+            <a:avLst/>
+          </a:prstGeom>
+          <a:noFill/>
+          <a:ln/>
+        </p:spPr>
+        <p:txBody>
+          <a:bodyPr wrap="square" lIns="0" tIns="0" rIns="0" bIns="0" rtlCol="0" anchor="ctr"/>
+          <a:lstStyle/>
+          <a:p>
+            <a:pPr marL="0" indent="0">
+              <a:buNone/>
+            </a:pPr>
+            <a:r>
+              <a:rPr lang="en-US" sz="1200" b="1" dirty="0">
+                <a:solidFill>
+                  <a:srgbClr val="3D68EC"/>
+                </a:solidFill>
+                <a:latin typeface="General Sans" pitchFamily="34" charset="0"/>
+                <a:ea typeface="General Sans" pitchFamily="34" charset="-122"/>
+                <a:cs typeface="General Sans" pitchFamily="34" charset="-120"/>
+              </a:rPr>
+              <a:t>0:30</a:t>
+            </a:r>
+            <a:endParaRPr lang="en-US" sz="1200" dirty="0"/>
+          </a:p>
+        </p:txBody>
+      </p:sp>
+      <p:sp>
+        <p:nvSpPr>
+          <p:cNvPr id="64" name="Text 37"/>
+          <p:cNvSpPr txBox="1"/>
+          <p:nvPr/>
+        </p:nvSpPr>
+        <p:spPr>
+          <a:xfrm>
+            <a:off x="1783080" y="3794760"/>
+            <a:ext cx="2834640" cy="384048"/>
+          </a:xfrm>
+          <a:prstGeom prst="rect">
+            <a:avLst/>
+          </a:prstGeom>
+          <a:noFill/>
+          <a:ln/>
+        </p:spPr>
+        <p:txBody>
+          <a:bodyPr wrap="square" lIns="0" tIns="0" rIns="0" bIns="0" rtlCol="0" anchor="ctr"/>
+          <a:lstStyle/>
+          <a:p>
+            <a:pPr marL="0" indent="0">
+              <a:buNone/>
+            </a:pPr>
+            <a:r>
+              <a:rPr lang="en-US" sz="1300" b="1" dirty="0">
+                <a:solidFill>
+                  <a:srgbClr val="000000"/>
+                </a:solidFill>
+                <a:latin typeface="General Sans" pitchFamily="34" charset="0"/>
+                <a:ea typeface="General Sans" pitchFamily="34" charset="-122"/>
+                <a:cs typeface="General Sans" pitchFamily="34" charset="-120"/>
+              </a:rPr>
+              <a:t>Ronde 1: data exploratie</a:t>
+            </a:r>
+            <a:endParaRPr lang="en-US" sz="1300" dirty="0"/>
+          </a:p>
+        </p:txBody>
+      </p:sp>
+      <p:sp>
+        <p:nvSpPr>
+          <p:cNvPr id="65" name="Text 38"/>
+          <p:cNvSpPr txBox="1"/>
+          <p:nvPr/>
+        </p:nvSpPr>
+        <p:spPr>
+          <a:xfrm>
+            <a:off x="4617720" y="3794760"/>
+            <a:ext cx="640080" cy="384048"/>
+          </a:xfrm>
+          <a:prstGeom prst="rect">
+            <a:avLst/>
+          </a:prstGeom>
+          <a:noFill/>
+          <a:ln/>
+        </p:spPr>
+        <p:txBody>
+          <a:bodyPr wrap="square" lIns="0" tIns="0" rIns="0" bIns="0" rtlCol="0" anchor="ctr"/>
+          <a:lstStyle/>
+          <a:p>
+            <a:pPr marL="0" indent="0">
+              <a:buNone/>
+            </a:pPr>
+            <a:r>
+              <a:rPr lang="en-US" sz="1200" dirty="0">
+                <a:solidFill>
+                  <a:srgbClr val="3D68EC"/>
+                </a:solidFill>
+                <a:latin typeface="General Sans" pitchFamily="34" charset="0"/>
+                <a:ea typeface="General Sans" pitchFamily="34" charset="-122"/>
+                <a:cs typeface="General Sans" pitchFamily="34" charset="-120"/>
+              </a:rPr>
+              <a:t>22 min</a:t>
+            </a:r>
+            <a:endParaRPr lang="en-US" sz="1200" dirty="0"/>
+          </a:p>
+        </p:txBody>
+      </p:sp>
+      <p:sp>
+        <p:nvSpPr>
+          <p:cNvPr id="66" name="Text 39"/>
+          <p:cNvSpPr txBox="1"/>
+          <p:nvPr/>
+        </p:nvSpPr>
+        <p:spPr>
+          <a:xfrm>
+            <a:off x="5303520" y="3794760"/>
+            <a:ext cx="6245352" cy="384048"/>
+          </a:xfrm>
+          <a:prstGeom prst="rect">
+            <a:avLst/>
+          </a:prstGeom>
+          <a:noFill/>
+          <a:ln/>
+        </p:spPr>
+        <p:txBody>
+          <a:bodyPr wrap="square" lIns="0" tIns="0" rIns="0" bIns="0" rtlCol="0" anchor="ctr"/>
+          <a:lstStyle/>
+          <a:p>
+            <a:pPr marL="0" indent="0">
+              <a:buNone/>
+            </a:pPr>
+            <a:r>
+              <a:rPr lang="en-US" sz="1100" dirty="0">
+                <a:solidFill>
+                  <a:srgbClr val="000000"/>
+                </a:solidFill>
+                <a:latin typeface="General Sans" pitchFamily="34" charset="0"/>
+                <a:ea typeface="General Sans" pitchFamily="34" charset="-122"/>
+                <a:cs typeface="General Sans" pitchFamily="34" charset="-120"/>
+              </a:rPr>
+              <a:t>Verken data en codebook, check kleine groepen en definities</a:t>
+            </a:r>
+            <a:endParaRPr lang="en-US" sz="1100" dirty="0"/>
+          </a:p>
+        </p:txBody>
+      </p:sp>
+      <p:sp>
+        <p:nvSpPr>
+          <p:cNvPr id="67" name="Shape 40"/>
+          <p:cNvSpPr/>
+          <p:nvPr/>
+        </p:nvSpPr>
+        <p:spPr>
+          <a:xfrm>
+            <a:off x="548640" y="4215384"/>
+            <a:ext cx="11091672" cy="384048"/>
+          </a:xfrm>
+          <a:prstGeom prst="roundRect">
+            <a:avLst>
+              <a:gd name="adj" fmla="val 31818"/>
+            </a:avLst>
+          </a:prstGeom>
+          <a:solidFill>
+            <a:srgbClr val="FFFFFF"/>
+          </a:solidFill>
+          <a:ln w="12700">
+            <a:solidFill>
+              <a:srgbClr val="FFFFFF"/>
+            </a:solidFill>
+            <a:prstDash val="solid"/>
+          </a:ln>
+        </p:spPr>
+        <p:txBody>
+          <a:bodyPr/>
+          <a:lstStyle/>
+          <a:p>
+            <a:endParaRPr lang="en-NL"/>
+          </a:p>
+        </p:txBody>
+      </p:sp>
+      <p:sp>
+        <p:nvSpPr>
+          <p:cNvPr id="68" name="Shape 41"/>
+          <p:cNvSpPr/>
+          <p:nvPr/>
+        </p:nvSpPr>
+        <p:spPr>
+          <a:xfrm>
+            <a:off x="640080" y="4261104"/>
+            <a:ext cx="292608" cy="292608"/>
+          </a:xfrm>
+          <a:prstGeom prst="ellipse">
+            <a:avLst/>
+          </a:prstGeom>
+          <a:solidFill>
+            <a:srgbClr val="DD784B"/>
+          </a:solidFill>
+          <a:ln w="12700">
+            <a:solidFill>
+              <a:srgbClr val="DD784B"/>
+            </a:solidFill>
+            <a:prstDash val="solid"/>
+          </a:ln>
+        </p:spPr>
+        <p:txBody>
+          <a:bodyPr/>
+          <a:lstStyle/>
+          <a:p>
+            <a:endParaRPr lang="en-NL"/>
+          </a:p>
+        </p:txBody>
+      </p:sp>
+      <p:sp>
+        <p:nvSpPr>
+          <p:cNvPr id="69" name="Text 42"/>
+          <p:cNvSpPr txBox="1"/>
+          <p:nvPr/>
+        </p:nvSpPr>
+        <p:spPr>
+          <a:xfrm>
+            <a:off x="640080" y="4261104"/>
+            <a:ext cx="292608" cy="292608"/>
+          </a:xfrm>
+          <a:prstGeom prst="rect">
+            <a:avLst/>
+          </a:prstGeom>
+          <a:noFill/>
+          <a:ln/>
+        </p:spPr>
+        <p:txBody>
+          <a:bodyPr wrap="square" lIns="0" tIns="0" rIns="0" bIns="0" rtlCol="0" anchor="ctr"/>
+          <a:lstStyle/>
+          <a:p>
+            <a:pPr marL="0" indent="0" algn="ctr">
+              <a:buNone/>
+            </a:pPr>
+            <a:r>
+              <a:rPr lang="en-US" sz="1100" b="1" dirty="0">
+                <a:solidFill>
+                  <a:srgbClr val="000000"/>
+                </a:solidFill>
+                <a:latin typeface="General Sans" pitchFamily="34" charset="0"/>
+                <a:ea typeface="General Sans" pitchFamily="34" charset="-122"/>
+                <a:cs typeface="General Sans" pitchFamily="34" charset="-120"/>
+              </a:rPr>
+              <a:t>7</a:t>
+            </a:r>
+            <a:endParaRPr lang="en-US" sz="1100" dirty="0"/>
+          </a:p>
+        </p:txBody>
+      </p:sp>
+      <p:sp>
+        <p:nvSpPr>
+          <p:cNvPr id="70" name="Text 43"/>
+          <p:cNvSpPr txBox="1"/>
+          <p:nvPr/>
+        </p:nvSpPr>
+        <p:spPr>
+          <a:xfrm>
+            <a:off x="1097280" y="4215384"/>
+            <a:ext cx="640080" cy="384048"/>
+          </a:xfrm>
+          <a:prstGeom prst="rect">
+            <a:avLst/>
+          </a:prstGeom>
+          <a:noFill/>
+          <a:ln/>
+        </p:spPr>
+        <p:txBody>
+          <a:bodyPr wrap="square" lIns="0" tIns="0" rIns="0" bIns="0" rtlCol="0" anchor="ctr"/>
+          <a:lstStyle/>
+          <a:p>
+            <a:pPr marL="0" indent="0">
+              <a:buNone/>
+            </a:pPr>
+            <a:r>
+              <a:rPr lang="en-US" sz="1200" b="1" dirty="0">
+                <a:solidFill>
+                  <a:srgbClr val="3D68EC"/>
+                </a:solidFill>
+                <a:latin typeface="General Sans" pitchFamily="34" charset="0"/>
+                <a:ea typeface="General Sans" pitchFamily="34" charset="-122"/>
+                <a:cs typeface="General Sans" pitchFamily="34" charset="-120"/>
+              </a:rPr>
+              <a:t>0:52</a:t>
+            </a:r>
+            <a:endParaRPr lang="en-US" sz="1200" dirty="0"/>
+          </a:p>
+        </p:txBody>
+      </p:sp>
+      <p:sp>
+        <p:nvSpPr>
+          <p:cNvPr id="71" name="Text 44"/>
+          <p:cNvSpPr txBox="1"/>
+          <p:nvPr/>
+        </p:nvSpPr>
+        <p:spPr>
+          <a:xfrm>
+            <a:off x="1783080" y="4215384"/>
+            <a:ext cx="2834640" cy="384048"/>
+          </a:xfrm>
+          <a:prstGeom prst="rect">
+            <a:avLst/>
+          </a:prstGeom>
+          <a:noFill/>
+          <a:ln/>
+        </p:spPr>
+        <p:txBody>
+          <a:bodyPr wrap="square" lIns="0" tIns="0" rIns="0" bIns="0" rtlCol="0" anchor="ctr"/>
+          <a:lstStyle/>
+          <a:p>
+            <a:pPr marL="0" indent="0">
+              <a:buNone/>
+            </a:pPr>
+            <a:r>
+              <a:rPr lang="en-US" sz="1300" b="1" dirty="0">
+                <a:solidFill>
+                  <a:srgbClr val="000000"/>
+                </a:solidFill>
+                <a:latin typeface="General Sans" pitchFamily="34" charset="0"/>
+                <a:ea typeface="General Sans" pitchFamily="34" charset="-122"/>
+                <a:cs typeface="General Sans" pitchFamily="34" charset="-120"/>
+              </a:rPr>
+              <a:t>Spiegelmoment 1</a:t>
+            </a:r>
+            <a:endParaRPr lang="en-US" sz="1300" dirty="0"/>
+          </a:p>
+        </p:txBody>
+      </p:sp>
+      <p:sp>
+        <p:nvSpPr>
+          <p:cNvPr id="72" name="Text 45"/>
+          <p:cNvSpPr txBox="1"/>
+          <p:nvPr/>
+        </p:nvSpPr>
+        <p:spPr>
+          <a:xfrm>
+            <a:off x="4617720" y="4215384"/>
+            <a:ext cx="640080" cy="384048"/>
+          </a:xfrm>
+          <a:prstGeom prst="rect">
+            <a:avLst/>
+          </a:prstGeom>
+          <a:noFill/>
+          <a:ln/>
+        </p:spPr>
+        <p:txBody>
+          <a:bodyPr wrap="square" lIns="0" tIns="0" rIns="0" bIns="0" rtlCol="0" anchor="ctr"/>
+          <a:lstStyle/>
+          <a:p>
+            <a:pPr marL="0" indent="0">
+              <a:buNone/>
+            </a:pPr>
+            <a:r>
+              <a:rPr lang="en-US" sz="1200" dirty="0">
+                <a:solidFill>
+                  <a:srgbClr val="3D68EC"/>
+                </a:solidFill>
+                <a:latin typeface="General Sans" pitchFamily="34" charset="0"/>
+                <a:ea typeface="General Sans" pitchFamily="34" charset="-122"/>
+                <a:cs typeface="General Sans" pitchFamily="34" charset="-120"/>
+              </a:rPr>
+              <a:t>15 min</a:t>
+            </a:r>
+            <a:endParaRPr lang="en-US" sz="1200" dirty="0"/>
+          </a:p>
+        </p:txBody>
+      </p:sp>
+      <p:sp>
+        <p:nvSpPr>
+          <p:cNvPr id="73" name="Text 46"/>
+          <p:cNvSpPr txBox="1"/>
+          <p:nvPr/>
+        </p:nvSpPr>
+        <p:spPr>
+          <a:xfrm>
+            <a:off x="5303520" y="4215384"/>
+            <a:ext cx="4297680" cy="384048"/>
+          </a:xfrm>
+          <a:prstGeom prst="rect">
+            <a:avLst/>
+          </a:prstGeom>
+          <a:noFill/>
+          <a:ln/>
+        </p:spPr>
+        <p:txBody>
+          <a:bodyPr wrap="square" lIns="0" tIns="0" rIns="0" bIns="0" rtlCol="0" anchor="ctr"/>
+          <a:lstStyle/>
+          <a:p>
+            <a:pPr marL="0" indent="0">
+              <a:buNone/>
+            </a:pPr>
+            <a:r>
+              <a:rPr lang="en-US" sz="1100" dirty="0">
+                <a:solidFill>
+                  <a:srgbClr val="000000"/>
+                </a:solidFill>
+                <a:latin typeface="General Sans" pitchFamily="34" charset="0"/>
+                <a:ea typeface="General Sans" pitchFamily="34" charset="-122"/>
+                <a:cs typeface="General Sans" pitchFamily="34" charset="-120"/>
+              </a:rPr>
+              <a:t>Bespreek de skill: wat zit erin, wat deed jij anders?</a:t>
+            </a:r>
+            <a:endParaRPr lang="en-US" sz="1100" dirty="0"/>
+          </a:p>
+        </p:txBody>
+      </p:sp>
+      <p:sp>
+        <p:nvSpPr>
+          <p:cNvPr id="74" name="Shape 47"/>
+          <p:cNvSpPr/>
+          <p:nvPr/>
+        </p:nvSpPr>
+        <p:spPr>
+          <a:xfrm>
+            <a:off x="9646920" y="4274820"/>
+            <a:ext cx="1874520" cy="265176"/>
+          </a:xfrm>
+          <a:prstGeom prst="roundRect">
+            <a:avLst>
+              <a:gd name="adj" fmla="val 50000"/>
+            </a:avLst>
+          </a:prstGeom>
+          <a:solidFill>
+            <a:srgbClr val="3D68EC"/>
+          </a:solidFill>
+          <a:ln w="12700">
+            <a:solidFill>
+              <a:srgbClr val="3D68EC"/>
+            </a:solidFill>
+            <a:prstDash val="solid"/>
+          </a:ln>
+        </p:spPr>
+        <p:txBody>
+          <a:bodyPr/>
+          <a:lstStyle/>
+          <a:p>
+            <a:endParaRPr lang="en-NL"/>
+          </a:p>
+        </p:txBody>
+      </p:sp>
+      <p:sp>
+        <p:nvSpPr>
+          <p:cNvPr id="75" name="Text 48"/>
+          <p:cNvSpPr txBox="1"/>
+          <p:nvPr/>
+        </p:nvSpPr>
+        <p:spPr>
+          <a:xfrm>
+            <a:off x="9646920" y="4274820"/>
+            <a:ext cx="1874520" cy="265176"/>
+          </a:xfrm>
+          <a:prstGeom prst="rect">
+            <a:avLst/>
+          </a:prstGeom>
+          <a:noFill/>
+          <a:ln/>
+        </p:spPr>
+        <p:txBody>
+          <a:bodyPr wrap="square" lIns="0" tIns="0" rIns="0" bIns="0" rtlCol="0" anchor="ctr"/>
+          <a:lstStyle/>
+          <a:p>
+            <a:pPr marL="0" indent="0" algn="ctr">
+              <a:buNone/>
+            </a:pPr>
+            <a:r>
+              <a:rPr lang="en-US" sz="1000" b="1" dirty="0">
+                <a:solidFill>
+                  <a:srgbClr val="F4D74B"/>
+                </a:solidFill>
+                <a:latin typeface="General Sans" pitchFamily="34" charset="0"/>
+                <a:ea typeface="General Sans" pitchFamily="34" charset="-122"/>
+                <a:cs typeface="General Sans" pitchFamily="34" charset="-120"/>
+              </a:rPr>
+              <a:t>Skill 1 doet ronde 1</a:t>
+            </a:r>
+            <a:endParaRPr lang="en-US" sz="1000" dirty="0"/>
+          </a:p>
+        </p:txBody>
+      </p:sp>
+      <p:sp>
+        <p:nvSpPr>
+          <p:cNvPr id="76" name="Shape 33"/>
+          <p:cNvSpPr/>
+          <p:nvPr/>
+        </p:nvSpPr>
+        <p:spPr>
+          <a:xfrm>
+            <a:off x="548640" y="4636008"/>
+            <a:ext cx="11091672" cy="384048"/>
+          </a:xfrm>
+          <a:prstGeom prst="roundRect">
+            <a:avLst>
+              <a:gd name="adj" fmla="val 31818"/>
+            </a:avLst>
+          </a:prstGeom>
+          <a:solidFill>
+            <a:srgbClr val="FFFFFF"/>
+          </a:solidFill>
+          <a:ln w="12700">
+            <a:solidFill>
+              <a:srgbClr val="FFFFFF"/>
+            </a:solidFill>
+            <a:prstDash val="solid"/>
+          </a:ln>
+        </p:spPr>
+        <p:txBody>
+          <a:bodyPr/>
+          <a:lstStyle/>
+          <a:p>
+            <a:endParaRPr lang="en-NL"/>
+          </a:p>
+        </p:txBody>
+      </p:sp>
+      <p:sp>
+        <p:nvSpPr>
+          <p:cNvPr id="77" name="Shape 34"/>
+          <p:cNvSpPr/>
+          <p:nvPr/>
+        </p:nvSpPr>
+        <p:spPr>
+          <a:xfrm>
+            <a:off x="640080" y="4681728"/>
+            <a:ext cx="292608" cy="292608"/>
+          </a:xfrm>
+          <a:prstGeom prst="ellipse">
+            <a:avLst/>
+          </a:prstGeom>
+          <a:solidFill>
+            <a:srgbClr val="3D68EC"/>
+          </a:solidFill>
+          <a:ln w="12700">
+            <a:solidFill>
+              <a:srgbClr val="3D68EC"/>
+            </a:solidFill>
+            <a:prstDash val="solid"/>
+          </a:ln>
+        </p:spPr>
+        <p:txBody>
+          <a:bodyPr/>
+          <a:lstStyle/>
+          <a:p>
+            <a:endParaRPr lang="en-NL"/>
+          </a:p>
+        </p:txBody>
+      </p:sp>
+      <p:sp>
+        <p:nvSpPr>
+          <p:cNvPr id="78" name="Text 35"/>
+          <p:cNvSpPr txBox="1"/>
+          <p:nvPr/>
+        </p:nvSpPr>
+        <p:spPr>
+          <a:xfrm>
+            <a:off x="640080" y="4681728"/>
+            <a:ext cx="292608" cy="292608"/>
+          </a:xfrm>
+          <a:prstGeom prst="rect">
+            <a:avLst/>
+          </a:prstGeom>
+          <a:noFill/>
+          <a:ln/>
+        </p:spPr>
+        <p:txBody>
+          <a:bodyPr wrap="square" lIns="0" tIns="0" rIns="0" bIns="0" rtlCol="0" anchor="ctr"/>
+          <a:lstStyle/>
+          <a:p>
+            <a:pPr marL="0" indent="0" algn="ctr">
+              <a:buNone/>
+            </a:pPr>
+            <a:r>
+              <a:rPr lang="en-US" sz="1100" b="1" dirty="0">
+                <a:solidFill>
+                  <a:srgbClr val="F4D74B"/>
+                </a:solidFill>
+                <a:latin typeface="General Sans" pitchFamily="34" charset="0"/>
+                <a:ea typeface="General Sans" pitchFamily="34" charset="-122"/>
+                <a:cs typeface="General Sans" pitchFamily="34" charset="-120"/>
+              </a:rPr>
+              <a:t>8</a:t>
+            </a:r>
+            <a:endParaRPr lang="en-US" sz="1100" dirty="0"/>
+          </a:p>
+        </p:txBody>
+      </p:sp>
+      <p:sp>
+        <p:nvSpPr>
+          <p:cNvPr id="79" name="Text 36"/>
+          <p:cNvSpPr txBox="1"/>
+          <p:nvPr/>
+        </p:nvSpPr>
+        <p:spPr>
+          <a:xfrm>
+            <a:off x="1097280" y="4636008"/>
+            <a:ext cx="640080" cy="384048"/>
+          </a:xfrm>
+          <a:prstGeom prst="rect">
+            <a:avLst/>
+          </a:prstGeom>
+          <a:noFill/>
+          <a:ln/>
+        </p:spPr>
+        <p:txBody>
+          <a:bodyPr wrap="square" lIns="0" tIns="0" rIns="0" bIns="0" rtlCol="0" anchor="ctr"/>
+          <a:lstStyle/>
+          <a:p>
+            <a:pPr marL="0" indent="0">
+              <a:buNone/>
+            </a:pPr>
+            <a:r>
+              <a:rPr lang="en-US" sz="1200" b="1" dirty="0">
+                <a:solidFill>
+                  <a:srgbClr val="3D68EC"/>
+                </a:solidFill>
+                <a:latin typeface="General Sans" pitchFamily="34" charset="0"/>
+                <a:ea typeface="General Sans" pitchFamily="34" charset="-122"/>
+                <a:cs typeface="General Sans" pitchFamily="34" charset="-120"/>
+              </a:rPr>
+              <a:t>1:07</a:t>
+            </a:r>
+            <a:endParaRPr lang="en-US" sz="1200" dirty="0"/>
+          </a:p>
+        </p:txBody>
+      </p:sp>
+      <p:sp>
+        <p:nvSpPr>
+          <p:cNvPr id="80" name="Text 37"/>
+          <p:cNvSpPr txBox="1"/>
+          <p:nvPr/>
+        </p:nvSpPr>
+        <p:spPr>
+          <a:xfrm>
+            <a:off x="1783080" y="4636008"/>
+            <a:ext cx="2834640" cy="384048"/>
+          </a:xfrm>
+          <a:prstGeom prst="rect">
+            <a:avLst/>
+          </a:prstGeom>
+          <a:noFill/>
+          <a:ln/>
+        </p:spPr>
+        <p:txBody>
+          <a:bodyPr wrap="square" lIns="0" tIns="0" rIns="0" bIns="0" rtlCol="0" anchor="ctr"/>
+          <a:lstStyle/>
+          <a:p>
+            <a:pPr marL="0" indent="0">
+              <a:buNone/>
+            </a:pPr>
+            <a:r>
+              <a:rPr lang="en-US" sz="1300" b="1" dirty="0">
+                <a:solidFill>
+                  <a:srgbClr val="000000"/>
+                </a:solidFill>
+                <a:latin typeface="General Sans" pitchFamily="34" charset="0"/>
+                <a:ea typeface="General Sans" pitchFamily="34" charset="-122"/>
+                <a:cs typeface="General Sans" pitchFamily="34" charset="-120"/>
+              </a:rPr>
+              <a:t>Ronde 2: dashboard bouwen</a:t>
+            </a:r>
+            <a:endParaRPr lang="en-US" sz="1300" dirty="0"/>
+          </a:p>
+        </p:txBody>
+      </p:sp>
+      <p:sp>
+        <p:nvSpPr>
+          <p:cNvPr id="81" name="Text 38"/>
+          <p:cNvSpPr txBox="1"/>
+          <p:nvPr/>
+        </p:nvSpPr>
+        <p:spPr>
+          <a:xfrm>
+            <a:off x="4617720" y="4636008"/>
+            <a:ext cx="640080" cy="384048"/>
+          </a:xfrm>
+          <a:prstGeom prst="rect">
+            <a:avLst/>
+          </a:prstGeom>
+          <a:noFill/>
+          <a:ln/>
+        </p:spPr>
+        <p:txBody>
+          <a:bodyPr wrap="square" lIns="0" tIns="0" rIns="0" bIns="0" rtlCol="0" anchor="ctr"/>
+          <a:lstStyle/>
+          <a:p>
+            <a:pPr marL="0" indent="0">
+              <a:buNone/>
+            </a:pPr>
+            <a:r>
+              <a:rPr lang="en-US" sz="1200" dirty="0">
+                <a:solidFill>
+                  <a:srgbClr val="3D68EC"/>
+                </a:solidFill>
+                <a:latin typeface="General Sans" pitchFamily="34" charset="0"/>
+                <a:ea typeface="General Sans" pitchFamily="34" charset="-122"/>
+                <a:cs typeface="General Sans" pitchFamily="34" charset="-120"/>
+              </a:rPr>
+              <a:t>22 min</a:t>
+            </a:r>
+            <a:endParaRPr lang="en-US" sz="1200" dirty="0"/>
+          </a:p>
+        </p:txBody>
+      </p:sp>
+      <p:sp>
+        <p:nvSpPr>
+          <p:cNvPr id="82" name="Text 39"/>
+          <p:cNvSpPr txBox="1"/>
+          <p:nvPr/>
+        </p:nvSpPr>
+        <p:spPr>
+          <a:xfrm>
+            <a:off x="5303520" y="4636008"/>
+            <a:ext cx="6245352" cy="384048"/>
+          </a:xfrm>
+          <a:prstGeom prst="rect">
+            <a:avLst/>
+          </a:prstGeom>
+          <a:noFill/>
+          <a:ln/>
+        </p:spPr>
+        <p:txBody>
+          <a:bodyPr wrap="square" lIns="0" tIns="0" rIns="0" bIns="0" rtlCol="0" anchor="ctr"/>
+          <a:lstStyle/>
+          <a:p>
+            <a:pPr marL="0" indent="0">
+              <a:buNone/>
+            </a:pPr>
+            <a:r>
+              <a:rPr lang="en-US" sz="1100" dirty="0">
+                <a:solidFill>
+                  <a:srgbClr val="000000"/>
+                </a:solidFill>
+                <a:latin typeface="General Sans" pitchFamily="34" charset="0"/>
+                <a:ea typeface="General Sans" pitchFamily="34" charset="-122"/>
+                <a:cs typeface="General Sans" pitchFamily="34" charset="-120"/>
+              </a:rPr>
+              <a:t>Bouw het dashboard met eerlijke framing en toegankelijke grafieken</a:t>
+            </a:r>
+            <a:endParaRPr lang="en-US" sz="1100" dirty="0"/>
+          </a:p>
+        </p:txBody>
+      </p:sp>
+      <p:sp>
+        <p:nvSpPr>
+          <p:cNvPr id="83" name="Shape 40"/>
+          <p:cNvSpPr/>
+          <p:nvPr/>
+        </p:nvSpPr>
+        <p:spPr>
+          <a:xfrm>
+            <a:off x="548640" y="5056632"/>
+            <a:ext cx="11091672" cy="384048"/>
+          </a:xfrm>
+          <a:prstGeom prst="roundRect">
+            <a:avLst>
+              <a:gd name="adj" fmla="val 31818"/>
+            </a:avLst>
+          </a:prstGeom>
+          <a:solidFill>
+            <a:srgbClr val="FFFFFF"/>
+          </a:solidFill>
+          <a:ln w="12700">
+            <a:solidFill>
+              <a:srgbClr val="FFFFFF"/>
+            </a:solidFill>
+            <a:prstDash val="solid"/>
+          </a:ln>
+        </p:spPr>
+        <p:txBody>
+          <a:bodyPr/>
+          <a:lstStyle/>
+          <a:p>
+            <a:endParaRPr lang="en-NL"/>
+          </a:p>
+        </p:txBody>
+      </p:sp>
+      <p:sp>
+        <p:nvSpPr>
+          <p:cNvPr id="84" name="Shape 41"/>
+          <p:cNvSpPr/>
+          <p:nvPr/>
+        </p:nvSpPr>
+        <p:spPr>
+          <a:xfrm>
+            <a:off x="640080" y="5102352"/>
+            <a:ext cx="292608" cy="292608"/>
+          </a:xfrm>
+          <a:prstGeom prst="ellipse">
+            <a:avLst/>
+          </a:prstGeom>
+          <a:solidFill>
+            <a:srgbClr val="DD784B"/>
+          </a:solidFill>
+          <a:ln w="12700">
+            <a:solidFill>
+              <a:srgbClr val="DD784B"/>
+            </a:solidFill>
+            <a:prstDash val="solid"/>
+          </a:ln>
+        </p:spPr>
+        <p:txBody>
+          <a:bodyPr/>
+          <a:lstStyle/>
+          <a:p>
+            <a:endParaRPr lang="en-NL"/>
+          </a:p>
+        </p:txBody>
+      </p:sp>
+      <p:sp>
+        <p:nvSpPr>
+          <p:cNvPr id="85" name="Text 42"/>
+          <p:cNvSpPr txBox="1"/>
+          <p:nvPr/>
+        </p:nvSpPr>
+        <p:spPr>
+          <a:xfrm>
+            <a:off x="640080" y="5102352"/>
+            <a:ext cx="292608" cy="292608"/>
+          </a:xfrm>
+          <a:prstGeom prst="rect">
+            <a:avLst/>
+          </a:prstGeom>
+          <a:noFill/>
+          <a:ln/>
+        </p:spPr>
+        <p:txBody>
+          <a:bodyPr wrap="square" lIns="0" tIns="0" rIns="0" bIns="0" rtlCol="0" anchor="ctr"/>
+          <a:lstStyle/>
+          <a:p>
+            <a:pPr marL="0" indent="0" algn="ctr">
+              <a:buNone/>
+            </a:pPr>
+            <a:r>
+              <a:rPr lang="en-US" sz="1100" b="1" dirty="0">
+                <a:solidFill>
+                  <a:srgbClr val="000000"/>
+                </a:solidFill>
+                <a:latin typeface="General Sans" pitchFamily="34" charset="0"/>
+                <a:ea typeface="General Sans" pitchFamily="34" charset="-122"/>
+                <a:cs typeface="General Sans" pitchFamily="34" charset="-120"/>
+              </a:rPr>
+              <a:t>9</a:t>
+            </a:r>
+            <a:endParaRPr lang="en-US" sz="1100" dirty="0"/>
+          </a:p>
+        </p:txBody>
+      </p:sp>
+      <p:sp>
+        <p:nvSpPr>
+          <p:cNvPr id="86" name="Text 43"/>
+          <p:cNvSpPr txBox="1"/>
+          <p:nvPr/>
+        </p:nvSpPr>
+        <p:spPr>
+          <a:xfrm>
+            <a:off x="1097280" y="5056632"/>
+            <a:ext cx="640080" cy="384048"/>
+          </a:xfrm>
+          <a:prstGeom prst="rect">
+            <a:avLst/>
+          </a:prstGeom>
+          <a:noFill/>
+          <a:ln/>
+        </p:spPr>
+        <p:txBody>
+          <a:bodyPr wrap="square" lIns="0" tIns="0" rIns="0" bIns="0" rtlCol="0" anchor="ctr"/>
+          <a:lstStyle/>
+          <a:p>
+            <a:pPr marL="0" indent="0">
+              <a:buNone/>
+            </a:pPr>
+            <a:r>
+              <a:rPr lang="en-US" sz="1200" b="1" dirty="0">
+                <a:solidFill>
+                  <a:srgbClr val="3D68EC"/>
+                </a:solidFill>
+                <a:latin typeface="General Sans" pitchFamily="34" charset="0"/>
+                <a:ea typeface="General Sans" pitchFamily="34" charset="-122"/>
+                <a:cs typeface="General Sans" pitchFamily="34" charset="-120"/>
+              </a:rPr>
+              <a:t>1:29</a:t>
+            </a:r>
+            <a:endParaRPr lang="en-US" sz="1200" dirty="0"/>
+          </a:p>
+        </p:txBody>
+      </p:sp>
+      <p:sp>
+        <p:nvSpPr>
+          <p:cNvPr id="87" name="Text 44"/>
+          <p:cNvSpPr txBox="1"/>
+          <p:nvPr/>
+        </p:nvSpPr>
+        <p:spPr>
+          <a:xfrm>
+            <a:off x="1783080" y="5056632"/>
+            <a:ext cx="2834640" cy="384048"/>
+          </a:xfrm>
+          <a:prstGeom prst="rect">
+            <a:avLst/>
+          </a:prstGeom>
+          <a:noFill/>
+          <a:ln/>
+        </p:spPr>
+        <p:txBody>
+          <a:bodyPr wrap="square" lIns="0" tIns="0" rIns="0" bIns="0" rtlCol="0" anchor="ctr"/>
+          <a:lstStyle/>
+          <a:p>
+            <a:pPr marL="0" indent="0">
+              <a:buNone/>
+            </a:pPr>
+            <a:r>
+              <a:rPr lang="en-US" sz="1300" b="1" dirty="0">
+                <a:solidFill>
+                  <a:srgbClr val="000000"/>
+                </a:solidFill>
+                <a:latin typeface="General Sans" pitchFamily="34" charset="0"/>
+                <a:ea typeface="General Sans" pitchFamily="34" charset="-122"/>
+                <a:cs typeface="General Sans" pitchFamily="34" charset="-120"/>
+              </a:rPr>
+              <a:t>Spiegelmoment 2</a:t>
+            </a:r>
+            <a:endParaRPr lang="en-US" sz="1300" dirty="0"/>
+          </a:p>
+        </p:txBody>
+      </p:sp>
+      <p:sp>
+        <p:nvSpPr>
+          <p:cNvPr id="88" name="Text 45"/>
+          <p:cNvSpPr txBox="1"/>
+          <p:nvPr/>
+        </p:nvSpPr>
+        <p:spPr>
+          <a:xfrm>
+            <a:off x="4617720" y="5056632"/>
+            <a:ext cx="640080" cy="384048"/>
+          </a:xfrm>
+          <a:prstGeom prst="rect">
+            <a:avLst/>
+          </a:prstGeom>
+          <a:noFill/>
+          <a:ln/>
+        </p:spPr>
+        <p:txBody>
+          <a:bodyPr wrap="square" lIns="0" tIns="0" rIns="0" bIns="0" rtlCol="0" anchor="ctr"/>
+          <a:lstStyle/>
+          <a:p>
+            <a:pPr marL="0" indent="0">
+              <a:buNone/>
+            </a:pPr>
+            <a:r>
+              <a:rPr lang="en-US" sz="1200" dirty="0">
+                <a:solidFill>
+                  <a:srgbClr val="3D68EC"/>
+                </a:solidFill>
+                <a:latin typeface="General Sans" pitchFamily="34" charset="0"/>
+                <a:ea typeface="General Sans" pitchFamily="34" charset="-122"/>
+                <a:cs typeface="General Sans" pitchFamily="34" charset="-120"/>
+              </a:rPr>
+              <a:t>15 min</a:t>
+            </a:r>
+            <a:endParaRPr lang="en-US" sz="1200" dirty="0"/>
+          </a:p>
+        </p:txBody>
+      </p:sp>
+      <p:sp>
+        <p:nvSpPr>
+          <p:cNvPr id="89" name="Text 46"/>
+          <p:cNvSpPr txBox="1"/>
+          <p:nvPr/>
+        </p:nvSpPr>
+        <p:spPr>
+          <a:xfrm>
+            <a:off x="5303520" y="5056632"/>
+            <a:ext cx="4297680" cy="384048"/>
+          </a:xfrm>
+          <a:prstGeom prst="rect">
+            <a:avLst/>
+          </a:prstGeom>
+          <a:noFill/>
+          <a:ln/>
+        </p:spPr>
+        <p:txBody>
+          <a:bodyPr wrap="square" lIns="0" tIns="0" rIns="0" bIns="0" rtlCol="0" anchor="ctr"/>
+          <a:lstStyle/>
+          <a:p>
+            <a:pPr marL="0" indent="0">
+              <a:buNone/>
+            </a:pPr>
+            <a:r>
+              <a:rPr lang="en-US" sz="1100" dirty="0">
+                <a:solidFill>
+                  <a:srgbClr val="000000"/>
+                </a:solidFill>
+                <a:latin typeface="General Sans" pitchFamily="34" charset="0"/>
+                <a:ea typeface="General Sans" pitchFamily="34" charset="-122"/>
+                <a:cs typeface="General Sans" pitchFamily="34" charset="-120"/>
+              </a:rPr>
+              <a:t>Bespreek de skill: wat zit erin, wat miste je dashboard?</a:t>
+            </a:r>
+            <a:endParaRPr lang="en-US" sz="1100" dirty="0"/>
+          </a:p>
+        </p:txBody>
+      </p:sp>
+      <p:sp>
+        <p:nvSpPr>
+          <p:cNvPr id="90" name="Shape 47"/>
+          <p:cNvSpPr/>
+          <p:nvPr/>
+        </p:nvSpPr>
+        <p:spPr>
+          <a:xfrm>
+            <a:off x="9646920" y="5116068"/>
+            <a:ext cx="1874520" cy="265176"/>
+          </a:xfrm>
+          <a:prstGeom prst="roundRect">
+            <a:avLst>
+              <a:gd name="adj" fmla="val 50000"/>
+            </a:avLst>
+          </a:prstGeom>
+          <a:solidFill>
+            <a:srgbClr val="3D68EC"/>
+          </a:solidFill>
+          <a:ln w="12700">
+            <a:solidFill>
+              <a:srgbClr val="3D68EC"/>
+            </a:solidFill>
+            <a:prstDash val="solid"/>
+          </a:ln>
+        </p:spPr>
+        <p:txBody>
+          <a:bodyPr/>
+          <a:lstStyle/>
+          <a:p>
+            <a:endParaRPr lang="en-NL"/>
+          </a:p>
+        </p:txBody>
+      </p:sp>
+      <p:sp>
+        <p:nvSpPr>
+          <p:cNvPr id="91" name="Text 48"/>
+          <p:cNvSpPr txBox="1"/>
+          <p:nvPr/>
+        </p:nvSpPr>
+        <p:spPr>
+          <a:xfrm>
+            <a:off x="9646920" y="5116068"/>
+            <a:ext cx="1874520" cy="265176"/>
+          </a:xfrm>
+          <a:prstGeom prst="rect">
+            <a:avLst/>
+          </a:prstGeom>
+          <a:noFill/>
+          <a:ln/>
+        </p:spPr>
+        <p:txBody>
+          <a:bodyPr wrap="square" lIns="0" tIns="0" rIns="0" bIns="0" rtlCol="0" anchor="ctr"/>
+          <a:lstStyle/>
+          <a:p>
+            <a:pPr marL="0" indent="0" algn="ctr">
+              <a:buNone/>
+            </a:pPr>
+            <a:r>
+              <a:rPr lang="en-US" sz="1000" b="1" dirty="0">
+                <a:solidFill>
+                  <a:srgbClr val="F4D74B"/>
+                </a:solidFill>
+                <a:latin typeface="General Sans" pitchFamily="34" charset="0"/>
+                <a:ea typeface="General Sans" pitchFamily="34" charset="-122"/>
+                <a:cs typeface="General Sans" pitchFamily="34" charset="-120"/>
+              </a:rPr>
+              <a:t>Skill 2 doet ronde 2</a:t>
+            </a:r>
+            <a:endParaRPr lang="en-US" sz="1000" dirty="0"/>
+          </a:p>
+        </p:txBody>
+      </p:sp>
+      <p:sp>
+        <p:nvSpPr>
+          <p:cNvPr id="92" name="Shape 81"/>
+          <p:cNvSpPr/>
+          <p:nvPr/>
+        </p:nvSpPr>
+        <p:spPr>
+          <a:xfrm>
+            <a:off x="548640" y="5477256"/>
+            <a:ext cx="11091672" cy="384048"/>
+          </a:xfrm>
+          <a:prstGeom prst="roundRect">
+            <a:avLst>
+              <a:gd name="adj" fmla="val 31818"/>
+            </a:avLst>
+          </a:prstGeom>
+          <a:solidFill>
+            <a:srgbClr val="FFFFFF"/>
+          </a:solidFill>
+          <a:ln w="12700">
+            <a:solidFill>
+              <a:srgbClr val="FFFFFF"/>
+            </a:solidFill>
+            <a:prstDash val="solid"/>
+          </a:ln>
+        </p:spPr>
+        <p:txBody>
+          <a:bodyPr/>
+          <a:lstStyle/>
+          <a:p>
+            <a:endParaRPr lang="en-NL"/>
+          </a:p>
+        </p:txBody>
+      </p:sp>
+      <p:sp>
+        <p:nvSpPr>
+          <p:cNvPr id="93" name="Shape 82"/>
+          <p:cNvSpPr/>
+          <p:nvPr/>
+        </p:nvSpPr>
+        <p:spPr>
+          <a:xfrm>
+            <a:off x="640080" y="5522976"/>
+            <a:ext cx="292608" cy="292608"/>
+          </a:xfrm>
+          <a:prstGeom prst="ellipse">
+            <a:avLst/>
           </a:prstGeom>
           <a:solidFill>
             <a:srgbClr val="00AF81"/>
@@ -9930,14 +12457,14 @@
       </p:sp>
       <p:sp>
         <p:nvSpPr>
-          <p:cNvPr id="24" name="Text 18"/>
-          <p:cNvSpPr txBox="1"/>
-          <p:nvPr/>
-        </p:nvSpPr>
-        <p:spPr>
-          <a:xfrm>
-            <a:off x="10931347" y="1188720"/>
-            <a:ext cx="708964" cy="310896"/>
+          <p:cNvPr id="94" name="Text 83"/>
+          <p:cNvSpPr txBox="1"/>
+          <p:nvPr/>
+        </p:nvSpPr>
+        <p:spPr>
+          <a:xfrm>
+            <a:off x="640080" y="5522976"/>
+            <a:ext cx="292608" cy="292608"/>
           </a:xfrm>
           <a:prstGeom prst="rect">
             <a:avLst/>
@@ -9953,7 +12480,7 @@
               <a:buNone/>
             </a:pPr>
             <a:r>
-              <a:rPr lang="en-US" sz="1000" b="1" dirty="0">
+              <a:rPr lang="en-US" sz="1100" b="1" dirty="0">
                 <a:solidFill>
                   <a:srgbClr val="F4D9DC"/>
                 </a:solidFill>
@@ -9961,88 +12488,22 @@
                 <a:ea typeface="General Sans" pitchFamily="34" charset="-122"/>
                 <a:cs typeface="General Sans" pitchFamily="34" charset="-120"/>
               </a:rPr>
-              <a:t>8 min</a:t>
-            </a:r>
-            <a:endParaRPr lang="en-US" sz="1000" dirty="0"/>
-          </a:p>
-        </p:txBody>
-      </p:sp>
-      <p:sp>
-        <p:nvSpPr>
-          <p:cNvPr id="25" name="Shape 19"/>
-          <p:cNvSpPr/>
-          <p:nvPr/>
-        </p:nvSpPr>
-        <p:spPr>
-          <a:xfrm>
-            <a:off x="548640" y="1691640"/>
-            <a:ext cx="11091672" cy="384048"/>
-          </a:xfrm>
-          <a:prstGeom prst="roundRect">
-            <a:avLst>
-              <a:gd name="adj" fmla="val 31818"/>
-            </a:avLst>
-          </a:prstGeom>
-          <a:solidFill>
-            <a:srgbClr val="FFFFFF"/>
-          </a:solidFill>
-          <a:ln w="12700">
-            <a:solidFill>
-              <a:srgbClr val="FFFFFF"/>
-            </a:solidFill>
-            <a:prstDash val="solid"/>
-          </a:ln>
-        </p:spPr>
-        <p:txBody>
-          <a:bodyPr/>
-          <a:lstStyle/>
-          <a:p>
-            <a:endParaRPr lang="en-NL"/>
-          </a:p>
-        </p:txBody>
-      </p:sp>
-      <p:sp>
-        <p:nvSpPr>
-          <p:cNvPr id="26" name="Shape 20"/>
-          <p:cNvSpPr/>
-          <p:nvPr/>
-        </p:nvSpPr>
-        <p:spPr>
-          <a:xfrm>
-            <a:off x="640080" y="1737360"/>
-            <a:ext cx="292608" cy="292608"/>
-          </a:xfrm>
-          <a:prstGeom prst="ellipse">
-            <a:avLst/>
-          </a:prstGeom>
-          <a:solidFill>
-            <a:srgbClr val="F4D74B"/>
-          </a:solidFill>
-          <a:ln w="12700">
-            <a:solidFill>
-              <a:srgbClr val="F4D74B"/>
-            </a:solidFill>
-            <a:prstDash val="solid"/>
-          </a:ln>
-        </p:spPr>
-        <p:txBody>
-          <a:bodyPr/>
-          <a:lstStyle/>
-          <a:p>
-            <a:endParaRPr lang="en-NL"/>
-          </a:p>
-        </p:txBody>
-      </p:sp>
-      <p:sp>
-        <p:nvSpPr>
-          <p:cNvPr id="27" name="Text 21"/>
-          <p:cNvSpPr txBox="1"/>
-          <p:nvPr/>
-        </p:nvSpPr>
-        <p:spPr>
-          <a:xfrm>
-            <a:off x="640080" y="1737360"/>
-            <a:ext cx="292608" cy="292608"/>
+              <a:t>10</a:t>
+            </a:r>
+            <a:endParaRPr lang="en-US" sz="1100" dirty="0"/>
+          </a:p>
+        </p:txBody>
+      </p:sp>
+      <p:sp>
+        <p:nvSpPr>
+          <p:cNvPr id="95" name="Text 84"/>
+          <p:cNvSpPr txBox="1"/>
+          <p:nvPr/>
+        </p:nvSpPr>
+        <p:spPr>
+          <a:xfrm>
+            <a:off x="1097280" y="5477256"/>
+            <a:ext cx="640080" cy="384048"/>
           </a:xfrm>
           <a:prstGeom prst="rect">
             <a:avLst/>
@@ -10054,11 +12515,11 @@
           <a:bodyPr wrap="square" lIns="0" tIns="0" rIns="0" bIns="0" rtlCol="0" anchor="ctr"/>
           <a:lstStyle/>
           <a:p>
-            <a:pPr marL="0" indent="0" algn="ctr">
-              <a:buNone/>
-            </a:pPr>
-            <a:r>
-              <a:rPr lang="en-US" sz="1100" b="1" dirty="0">
+            <a:pPr marL="0" indent="0">
+              <a:buNone/>
+            </a:pPr>
+            <a:r>
+              <a:rPr lang="en-US" sz="1200" b="1" dirty="0">
                 <a:solidFill>
                   <a:srgbClr val="3D68EC"/>
                 </a:solidFill>
@@ -10066,7 +12527,124 @@
                 <a:ea typeface="General Sans" pitchFamily="34" charset="-122"/>
                 <a:cs typeface="General Sans" pitchFamily="34" charset="-120"/>
               </a:rPr>
-              <a:t>1</a:t>
+              <a:t>1:44</a:t>
+            </a:r>
+            <a:endParaRPr lang="en-US" sz="1200" dirty="0"/>
+          </a:p>
+        </p:txBody>
+      </p:sp>
+      <p:sp>
+        <p:nvSpPr>
+          <p:cNvPr id="96" name="Text 85"/>
+          <p:cNvSpPr txBox="1"/>
+          <p:nvPr/>
+        </p:nvSpPr>
+        <p:spPr>
+          <a:xfrm>
+            <a:off x="1783080" y="5477256"/>
+            <a:ext cx="2834640" cy="384048"/>
+          </a:xfrm>
+          <a:prstGeom prst="rect">
+            <a:avLst/>
+          </a:prstGeom>
+          <a:noFill/>
+          <a:ln/>
+        </p:spPr>
+        <p:txBody>
+          <a:bodyPr wrap="square" lIns="0" tIns="0" rIns="0" bIns="0" rtlCol="0" anchor="ctr"/>
+          <a:lstStyle/>
+          <a:p>
+            <a:pPr marL="0" indent="0">
+              <a:buNone/>
+            </a:pPr>
+            <a:r>
+              <a:rPr lang="en-US" sz="1300" b="1" dirty="0">
+                <a:solidFill>
+                  <a:srgbClr val="000000"/>
+                </a:solidFill>
+                <a:latin typeface="General Sans" pitchFamily="34" charset="0"/>
+                <a:ea typeface="General Sans" pitchFamily="34" charset="-122"/>
+                <a:cs typeface="General Sans" pitchFamily="34" charset="-120"/>
+              </a:rPr>
+              <a:t>Evaluatie en afsluiting</a:t>
+            </a:r>
+            <a:endParaRPr lang="en-US" sz="1300" dirty="0"/>
+          </a:p>
+        </p:txBody>
+      </p:sp>
+      <p:sp>
+        <p:nvSpPr>
+          <p:cNvPr id="97" name="Text 86"/>
+          <p:cNvSpPr txBox="1"/>
+          <p:nvPr/>
+        </p:nvSpPr>
+        <p:spPr>
+          <a:xfrm>
+            <a:off x="4617720" y="5477256"/>
+            <a:ext cx="640080" cy="384048"/>
+          </a:xfrm>
+          <a:prstGeom prst="rect">
+            <a:avLst/>
+          </a:prstGeom>
+          <a:noFill/>
+          <a:ln/>
+        </p:spPr>
+        <p:txBody>
+          <a:bodyPr wrap="square" lIns="0" tIns="0" rIns="0" bIns="0" rtlCol="0" anchor="ctr"/>
+          <a:lstStyle/>
+          <a:p>
+            <a:pPr marL="0" indent="0">
+              <a:buNone/>
+            </a:pPr>
+            <a:r>
+              <a:rPr lang="en-US" sz="1200" dirty="0">
+                <a:solidFill>
+                  <a:srgbClr val="3D68EC"/>
+                </a:solidFill>
+                <a:latin typeface="General Sans" pitchFamily="34" charset="0"/>
+                <a:ea typeface="General Sans" pitchFamily="34" charset="-122"/>
+                <a:cs typeface="General Sans" pitchFamily="34" charset="-120"/>
+              </a:rPr>
+              <a:t>16 min</a:t>
+            </a:r>
+            <a:endParaRPr lang="en-US" sz="1200" dirty="0"/>
+          </a:p>
+        </p:txBody>
+      </p:sp>
+      <p:sp>
+        <p:nvSpPr>
+          <p:cNvPr id="98" name="Text 87"/>
+          <p:cNvSpPr txBox="1"/>
+          <p:nvPr/>
+        </p:nvSpPr>
+        <p:spPr>
+          <a:xfrm>
+            <a:off x="5303520" y="5477256"/>
+            <a:ext cx="6245352" cy="384048"/>
+          </a:xfrm>
+          <a:prstGeom prst="rect">
+            <a:avLst/>
+          </a:prstGeom>
+          <a:noFill/>
+          <a:ln/>
+        </p:spPr>
+        <p:txBody>
+          <a:bodyPr wrap="square" lIns="0" tIns="0" rIns="0" bIns="0" rtlCol="0" anchor="ctr"/>
+          <a:lstStyle/>
+          <a:p>
+            <a:pPr marL="0" indent="0">
+              <a:buNone/>
+            </a:pPr>
+            <a:r>
+              <a:rPr lang="en-US" sz="1100" dirty="0">
+                <a:solidFill>
+                  <a:srgbClr val="000000"/>
+                </a:solidFill>
+                <a:latin typeface="General Sans" pitchFamily="34" charset="0"/>
+                <a:ea typeface="General Sans" pitchFamily="34" charset="-122"/>
+                <a:cs typeface="General Sans" pitchFamily="34" charset="-120"/>
+              </a:rPr>
+              <a:t>Terugblik, interesse in een training, wat je wilt leren en wat je meeneemt</a:t>
             </a:r>
             <a:endParaRPr lang="en-US" sz="1100" dirty="0"/>
           </a:p>
@@ -10074,2926 +12652,14 @@
       </p:sp>
       <p:sp>
         <p:nvSpPr>
-          <p:cNvPr id="28" name="Text 22"/>
-          <p:cNvSpPr txBox="1"/>
-          <p:nvPr/>
-        </p:nvSpPr>
-        <p:spPr>
-          <a:xfrm>
-            <a:off x="1097280" y="1691640"/>
-            <a:ext cx="640080" cy="384048"/>
-          </a:xfrm>
-          <a:prstGeom prst="rect">
-            <a:avLst/>
-          </a:prstGeom>
-          <a:noFill/>
-          <a:ln/>
-        </p:spPr>
-        <p:txBody>
-          <a:bodyPr wrap="square" lIns="0" tIns="0" rIns="0" bIns="0" rtlCol="0" anchor="ctr"/>
-          <a:lstStyle/>
-          <a:p>
-            <a:pPr marL="0" indent="0">
-              <a:buNone/>
-            </a:pPr>
-            <a:r>
-              <a:rPr lang="en-US" sz="1200" b="1" dirty="0">
-                <a:solidFill>
-                  <a:srgbClr val="3D68EC"/>
-                </a:solidFill>
-                <a:latin typeface="General Sans" pitchFamily="34" charset="0"/>
-                <a:ea typeface="General Sans" pitchFamily="34" charset="-122"/>
-                <a:cs typeface="General Sans" pitchFamily="34" charset="-120"/>
-              </a:rPr>
-              <a:t>0:00</a:t>
-            </a:r>
-            <a:endParaRPr lang="en-US" sz="1200" dirty="0"/>
-          </a:p>
-        </p:txBody>
-      </p:sp>
-      <p:sp>
-        <p:nvSpPr>
-          <p:cNvPr id="29" name="Text 23"/>
-          <p:cNvSpPr txBox="1"/>
-          <p:nvPr/>
-        </p:nvSpPr>
-        <p:spPr>
-          <a:xfrm>
-            <a:off x="1783080" y="1691640"/>
-            <a:ext cx="2834640" cy="384048"/>
-          </a:xfrm>
-          <a:prstGeom prst="rect">
-            <a:avLst/>
-          </a:prstGeom>
-          <a:noFill/>
-          <a:ln/>
-        </p:spPr>
-        <p:txBody>
-          <a:bodyPr wrap="square" lIns="0" tIns="0" rIns="0" bIns="0" rtlCol="0" anchor="ctr"/>
-          <a:lstStyle/>
-          <a:p>
-            <a:pPr marL="0" indent="0">
-              <a:buNone/>
-            </a:pPr>
-            <a:r>
-              <a:rPr lang="en-US" sz="1300" b="1" dirty="0">
-                <a:solidFill>
-                  <a:srgbClr val="000000"/>
-                </a:solidFill>
-                <a:latin typeface="General Sans" pitchFamily="34" charset="0"/>
-                <a:ea typeface="General Sans" pitchFamily="34" charset="-122"/>
-                <a:cs typeface="General Sans" pitchFamily="34" charset="-120"/>
-              </a:rPr>
-              <a:t>Intro (CEDA)</a:t>
-            </a:r>
-            <a:endParaRPr lang="en-US" sz="1300" dirty="0"/>
-          </a:p>
-        </p:txBody>
-      </p:sp>
-      <p:sp>
-        <p:nvSpPr>
-          <p:cNvPr id="30" name="Text 24"/>
-          <p:cNvSpPr txBox="1"/>
-          <p:nvPr/>
-        </p:nvSpPr>
-        <p:spPr>
-          <a:xfrm>
-            <a:off x="4617720" y="1691640"/>
-            <a:ext cx="640080" cy="384048"/>
-          </a:xfrm>
-          <a:prstGeom prst="rect">
-            <a:avLst/>
-          </a:prstGeom>
-          <a:noFill/>
-          <a:ln/>
-        </p:spPr>
-        <p:txBody>
-          <a:bodyPr wrap="square" lIns="0" tIns="0" rIns="0" bIns="0" rtlCol="0" anchor="ctr"/>
-          <a:lstStyle/>
-          <a:p>
-            <a:pPr marL="0" indent="0">
-              <a:buNone/>
-            </a:pPr>
-            <a:r>
-              <a:rPr lang="en-US" sz="1200" dirty="0">
-                <a:solidFill>
-                  <a:srgbClr val="3D68EC"/>
-                </a:solidFill>
-                <a:latin typeface="General Sans" pitchFamily="34" charset="0"/>
-                <a:ea typeface="General Sans" pitchFamily="34" charset="-122"/>
-                <a:cs typeface="General Sans" pitchFamily="34" charset="-120"/>
-              </a:rPr>
-              <a:t>5 min</a:t>
-            </a:r>
-            <a:endParaRPr lang="en-US" sz="1200" dirty="0"/>
-          </a:p>
-        </p:txBody>
-      </p:sp>
-      <p:sp>
-        <p:nvSpPr>
-          <p:cNvPr id="31" name="Text 25"/>
-          <p:cNvSpPr txBox="1"/>
-          <p:nvPr/>
-        </p:nvSpPr>
-        <p:spPr>
-          <a:xfrm>
-            <a:off x="5303520" y="1691640"/>
-            <a:ext cx="6245352" cy="384048"/>
-          </a:xfrm>
-          <a:prstGeom prst="rect">
-            <a:avLst/>
-          </a:prstGeom>
-          <a:noFill/>
-          <a:ln/>
-        </p:spPr>
-        <p:txBody>
-          <a:bodyPr wrap="square" lIns="0" tIns="0" rIns="0" bIns="0" rtlCol="0" anchor="ctr"/>
-          <a:lstStyle/>
-          <a:p>
-            <a:pPr marL="0" indent="0">
-              <a:buNone/>
-            </a:pPr>
-            <a:r>
-              <a:rPr lang="en-US" sz="1100" dirty="0">
-                <a:solidFill>
-                  <a:srgbClr val="000000"/>
-                </a:solidFill>
-                <a:latin typeface="General Sans" pitchFamily="34" charset="0"/>
-                <a:ea typeface="General Sans" pitchFamily="34" charset="-122"/>
-                <a:cs typeface="General Sans" pitchFamily="34" charset="-120"/>
-              </a:rPr>
-              <a:t>Waarom agentic data science, en wat gaan we doen?</a:t>
-            </a:r>
-            <a:endParaRPr lang="en-US" sz="1100" dirty="0"/>
-          </a:p>
-        </p:txBody>
-      </p:sp>
-      <p:sp>
-        <p:nvSpPr>
-          <p:cNvPr id="32" name="Shape 19"/>
-          <p:cNvSpPr/>
-          <p:nvPr/>
-        </p:nvSpPr>
-        <p:spPr>
-          <a:xfrm>
-            <a:off x="548640" y="2093976"/>
-            <a:ext cx="11091672" cy="384048"/>
-          </a:xfrm>
-          <a:prstGeom prst="roundRect">
-            <a:avLst>
-              <a:gd name="adj" fmla="val 31818"/>
-            </a:avLst>
-          </a:prstGeom>
-          <a:solidFill>
-            <a:srgbClr val="FFFFFF"/>
-          </a:solidFill>
-          <a:ln w="12700">
-            <a:solidFill>
-              <a:srgbClr val="FFFFFF"/>
-            </a:solidFill>
-            <a:prstDash val="solid"/>
-          </a:ln>
-        </p:spPr>
-        <p:txBody>
-          <a:bodyPr/>
-          <a:lstStyle/>
-          <a:p>
-            <a:endParaRPr lang="en-NL"/>
-          </a:p>
-        </p:txBody>
-      </p:sp>
-      <p:sp>
-        <p:nvSpPr>
-          <p:cNvPr id="33" name="Shape 20"/>
-          <p:cNvSpPr/>
-          <p:nvPr/>
-        </p:nvSpPr>
-        <p:spPr>
-          <a:xfrm>
-            <a:off x="640080" y="2139696"/>
-            <a:ext cx="292608" cy="292608"/>
-          </a:xfrm>
-          <a:prstGeom prst="ellipse">
-            <a:avLst/>
-          </a:prstGeom>
-          <a:solidFill>
-            <a:srgbClr val="F4D74B"/>
-          </a:solidFill>
-          <a:ln w="12700">
-            <a:solidFill>
-              <a:srgbClr val="F4D74B"/>
-            </a:solidFill>
-            <a:prstDash val="solid"/>
-          </a:ln>
-        </p:spPr>
-        <p:txBody>
-          <a:bodyPr/>
-          <a:lstStyle/>
-          <a:p>
-            <a:endParaRPr lang="en-NL"/>
-          </a:p>
-        </p:txBody>
-      </p:sp>
-      <p:sp>
-        <p:nvSpPr>
-          <p:cNvPr id="34" name="Text 21"/>
-          <p:cNvSpPr txBox="1"/>
-          <p:nvPr/>
-        </p:nvSpPr>
-        <p:spPr>
-          <a:xfrm>
-            <a:off x="640080" y="2139696"/>
-            <a:ext cx="292608" cy="292608"/>
-          </a:xfrm>
-          <a:prstGeom prst="rect">
-            <a:avLst/>
-          </a:prstGeom>
-          <a:noFill/>
-          <a:ln/>
-        </p:spPr>
-        <p:txBody>
-          <a:bodyPr wrap="square" lIns="0" tIns="0" rIns="0" bIns="0" rtlCol="0" anchor="ctr"/>
-          <a:lstStyle/>
-          <a:p>
-            <a:pPr marL="0" indent="0" algn="ctr">
-              <a:buNone/>
-            </a:pPr>
-            <a:r>
-              <a:rPr lang="en-US" sz="1100" b="1" dirty="0">
-                <a:solidFill>
-                  <a:srgbClr val="3D68EC"/>
-                </a:solidFill>
-                <a:latin typeface="General Sans" pitchFamily="34" charset="0"/>
-                <a:ea typeface="General Sans" pitchFamily="34" charset="-122"/>
-                <a:cs typeface="General Sans" pitchFamily="34" charset="-120"/>
-              </a:rPr>
-              <a:t>2</a:t>
-            </a:r>
-            <a:endParaRPr lang="en-US" sz="1100" dirty="0"/>
-          </a:p>
-        </p:txBody>
-      </p:sp>
-      <p:sp>
-        <p:nvSpPr>
-          <p:cNvPr id="35" name="Text 22"/>
-          <p:cNvSpPr txBox="1"/>
-          <p:nvPr/>
-        </p:nvSpPr>
-        <p:spPr>
-          <a:xfrm>
-            <a:off x="1097280" y="2093976"/>
-            <a:ext cx="640080" cy="384048"/>
-          </a:xfrm>
-          <a:prstGeom prst="rect">
-            <a:avLst/>
-          </a:prstGeom>
-          <a:noFill/>
-          <a:ln/>
-        </p:spPr>
-        <p:txBody>
-          <a:bodyPr wrap="square" lIns="0" tIns="0" rIns="0" bIns="0" rtlCol="0" anchor="ctr"/>
-          <a:lstStyle/>
-          <a:p>
-            <a:pPr marL="0" indent="0">
-              <a:buNone/>
-            </a:pPr>
-            <a:r>
-              <a:rPr lang="en-US" sz="1200" b="1" dirty="0">
-                <a:solidFill>
-                  <a:srgbClr val="3D68EC"/>
-                </a:solidFill>
-                <a:latin typeface="General Sans" pitchFamily="34" charset="0"/>
-                <a:ea typeface="General Sans" pitchFamily="34" charset="-122"/>
-                <a:cs typeface="General Sans" pitchFamily="34" charset="-120"/>
-              </a:rPr>
-              <a:t>0:05</a:t>
-            </a:r>
-            <a:endParaRPr lang="en-US" sz="1200" dirty="0"/>
-          </a:p>
-        </p:txBody>
-      </p:sp>
-      <p:sp>
-        <p:nvSpPr>
-          <p:cNvPr id="36" name="Text 23"/>
-          <p:cNvSpPr txBox="1"/>
-          <p:nvPr/>
-        </p:nvSpPr>
-        <p:spPr>
-          <a:xfrm>
-            <a:off x="1783080" y="2093976"/>
-            <a:ext cx="2834640" cy="384048"/>
-          </a:xfrm>
-          <a:prstGeom prst="rect">
-            <a:avLst/>
-          </a:prstGeom>
-          <a:noFill/>
-          <a:ln/>
-        </p:spPr>
-        <p:txBody>
-          <a:bodyPr wrap="square" lIns="0" tIns="0" rIns="0" bIns="0" rtlCol="0" anchor="ctr"/>
-          <a:lstStyle/>
-          <a:p>
-            <a:pPr marL="0" indent="0">
-              <a:buNone/>
-            </a:pPr>
-            <a:r>
-              <a:rPr lang="en-US" sz="1300" b="1" dirty="0">
-                <a:solidFill>
-                  <a:srgbClr val="000000"/>
-                </a:solidFill>
-                <a:latin typeface="General Sans" pitchFamily="34" charset="0"/>
-                <a:ea typeface="General Sans" pitchFamily="34" charset="-122"/>
-                <a:cs typeface="General Sans" pitchFamily="34" charset="-120"/>
-              </a:rPr>
-              <a:t>Synthetische data</a:t>
-            </a:r>
-            <a:endParaRPr lang="en-US" sz="1300" dirty="0"/>
-          </a:p>
-        </p:txBody>
-      </p:sp>
-      <p:sp>
-        <p:nvSpPr>
-          <p:cNvPr id="37" name="Text 24"/>
-          <p:cNvSpPr txBox="1"/>
-          <p:nvPr/>
-        </p:nvSpPr>
-        <p:spPr>
-          <a:xfrm>
-            <a:off x="4617720" y="2093976"/>
-            <a:ext cx="640080" cy="384048"/>
-          </a:xfrm>
-          <a:prstGeom prst="rect">
-            <a:avLst/>
-          </a:prstGeom>
-          <a:noFill/>
-          <a:ln/>
-        </p:spPr>
-        <p:txBody>
-          <a:bodyPr wrap="square" lIns="0" tIns="0" rIns="0" bIns="0" rtlCol="0" anchor="ctr"/>
-          <a:lstStyle/>
-          <a:p>
-            <a:pPr marL="0" indent="0">
-              <a:buNone/>
-            </a:pPr>
-            <a:r>
-              <a:rPr lang="en-US" sz="1200" dirty="0">
-                <a:solidFill>
-                  <a:srgbClr val="3D68EC"/>
-                </a:solidFill>
-                <a:latin typeface="General Sans" pitchFamily="34" charset="0"/>
-                <a:ea typeface="General Sans" pitchFamily="34" charset="-122"/>
-                <a:cs typeface="General Sans" pitchFamily="34" charset="-120"/>
-              </a:rPr>
-              <a:t>6 min</a:t>
-            </a:r>
-            <a:endParaRPr lang="en-US" sz="1200" dirty="0"/>
-          </a:p>
-        </p:txBody>
-      </p:sp>
-      <p:sp>
-        <p:nvSpPr>
-          <p:cNvPr id="38" name="Text 25"/>
-          <p:cNvSpPr txBox="1"/>
-          <p:nvPr/>
-        </p:nvSpPr>
-        <p:spPr>
-          <a:xfrm>
-            <a:off x="5303520" y="2093976"/>
-            <a:ext cx="6245352" cy="384048"/>
-          </a:xfrm>
-          <a:prstGeom prst="rect">
-            <a:avLst/>
-          </a:prstGeom>
-          <a:noFill/>
-          <a:ln/>
-        </p:spPr>
-        <p:txBody>
-          <a:bodyPr wrap="square" lIns="0" tIns="0" rIns="0" bIns="0" rtlCol="0" anchor="ctr"/>
-          <a:lstStyle/>
-          <a:p>
-            <a:pPr marL="0" indent="0">
-              <a:buNone/>
-            </a:pPr>
-            <a:r>
-              <a:rPr lang="en-US" sz="1100" dirty="0">
-                <a:solidFill>
-                  <a:srgbClr val="000000"/>
-                </a:solidFill>
-                <a:latin typeface="General Sans" pitchFamily="34" charset="0"/>
-                <a:ea typeface="General Sans" pitchFamily="34" charset="-122"/>
-                <a:cs typeface="General Sans" pitchFamily="34" charset="-120"/>
-              </a:rPr>
-              <a:t>Wat is het, waarom gebruiken we het, wat kun je er (niet) mee?</a:t>
-            </a:r>
-            <a:endParaRPr lang="en-US" sz="1100" dirty="0"/>
-          </a:p>
-        </p:txBody>
-      </p:sp>
-      <p:sp>
-        <p:nvSpPr>
-          <p:cNvPr id="39" name="Shape 19"/>
-          <p:cNvSpPr/>
-          <p:nvPr/>
-        </p:nvSpPr>
-        <p:spPr>
-          <a:xfrm>
-            <a:off x="548640" y="2496312"/>
-            <a:ext cx="11091672" cy="384048"/>
-          </a:xfrm>
-          <a:prstGeom prst="roundRect">
-            <a:avLst>
-              <a:gd name="adj" fmla="val 31818"/>
-            </a:avLst>
-          </a:prstGeom>
-          <a:solidFill>
-            <a:srgbClr val="FFFFFF"/>
-          </a:solidFill>
-          <a:ln w="12700">
-            <a:solidFill>
-              <a:srgbClr val="FFFFFF"/>
-            </a:solidFill>
-            <a:prstDash val="solid"/>
-          </a:ln>
-        </p:spPr>
-        <p:txBody>
-          <a:bodyPr/>
-          <a:lstStyle/>
-          <a:p>
-            <a:endParaRPr lang="en-NL"/>
-          </a:p>
-        </p:txBody>
-      </p:sp>
-      <p:sp>
-        <p:nvSpPr>
-          <p:cNvPr id="40" name="Shape 20"/>
-          <p:cNvSpPr/>
-          <p:nvPr/>
-        </p:nvSpPr>
-        <p:spPr>
-          <a:xfrm>
-            <a:off x="640080" y="2542032"/>
-            <a:ext cx="292608" cy="292608"/>
-          </a:xfrm>
-          <a:prstGeom prst="ellipse">
-            <a:avLst/>
-          </a:prstGeom>
-          <a:solidFill>
-            <a:srgbClr val="F4D74B"/>
-          </a:solidFill>
-          <a:ln w="12700">
-            <a:solidFill>
-              <a:srgbClr val="F4D74B"/>
-            </a:solidFill>
-            <a:prstDash val="solid"/>
-          </a:ln>
-        </p:spPr>
-        <p:txBody>
-          <a:bodyPr/>
-          <a:lstStyle/>
-          <a:p>
-            <a:endParaRPr lang="en-NL"/>
-          </a:p>
-        </p:txBody>
-      </p:sp>
-      <p:sp>
-        <p:nvSpPr>
-          <p:cNvPr id="41" name="Text 21"/>
-          <p:cNvSpPr txBox="1"/>
-          <p:nvPr/>
-        </p:nvSpPr>
-        <p:spPr>
-          <a:xfrm>
-            <a:off x="640080" y="2542032"/>
-            <a:ext cx="292608" cy="292608"/>
-          </a:xfrm>
-          <a:prstGeom prst="rect">
-            <a:avLst/>
-          </a:prstGeom>
-          <a:noFill/>
-          <a:ln/>
-        </p:spPr>
-        <p:txBody>
-          <a:bodyPr wrap="square" lIns="0" tIns="0" rIns="0" bIns="0" rtlCol="0" anchor="ctr"/>
-          <a:lstStyle/>
-          <a:p>
-            <a:pPr marL="0" indent="0" algn="ctr">
-              <a:buNone/>
-            </a:pPr>
-            <a:r>
-              <a:rPr lang="en-US" sz="1100" b="1" dirty="0">
-                <a:solidFill>
-                  <a:srgbClr val="3D68EC"/>
-                </a:solidFill>
-                <a:latin typeface="General Sans" pitchFamily="34" charset="0"/>
-                <a:ea typeface="General Sans" pitchFamily="34" charset="-122"/>
-                <a:cs typeface="General Sans" pitchFamily="34" charset="-120"/>
-              </a:rPr>
-              <a:t>3</a:t>
-            </a:r>
-            <a:endParaRPr lang="en-US" sz="1100" dirty="0"/>
-          </a:p>
-        </p:txBody>
-      </p:sp>
-      <p:sp>
-        <p:nvSpPr>
-          <p:cNvPr id="42" name="Text 22"/>
-          <p:cNvSpPr txBox="1"/>
-          <p:nvPr/>
-        </p:nvSpPr>
-        <p:spPr>
-          <a:xfrm>
-            <a:off x="1097280" y="2496312"/>
-            <a:ext cx="640080" cy="384048"/>
-          </a:xfrm>
-          <a:prstGeom prst="rect">
-            <a:avLst/>
-          </a:prstGeom>
-          <a:noFill/>
-          <a:ln/>
-        </p:spPr>
-        <p:txBody>
-          <a:bodyPr wrap="square" lIns="0" tIns="0" rIns="0" bIns="0" rtlCol="0" anchor="ctr"/>
-          <a:lstStyle/>
-          <a:p>
-            <a:pPr marL="0" indent="0">
-              <a:buNone/>
-            </a:pPr>
-            <a:r>
-              <a:rPr lang="en-US" sz="1200" b="1" dirty="0">
-                <a:solidFill>
-                  <a:srgbClr val="3D68EC"/>
-                </a:solidFill>
-                <a:latin typeface="General Sans" pitchFamily="34" charset="0"/>
-                <a:ea typeface="General Sans" pitchFamily="34" charset="-122"/>
-                <a:cs typeface="General Sans" pitchFamily="34" charset="-120"/>
-              </a:rPr>
-              <a:t>0:11</a:t>
-            </a:r>
-            <a:endParaRPr lang="en-US" sz="1200" dirty="0"/>
-          </a:p>
-        </p:txBody>
-      </p:sp>
-      <p:sp>
-        <p:nvSpPr>
-          <p:cNvPr id="43" name="Text 23"/>
-          <p:cNvSpPr txBox="1"/>
-          <p:nvPr/>
-        </p:nvSpPr>
-        <p:spPr>
-          <a:xfrm>
-            <a:off x="1783080" y="2496312"/>
-            <a:ext cx="2834640" cy="384048"/>
-          </a:xfrm>
-          <a:prstGeom prst="rect">
-            <a:avLst/>
-          </a:prstGeom>
-          <a:noFill/>
-          <a:ln/>
-        </p:spPr>
-        <p:txBody>
-          <a:bodyPr wrap="square" lIns="0" tIns="0" rIns="0" bIns="0" rtlCol="0" anchor="ctr"/>
-          <a:lstStyle/>
-          <a:p>
-            <a:pPr marL="0" indent="0">
-              <a:buNone/>
-            </a:pPr>
-            <a:r>
-              <a:rPr lang="en-US" sz="1300" b="1" dirty="0">
-                <a:solidFill>
-                  <a:srgbClr val="000000"/>
-                </a:solidFill>
-                <a:latin typeface="General Sans" pitchFamily="34" charset="0"/>
-                <a:ea typeface="General Sans" pitchFamily="34" charset="-122"/>
-                <a:cs typeface="General Sans" pitchFamily="34" charset="-120"/>
-              </a:rPr>
-              <a:t>De opdracht en casus</a:t>
-            </a:r>
-            <a:endParaRPr lang="en-US" sz="1300" dirty="0"/>
-          </a:p>
-        </p:txBody>
-      </p:sp>
-      <p:sp>
-        <p:nvSpPr>
-          <p:cNvPr id="44" name="Text 24"/>
-          <p:cNvSpPr txBox="1"/>
-          <p:nvPr/>
-        </p:nvSpPr>
-        <p:spPr>
-          <a:xfrm>
-            <a:off x="4617720" y="2496312"/>
-            <a:ext cx="640080" cy="384048"/>
-          </a:xfrm>
-          <a:prstGeom prst="rect">
-            <a:avLst/>
-          </a:prstGeom>
-          <a:noFill/>
-          <a:ln/>
-        </p:spPr>
-        <p:txBody>
-          <a:bodyPr wrap="square" lIns="0" tIns="0" rIns="0" bIns="0" rtlCol="0" anchor="ctr"/>
-          <a:lstStyle/>
-          <a:p>
-            <a:pPr marL="0" indent="0">
-              <a:buNone/>
-            </a:pPr>
-            <a:r>
-              <a:rPr lang="en-US" sz="1200" dirty="0">
-                <a:solidFill>
-                  <a:srgbClr val="3D68EC"/>
-                </a:solidFill>
-                <a:latin typeface="General Sans" pitchFamily="34" charset="0"/>
-                <a:ea typeface="General Sans" pitchFamily="34" charset="-122"/>
-                <a:cs typeface="General Sans" pitchFamily="34" charset="-120"/>
-              </a:rPr>
-              <a:t>6 min</a:t>
-            </a:r>
-            <a:endParaRPr lang="en-US" sz="1200" dirty="0"/>
-          </a:p>
-        </p:txBody>
-      </p:sp>
-      <p:sp>
-        <p:nvSpPr>
-          <p:cNvPr id="45" name="Text 25"/>
-          <p:cNvSpPr txBox="1"/>
-          <p:nvPr/>
-        </p:nvSpPr>
-        <p:spPr>
-          <a:xfrm>
-            <a:off x="5303520" y="2496312"/>
-            <a:ext cx="6245352" cy="384048"/>
-          </a:xfrm>
-          <a:prstGeom prst="rect">
-            <a:avLst/>
-          </a:prstGeom>
-          <a:noFill/>
-          <a:ln/>
-        </p:spPr>
-        <p:txBody>
-          <a:bodyPr wrap="square" lIns="0" tIns="0" rIns="0" bIns="0" rtlCol="0" anchor="ctr"/>
-          <a:lstStyle/>
-          <a:p>
-            <a:pPr marL="0" indent="0">
-              <a:buNone/>
-            </a:pPr>
-            <a:r>
-              <a:rPr lang="en-US" sz="1100" dirty="0">
-                <a:solidFill>
-                  <a:srgbClr val="000000"/>
-                </a:solidFill>
-                <a:latin typeface="General Sans" pitchFamily="34" charset="0"/>
-                <a:ea typeface="General Sans" pitchFamily="34" charset="-122"/>
-                <a:cs typeface="General Sans" pitchFamily="34" charset="-120"/>
-              </a:rPr>
-              <a:t>Casusvraag, werken in tweetallen en het eindproduct</a:t>
-            </a:r>
-            <a:endParaRPr lang="en-US" sz="1100" dirty="0"/>
-          </a:p>
-        </p:txBody>
-      </p:sp>
-      <p:sp>
-        <p:nvSpPr>
-          <p:cNvPr id="46" name="Shape 19"/>
-          <p:cNvSpPr/>
-          <p:nvPr/>
-        </p:nvSpPr>
-        <p:spPr>
-          <a:xfrm>
-            <a:off x="548640" y="2898648"/>
-            <a:ext cx="11091672" cy="384048"/>
-          </a:xfrm>
-          <a:prstGeom prst="roundRect">
-            <a:avLst>
-              <a:gd name="adj" fmla="val 31818"/>
-            </a:avLst>
-          </a:prstGeom>
-          <a:solidFill>
-            <a:srgbClr val="FFFFFF"/>
-          </a:solidFill>
-          <a:ln w="12700">
-            <a:solidFill>
-              <a:srgbClr val="FFFFFF"/>
-            </a:solidFill>
-            <a:prstDash val="solid"/>
-          </a:ln>
-        </p:spPr>
-        <p:txBody>
-          <a:bodyPr/>
-          <a:lstStyle/>
-          <a:p>
-            <a:endParaRPr lang="en-NL"/>
-          </a:p>
-        </p:txBody>
-      </p:sp>
-      <p:sp>
-        <p:nvSpPr>
-          <p:cNvPr id="47" name="Shape 20"/>
-          <p:cNvSpPr/>
-          <p:nvPr/>
-        </p:nvSpPr>
-        <p:spPr>
-          <a:xfrm>
-            <a:off x="640080" y="2944368"/>
-            <a:ext cx="292608" cy="292608"/>
-          </a:xfrm>
-          <a:prstGeom prst="ellipse">
-            <a:avLst/>
-          </a:prstGeom>
-          <a:solidFill>
-            <a:srgbClr val="F4D74B"/>
-          </a:solidFill>
-          <a:ln w="12700">
-            <a:solidFill>
-              <a:srgbClr val="F4D74B"/>
-            </a:solidFill>
-            <a:prstDash val="solid"/>
-          </a:ln>
-        </p:spPr>
-        <p:txBody>
-          <a:bodyPr/>
-          <a:lstStyle/>
-          <a:p>
-            <a:endParaRPr lang="en-NL"/>
-          </a:p>
-        </p:txBody>
-      </p:sp>
-      <p:sp>
-        <p:nvSpPr>
-          <p:cNvPr id="48" name="Text 21"/>
-          <p:cNvSpPr txBox="1"/>
-          <p:nvPr/>
-        </p:nvSpPr>
-        <p:spPr>
-          <a:xfrm>
-            <a:off x="640080" y="2944368"/>
-            <a:ext cx="292608" cy="292608"/>
-          </a:xfrm>
-          <a:prstGeom prst="rect">
-            <a:avLst/>
-          </a:prstGeom>
-          <a:noFill/>
-          <a:ln/>
-        </p:spPr>
-        <p:txBody>
-          <a:bodyPr wrap="square" lIns="0" tIns="0" rIns="0" bIns="0" rtlCol="0" anchor="ctr"/>
-          <a:lstStyle/>
-          <a:p>
-            <a:pPr marL="0" indent="0" algn="ctr">
-              <a:buNone/>
-            </a:pPr>
-            <a:r>
-              <a:rPr lang="en-US" sz="1100" b="1" dirty="0">
-                <a:solidFill>
-                  <a:srgbClr val="3D68EC"/>
-                </a:solidFill>
-                <a:latin typeface="General Sans" pitchFamily="34" charset="0"/>
-                <a:ea typeface="General Sans" pitchFamily="34" charset="-122"/>
-                <a:cs typeface="General Sans" pitchFamily="34" charset="-120"/>
-              </a:rPr>
-              <a:t>4</a:t>
-            </a:r>
-            <a:endParaRPr lang="en-US" sz="1100" dirty="0"/>
-          </a:p>
-        </p:txBody>
-      </p:sp>
-      <p:sp>
-        <p:nvSpPr>
-          <p:cNvPr id="49" name="Text 22"/>
-          <p:cNvSpPr txBox="1"/>
-          <p:nvPr/>
-        </p:nvSpPr>
-        <p:spPr>
-          <a:xfrm>
-            <a:off x="1097280" y="2898648"/>
-            <a:ext cx="640080" cy="384048"/>
-          </a:xfrm>
-          <a:prstGeom prst="rect">
-            <a:avLst/>
-          </a:prstGeom>
-          <a:noFill/>
-          <a:ln/>
-        </p:spPr>
-        <p:txBody>
-          <a:bodyPr wrap="square" lIns="0" tIns="0" rIns="0" bIns="0" rtlCol="0" anchor="ctr"/>
-          <a:lstStyle/>
-          <a:p>
-            <a:pPr marL="0" indent="0">
-              <a:buNone/>
-            </a:pPr>
-            <a:r>
-              <a:rPr lang="en-US" sz="1200" b="1" dirty="0">
-                <a:solidFill>
-                  <a:srgbClr val="3D68EC"/>
-                </a:solidFill>
-                <a:latin typeface="General Sans" pitchFamily="34" charset="0"/>
-                <a:ea typeface="General Sans" pitchFamily="34" charset="-122"/>
-                <a:cs typeface="General Sans" pitchFamily="34" charset="-120"/>
-              </a:rPr>
-              <a:t>0:17</a:t>
-            </a:r>
-            <a:endParaRPr lang="en-US" sz="1200" dirty="0"/>
-          </a:p>
-        </p:txBody>
-      </p:sp>
-      <p:sp>
-        <p:nvSpPr>
-          <p:cNvPr id="50" name="Text 23"/>
-          <p:cNvSpPr txBox="1"/>
-          <p:nvPr/>
-        </p:nvSpPr>
-        <p:spPr>
-          <a:xfrm>
-            <a:off x="1783080" y="2898648"/>
-            <a:ext cx="2834640" cy="384048"/>
-          </a:xfrm>
-          <a:prstGeom prst="rect">
-            <a:avLst/>
-          </a:prstGeom>
-          <a:noFill/>
-          <a:ln/>
-        </p:spPr>
-        <p:txBody>
-          <a:bodyPr wrap="square" lIns="0" tIns="0" rIns="0" bIns="0" rtlCol="0" anchor="ctr"/>
-          <a:lstStyle/>
-          <a:p>
-            <a:pPr marL="0" indent="0">
-              <a:buNone/>
-            </a:pPr>
-            <a:r>
-              <a:rPr lang="en-US" sz="1300" b="1" dirty="0">
-                <a:solidFill>
-                  <a:srgbClr val="000000"/>
-                </a:solidFill>
-                <a:latin typeface="General Sans" pitchFamily="34" charset="0"/>
-                <a:ea typeface="General Sans" pitchFamily="34" charset="-122"/>
-                <a:cs typeface="General Sans" pitchFamily="34" charset="-120"/>
-              </a:rPr>
-              <a:t>Skills en prompts</a:t>
-            </a:r>
-            <a:endParaRPr lang="en-US" sz="1300" dirty="0"/>
-          </a:p>
-        </p:txBody>
-      </p:sp>
-      <p:sp>
-        <p:nvSpPr>
-          <p:cNvPr id="51" name="Text 24"/>
-          <p:cNvSpPr txBox="1"/>
-          <p:nvPr/>
-        </p:nvSpPr>
-        <p:spPr>
-          <a:xfrm>
-            <a:off x="4617720" y="2898648"/>
-            <a:ext cx="640080" cy="384048"/>
-          </a:xfrm>
-          <a:prstGeom prst="rect">
-            <a:avLst/>
-          </a:prstGeom>
-          <a:noFill/>
-          <a:ln/>
-        </p:spPr>
-        <p:txBody>
-          <a:bodyPr wrap="square" lIns="0" tIns="0" rIns="0" bIns="0" rtlCol="0" anchor="ctr"/>
-          <a:lstStyle/>
-          <a:p>
-            <a:pPr marL="0" indent="0">
-              <a:buNone/>
-            </a:pPr>
-            <a:r>
-              <a:rPr lang="en-US" sz="1200" dirty="0">
-                <a:solidFill>
-                  <a:srgbClr val="3D68EC"/>
-                </a:solidFill>
-                <a:latin typeface="General Sans" pitchFamily="34" charset="0"/>
-                <a:ea typeface="General Sans" pitchFamily="34" charset="-122"/>
-                <a:cs typeface="General Sans" pitchFamily="34" charset="-120"/>
-              </a:rPr>
-              <a:t>8 min</a:t>
-            </a:r>
-            <a:endParaRPr lang="en-US" sz="1200" dirty="0"/>
-          </a:p>
-        </p:txBody>
-      </p:sp>
-      <p:sp>
-        <p:nvSpPr>
-          <p:cNvPr id="52" name="Text 25"/>
-          <p:cNvSpPr txBox="1"/>
-          <p:nvPr/>
-        </p:nvSpPr>
-        <p:spPr>
-          <a:xfrm>
-            <a:off x="5303520" y="2898648"/>
-            <a:ext cx="6245352" cy="384048"/>
-          </a:xfrm>
-          <a:prstGeom prst="rect">
-            <a:avLst/>
-          </a:prstGeom>
-          <a:noFill/>
-          <a:ln/>
-        </p:spPr>
-        <p:txBody>
-          <a:bodyPr wrap="square" lIns="0" tIns="0" rIns="0" bIns="0" rtlCol="0" anchor="ctr"/>
-          <a:lstStyle/>
-          <a:p>
-            <a:pPr marL="0" indent="0">
-              <a:buNone/>
-            </a:pPr>
-            <a:r>
-              <a:rPr lang="en-US" sz="1100" dirty="0">
-                <a:solidFill>
-                  <a:srgbClr val="000000"/>
-                </a:solidFill>
-                <a:latin typeface="General Sans" pitchFamily="34" charset="0"/>
-                <a:ea typeface="General Sans" pitchFamily="34" charset="-122"/>
-                <a:cs typeface="General Sans" pitchFamily="34" charset="-120"/>
-              </a:rPr>
-              <a:t>Wat is een skill, en waarom loont het om er één te maken?</a:t>
-            </a:r>
-            <a:endParaRPr lang="en-US" sz="1100" dirty="0"/>
-          </a:p>
-        </p:txBody>
-      </p:sp>
-      <p:sp>
-        <p:nvSpPr>
-          <p:cNvPr id="53" name="Shape 19"/>
-          <p:cNvSpPr/>
-          <p:nvPr/>
-        </p:nvSpPr>
-        <p:spPr>
-          <a:xfrm>
-            <a:off x="548640" y="3300984"/>
-            <a:ext cx="11091672" cy="384048"/>
-          </a:xfrm>
-          <a:prstGeom prst="roundRect">
-            <a:avLst>
-              <a:gd name="adj" fmla="val 31818"/>
-            </a:avLst>
-          </a:prstGeom>
-          <a:solidFill>
-            <a:srgbClr val="FFFFFF"/>
-          </a:solidFill>
-          <a:ln w="12700">
-            <a:solidFill>
-              <a:srgbClr val="FFFFFF"/>
-            </a:solidFill>
-            <a:prstDash val="solid"/>
-          </a:ln>
-        </p:spPr>
-        <p:txBody>
-          <a:bodyPr/>
-          <a:lstStyle/>
-          <a:p>
-            <a:endParaRPr lang="en-NL"/>
-          </a:p>
-        </p:txBody>
-      </p:sp>
-      <p:sp>
-        <p:nvSpPr>
-          <p:cNvPr id="54" name="Shape 20"/>
-          <p:cNvSpPr/>
-          <p:nvPr/>
-        </p:nvSpPr>
-        <p:spPr>
-          <a:xfrm>
-            <a:off x="640080" y="3346704"/>
-            <a:ext cx="292608" cy="292608"/>
-          </a:xfrm>
-          <a:prstGeom prst="ellipse">
-            <a:avLst/>
-          </a:prstGeom>
-          <a:solidFill>
-            <a:srgbClr val="F4D74B"/>
-          </a:solidFill>
-          <a:ln w="12700">
-            <a:solidFill>
-              <a:srgbClr val="F4D74B"/>
-            </a:solidFill>
-            <a:prstDash val="solid"/>
-          </a:ln>
-        </p:spPr>
-        <p:txBody>
-          <a:bodyPr/>
-          <a:lstStyle/>
-          <a:p>
-            <a:endParaRPr lang="en-NL"/>
-          </a:p>
-        </p:txBody>
-      </p:sp>
-      <p:sp>
-        <p:nvSpPr>
-          <p:cNvPr id="55" name="Text 21"/>
-          <p:cNvSpPr txBox="1"/>
-          <p:nvPr/>
-        </p:nvSpPr>
-        <p:spPr>
-          <a:xfrm>
-            <a:off x="640080" y="3346704"/>
-            <a:ext cx="292608" cy="292608"/>
-          </a:xfrm>
-          <a:prstGeom prst="rect">
-            <a:avLst/>
-          </a:prstGeom>
-          <a:noFill/>
-          <a:ln/>
-        </p:spPr>
-        <p:txBody>
-          <a:bodyPr wrap="square" lIns="0" tIns="0" rIns="0" bIns="0" rtlCol="0" anchor="ctr"/>
-          <a:lstStyle/>
-          <a:p>
-            <a:pPr marL="0" indent="0" algn="ctr">
-              <a:buNone/>
-            </a:pPr>
-            <a:r>
-              <a:rPr lang="en-US" sz="1100" b="1" dirty="0">
-                <a:solidFill>
-                  <a:srgbClr val="3D68EC"/>
-                </a:solidFill>
-                <a:latin typeface="General Sans" pitchFamily="34" charset="0"/>
-                <a:ea typeface="General Sans" pitchFamily="34" charset="-122"/>
-                <a:cs typeface="General Sans" pitchFamily="34" charset="-120"/>
-              </a:rPr>
-              <a:t>5</a:t>
-            </a:r>
-            <a:endParaRPr lang="en-US" sz="1100" dirty="0"/>
-          </a:p>
-        </p:txBody>
-      </p:sp>
-      <p:sp>
-        <p:nvSpPr>
-          <p:cNvPr id="56" name="Text 22"/>
-          <p:cNvSpPr txBox="1"/>
-          <p:nvPr/>
-        </p:nvSpPr>
-        <p:spPr>
-          <a:xfrm>
-            <a:off x="1097280" y="3300984"/>
-            <a:ext cx="640080" cy="384048"/>
-          </a:xfrm>
-          <a:prstGeom prst="rect">
-            <a:avLst/>
-          </a:prstGeom>
-          <a:noFill/>
-          <a:ln/>
-        </p:spPr>
-        <p:txBody>
-          <a:bodyPr wrap="square" lIns="0" tIns="0" rIns="0" bIns="0" rtlCol="0" anchor="ctr"/>
-          <a:lstStyle/>
-          <a:p>
-            <a:pPr marL="0" indent="0">
-              <a:buNone/>
-            </a:pPr>
-            <a:r>
-              <a:rPr lang="en-US" sz="1200" b="1" dirty="0">
-                <a:solidFill>
-                  <a:srgbClr val="3D68EC"/>
-                </a:solidFill>
-                <a:latin typeface="General Sans" pitchFamily="34" charset="0"/>
-                <a:ea typeface="General Sans" pitchFamily="34" charset="-122"/>
-                <a:cs typeface="General Sans" pitchFamily="34" charset="-120"/>
-              </a:rPr>
-              <a:t>0:25</a:t>
-            </a:r>
-            <a:endParaRPr lang="en-US" sz="1200" dirty="0"/>
-          </a:p>
-        </p:txBody>
-      </p:sp>
-      <p:sp>
-        <p:nvSpPr>
-          <p:cNvPr id="57" name="Text 23"/>
-          <p:cNvSpPr txBox="1"/>
-          <p:nvPr/>
-        </p:nvSpPr>
-        <p:spPr>
-          <a:xfrm>
-            <a:off x="1783080" y="3300984"/>
-            <a:ext cx="2834640" cy="384048"/>
-          </a:xfrm>
-          <a:prstGeom prst="rect">
-            <a:avLst/>
-          </a:prstGeom>
-          <a:noFill/>
-          <a:ln/>
-        </p:spPr>
-        <p:txBody>
-          <a:bodyPr wrap="square" lIns="0" tIns="0" rIns="0" bIns="0" rtlCol="0" anchor="ctr"/>
-          <a:lstStyle/>
-          <a:p>
-            <a:pPr marL="0" indent="0">
-              <a:buNone/>
-            </a:pPr>
-            <a:r>
-              <a:rPr lang="en-US" sz="1300" b="1" dirty="0">
-                <a:solidFill>
-                  <a:srgbClr val="000000"/>
-                </a:solidFill>
-                <a:latin typeface="General Sans" pitchFamily="34" charset="0"/>
-                <a:ea typeface="General Sans" pitchFamily="34" charset="-122"/>
-                <a:cs typeface="General Sans" pitchFamily="34" charset="-120"/>
-              </a:rPr>
-              <a:t>Devcontainer + voorbeeldprompt</a:t>
-            </a:r>
-            <a:endParaRPr lang="en-US" sz="1300" dirty="0"/>
-          </a:p>
-        </p:txBody>
-      </p:sp>
-      <p:sp>
-        <p:nvSpPr>
-          <p:cNvPr id="58" name="Text 24"/>
-          <p:cNvSpPr txBox="1"/>
-          <p:nvPr/>
-        </p:nvSpPr>
-        <p:spPr>
-          <a:xfrm>
-            <a:off x="4617720" y="3300984"/>
-            <a:ext cx="640080" cy="384048"/>
-          </a:xfrm>
-          <a:prstGeom prst="rect">
-            <a:avLst/>
-          </a:prstGeom>
-          <a:noFill/>
-          <a:ln/>
-        </p:spPr>
-        <p:txBody>
-          <a:bodyPr wrap="square" lIns="0" tIns="0" rIns="0" bIns="0" rtlCol="0" anchor="ctr"/>
-          <a:lstStyle/>
-          <a:p>
-            <a:pPr marL="0" indent="0">
-              <a:buNone/>
-            </a:pPr>
-            <a:r>
-              <a:rPr lang="en-US" sz="1200" dirty="0">
-                <a:solidFill>
-                  <a:srgbClr val="3D68EC"/>
-                </a:solidFill>
-                <a:latin typeface="General Sans" pitchFamily="34" charset="0"/>
-                <a:ea typeface="General Sans" pitchFamily="34" charset="-122"/>
-                <a:cs typeface="General Sans" pitchFamily="34" charset="-120"/>
-              </a:rPr>
-              <a:t>5 min</a:t>
-            </a:r>
-            <a:endParaRPr lang="en-US" sz="1200" dirty="0"/>
-          </a:p>
-        </p:txBody>
-      </p:sp>
-      <p:sp>
-        <p:nvSpPr>
-          <p:cNvPr id="59" name="Text 25"/>
-          <p:cNvSpPr txBox="1"/>
-          <p:nvPr/>
-        </p:nvSpPr>
-        <p:spPr>
-          <a:xfrm>
-            <a:off x="5303520" y="3300984"/>
-            <a:ext cx="6245352" cy="384048"/>
-          </a:xfrm>
-          <a:prstGeom prst="rect">
-            <a:avLst/>
-          </a:prstGeom>
-          <a:noFill/>
-          <a:ln/>
-        </p:spPr>
-        <p:txBody>
-          <a:bodyPr wrap="square" lIns="0" tIns="0" rIns="0" bIns="0" rtlCol="0" anchor="ctr"/>
-          <a:lstStyle/>
-          <a:p>
-            <a:pPr marL="0" indent="0">
-              <a:buNone/>
-            </a:pPr>
-            <a:r>
-              <a:rPr lang="en-US" sz="1100" dirty="0">
-                <a:solidFill>
-                  <a:srgbClr val="000000"/>
-                </a:solidFill>
-                <a:latin typeface="General Sans" pitchFamily="34" charset="0"/>
-                <a:ea typeface="General Sans" pitchFamily="34" charset="-122"/>
-                <a:cs typeface="General Sans" pitchFamily="34" charset="-120"/>
-              </a:rPr>
-              <a:t>Kijk hoe je de agent aanspreekt</a:t>
-            </a:r>
-            <a:endParaRPr lang="en-US" sz="1100" dirty="0"/>
-          </a:p>
-        </p:txBody>
-      </p:sp>
-      <p:sp>
-        <p:nvSpPr>
-          <p:cNvPr id="60" name="Shape 33"/>
-          <p:cNvSpPr/>
-          <p:nvPr/>
-        </p:nvSpPr>
-        <p:spPr>
-          <a:xfrm>
-            <a:off x="548640" y="3703320"/>
-            <a:ext cx="11091672" cy="384048"/>
-          </a:xfrm>
-          <a:prstGeom prst="roundRect">
-            <a:avLst>
-              <a:gd name="adj" fmla="val 31818"/>
-            </a:avLst>
-          </a:prstGeom>
-          <a:solidFill>
-            <a:srgbClr val="FFFFFF"/>
-          </a:solidFill>
-          <a:ln w="12700">
-            <a:solidFill>
-              <a:srgbClr val="FFFFFF"/>
-            </a:solidFill>
-            <a:prstDash val="solid"/>
-          </a:ln>
-        </p:spPr>
-        <p:txBody>
-          <a:bodyPr/>
-          <a:lstStyle/>
-          <a:p>
-            <a:endParaRPr lang="en-NL"/>
-          </a:p>
-        </p:txBody>
-      </p:sp>
-      <p:sp>
-        <p:nvSpPr>
-          <p:cNvPr id="61" name="Shape 34"/>
-          <p:cNvSpPr/>
-          <p:nvPr/>
-        </p:nvSpPr>
-        <p:spPr>
-          <a:xfrm>
-            <a:off x="640080" y="3749040"/>
-            <a:ext cx="292608" cy="292608"/>
-          </a:xfrm>
-          <a:prstGeom prst="ellipse">
-            <a:avLst/>
-          </a:prstGeom>
-          <a:solidFill>
-            <a:srgbClr val="3D68EC"/>
-          </a:solidFill>
-          <a:ln w="12700">
-            <a:solidFill>
-              <a:srgbClr val="3D68EC"/>
-            </a:solidFill>
-            <a:prstDash val="solid"/>
-          </a:ln>
-        </p:spPr>
-        <p:txBody>
-          <a:bodyPr/>
-          <a:lstStyle/>
-          <a:p>
-            <a:endParaRPr lang="en-NL"/>
-          </a:p>
-        </p:txBody>
-      </p:sp>
-      <p:sp>
-        <p:nvSpPr>
-          <p:cNvPr id="62" name="Text 35"/>
-          <p:cNvSpPr txBox="1"/>
-          <p:nvPr/>
-        </p:nvSpPr>
-        <p:spPr>
-          <a:xfrm>
-            <a:off x="640080" y="3749040"/>
-            <a:ext cx="292608" cy="292608"/>
-          </a:xfrm>
-          <a:prstGeom prst="rect">
-            <a:avLst/>
-          </a:prstGeom>
-          <a:noFill/>
-          <a:ln/>
-        </p:spPr>
-        <p:txBody>
-          <a:bodyPr wrap="square" lIns="0" tIns="0" rIns="0" bIns="0" rtlCol="0" anchor="ctr"/>
-          <a:lstStyle/>
-          <a:p>
-            <a:pPr marL="0" indent="0" algn="ctr">
-              <a:buNone/>
-            </a:pPr>
-            <a:r>
-              <a:rPr lang="en-US" sz="1100" b="1" dirty="0">
-                <a:solidFill>
-                  <a:srgbClr val="F4D74B"/>
-                </a:solidFill>
-                <a:latin typeface="General Sans" pitchFamily="34" charset="0"/>
-                <a:ea typeface="General Sans" pitchFamily="34" charset="-122"/>
-                <a:cs typeface="General Sans" pitchFamily="34" charset="-120"/>
-              </a:rPr>
-              <a:t>6</a:t>
-            </a:r>
-            <a:endParaRPr lang="en-US" sz="1100" dirty="0"/>
-          </a:p>
-        </p:txBody>
-      </p:sp>
-      <p:sp>
-        <p:nvSpPr>
-          <p:cNvPr id="63" name="Text 36"/>
-          <p:cNvSpPr txBox="1"/>
-          <p:nvPr/>
-        </p:nvSpPr>
-        <p:spPr>
-          <a:xfrm>
-            <a:off x="1097280" y="3703320"/>
-            <a:ext cx="640080" cy="384048"/>
-          </a:xfrm>
-          <a:prstGeom prst="rect">
-            <a:avLst/>
-          </a:prstGeom>
-          <a:noFill/>
-          <a:ln/>
-        </p:spPr>
-        <p:txBody>
-          <a:bodyPr wrap="square" lIns="0" tIns="0" rIns="0" bIns="0" rtlCol="0" anchor="ctr"/>
-          <a:lstStyle/>
-          <a:p>
-            <a:pPr marL="0" indent="0">
-              <a:buNone/>
-            </a:pPr>
-            <a:r>
-              <a:rPr lang="en-US" sz="1200" b="1" dirty="0">
-                <a:solidFill>
-                  <a:srgbClr val="3D68EC"/>
-                </a:solidFill>
-                <a:latin typeface="General Sans" pitchFamily="34" charset="0"/>
-                <a:ea typeface="General Sans" pitchFamily="34" charset="-122"/>
-                <a:cs typeface="General Sans" pitchFamily="34" charset="-120"/>
-              </a:rPr>
-              <a:t>0:30</a:t>
-            </a:r>
-            <a:endParaRPr lang="en-US" sz="1200" dirty="0"/>
-          </a:p>
-        </p:txBody>
-      </p:sp>
-      <p:sp>
-        <p:nvSpPr>
-          <p:cNvPr id="64" name="Text 37"/>
-          <p:cNvSpPr txBox="1"/>
-          <p:nvPr/>
-        </p:nvSpPr>
-        <p:spPr>
-          <a:xfrm>
-            <a:off x="1783080" y="3703320"/>
-            <a:ext cx="2834640" cy="384048"/>
-          </a:xfrm>
-          <a:prstGeom prst="rect">
-            <a:avLst/>
-          </a:prstGeom>
-          <a:noFill/>
-          <a:ln/>
-        </p:spPr>
-        <p:txBody>
-          <a:bodyPr wrap="square" lIns="0" tIns="0" rIns="0" bIns="0" rtlCol="0" anchor="ctr"/>
-          <a:lstStyle/>
-          <a:p>
-            <a:pPr marL="0" indent="0">
-              <a:buNone/>
-            </a:pPr>
-            <a:r>
-              <a:rPr lang="en-US" sz="1300" b="1" dirty="0">
-                <a:solidFill>
-                  <a:srgbClr val="000000"/>
-                </a:solidFill>
-                <a:latin typeface="General Sans" pitchFamily="34" charset="0"/>
-                <a:ea typeface="General Sans" pitchFamily="34" charset="-122"/>
-                <a:cs typeface="General Sans" pitchFamily="34" charset="-120"/>
-              </a:rPr>
-              <a:t>Ronde 1: data exploratie</a:t>
-            </a:r>
-            <a:endParaRPr lang="en-US" sz="1300" dirty="0"/>
-          </a:p>
-        </p:txBody>
-      </p:sp>
-      <p:sp>
-        <p:nvSpPr>
-          <p:cNvPr id="65" name="Text 38"/>
-          <p:cNvSpPr txBox="1"/>
-          <p:nvPr/>
-        </p:nvSpPr>
-        <p:spPr>
-          <a:xfrm>
-            <a:off x="4617720" y="3703320"/>
-            <a:ext cx="640080" cy="384048"/>
-          </a:xfrm>
-          <a:prstGeom prst="rect">
-            <a:avLst/>
-          </a:prstGeom>
-          <a:noFill/>
-          <a:ln/>
-        </p:spPr>
-        <p:txBody>
-          <a:bodyPr wrap="square" lIns="0" tIns="0" rIns="0" bIns="0" rtlCol="0" anchor="ctr"/>
-          <a:lstStyle/>
-          <a:p>
-            <a:pPr marL="0" indent="0">
-              <a:buNone/>
-            </a:pPr>
-            <a:r>
-              <a:rPr lang="en-US" sz="1200" dirty="0">
-                <a:solidFill>
-                  <a:srgbClr val="3D68EC"/>
-                </a:solidFill>
-                <a:latin typeface="General Sans" pitchFamily="34" charset="0"/>
-                <a:ea typeface="General Sans" pitchFamily="34" charset="-122"/>
-                <a:cs typeface="General Sans" pitchFamily="34" charset="-120"/>
-              </a:rPr>
-              <a:t>22 min</a:t>
-            </a:r>
-            <a:endParaRPr lang="en-US" sz="1200" dirty="0"/>
-          </a:p>
-        </p:txBody>
-      </p:sp>
-      <p:sp>
-        <p:nvSpPr>
-          <p:cNvPr id="66" name="Text 39"/>
-          <p:cNvSpPr txBox="1"/>
-          <p:nvPr/>
-        </p:nvSpPr>
-        <p:spPr>
-          <a:xfrm>
-            <a:off x="5303520" y="3703320"/>
-            <a:ext cx="6245352" cy="384048"/>
-          </a:xfrm>
-          <a:prstGeom prst="rect">
-            <a:avLst/>
-          </a:prstGeom>
-          <a:noFill/>
-          <a:ln/>
-        </p:spPr>
-        <p:txBody>
-          <a:bodyPr wrap="square" lIns="0" tIns="0" rIns="0" bIns="0" rtlCol="0" anchor="ctr"/>
-          <a:lstStyle/>
-          <a:p>
-            <a:pPr marL="0" indent="0">
-              <a:buNone/>
-            </a:pPr>
-            <a:r>
-              <a:rPr lang="en-US" sz="1100" dirty="0">
-                <a:solidFill>
-                  <a:srgbClr val="000000"/>
-                </a:solidFill>
-                <a:latin typeface="General Sans" pitchFamily="34" charset="0"/>
-                <a:ea typeface="General Sans" pitchFamily="34" charset="-122"/>
-                <a:cs typeface="General Sans" pitchFamily="34" charset="-120"/>
-              </a:rPr>
-              <a:t>Verken data en codebook, check kleine groepen en definities</a:t>
-            </a:r>
-            <a:endParaRPr lang="en-US" sz="1100" dirty="0"/>
-          </a:p>
-        </p:txBody>
-      </p:sp>
-      <p:sp>
-        <p:nvSpPr>
-          <p:cNvPr id="67" name="Shape 40"/>
-          <p:cNvSpPr/>
-          <p:nvPr/>
-        </p:nvSpPr>
-        <p:spPr>
-          <a:xfrm>
-            <a:off x="548640" y="4105656"/>
-            <a:ext cx="11091672" cy="384048"/>
-          </a:xfrm>
-          <a:prstGeom prst="roundRect">
-            <a:avLst>
-              <a:gd name="adj" fmla="val 31818"/>
-            </a:avLst>
-          </a:prstGeom>
-          <a:solidFill>
-            <a:srgbClr val="FFFFFF"/>
-          </a:solidFill>
-          <a:ln w="12700">
-            <a:solidFill>
-              <a:srgbClr val="FFFFFF"/>
-            </a:solidFill>
-            <a:prstDash val="solid"/>
-          </a:ln>
-        </p:spPr>
-        <p:txBody>
-          <a:bodyPr/>
-          <a:lstStyle/>
-          <a:p>
-            <a:endParaRPr lang="en-NL"/>
-          </a:p>
-        </p:txBody>
-      </p:sp>
-      <p:sp>
-        <p:nvSpPr>
-          <p:cNvPr id="68" name="Shape 41"/>
-          <p:cNvSpPr/>
-          <p:nvPr/>
-        </p:nvSpPr>
-        <p:spPr>
-          <a:xfrm>
-            <a:off x="640080" y="4151376"/>
-            <a:ext cx="292608" cy="292608"/>
-          </a:xfrm>
-          <a:prstGeom prst="ellipse">
-            <a:avLst/>
-          </a:prstGeom>
-          <a:solidFill>
-            <a:srgbClr val="DD784B"/>
-          </a:solidFill>
-          <a:ln w="12700">
-            <a:solidFill>
-              <a:srgbClr val="DD784B"/>
-            </a:solidFill>
-            <a:prstDash val="solid"/>
-          </a:ln>
-        </p:spPr>
-        <p:txBody>
-          <a:bodyPr/>
-          <a:lstStyle/>
-          <a:p>
-            <a:endParaRPr lang="en-NL"/>
-          </a:p>
-        </p:txBody>
-      </p:sp>
-      <p:sp>
-        <p:nvSpPr>
-          <p:cNvPr id="69" name="Text 42"/>
-          <p:cNvSpPr txBox="1"/>
-          <p:nvPr/>
-        </p:nvSpPr>
-        <p:spPr>
-          <a:xfrm>
-            <a:off x="640080" y="4151376"/>
-            <a:ext cx="292608" cy="292608"/>
-          </a:xfrm>
-          <a:prstGeom prst="rect">
-            <a:avLst/>
-          </a:prstGeom>
-          <a:noFill/>
-          <a:ln/>
-        </p:spPr>
-        <p:txBody>
-          <a:bodyPr wrap="square" lIns="0" tIns="0" rIns="0" bIns="0" rtlCol="0" anchor="ctr"/>
-          <a:lstStyle/>
-          <a:p>
-            <a:pPr marL="0" indent="0" algn="ctr">
-              <a:buNone/>
-            </a:pPr>
-            <a:r>
-              <a:rPr lang="en-US" sz="1100" b="1" dirty="0">
-                <a:solidFill>
-                  <a:srgbClr val="000000"/>
-                </a:solidFill>
-                <a:latin typeface="General Sans" pitchFamily="34" charset="0"/>
-                <a:ea typeface="General Sans" pitchFamily="34" charset="-122"/>
-                <a:cs typeface="General Sans" pitchFamily="34" charset="-120"/>
-              </a:rPr>
-              <a:t>7</a:t>
-            </a:r>
-            <a:endParaRPr lang="en-US" sz="1100" dirty="0"/>
-          </a:p>
-        </p:txBody>
-      </p:sp>
-      <p:sp>
-        <p:nvSpPr>
-          <p:cNvPr id="70" name="Text 43"/>
-          <p:cNvSpPr txBox="1"/>
-          <p:nvPr/>
-        </p:nvSpPr>
-        <p:spPr>
-          <a:xfrm>
-            <a:off x="1097280" y="4105656"/>
-            <a:ext cx="640080" cy="384048"/>
-          </a:xfrm>
-          <a:prstGeom prst="rect">
-            <a:avLst/>
-          </a:prstGeom>
-          <a:noFill/>
-          <a:ln/>
-        </p:spPr>
-        <p:txBody>
-          <a:bodyPr wrap="square" lIns="0" tIns="0" rIns="0" bIns="0" rtlCol="0" anchor="ctr"/>
-          <a:lstStyle/>
-          <a:p>
-            <a:pPr marL="0" indent="0">
-              <a:buNone/>
-            </a:pPr>
-            <a:r>
-              <a:rPr lang="en-US" sz="1200" b="1" dirty="0">
-                <a:solidFill>
-                  <a:srgbClr val="3D68EC"/>
-                </a:solidFill>
-                <a:latin typeface="General Sans" pitchFamily="34" charset="0"/>
-                <a:ea typeface="General Sans" pitchFamily="34" charset="-122"/>
-                <a:cs typeface="General Sans" pitchFamily="34" charset="-120"/>
-              </a:rPr>
-              <a:t>0:52</a:t>
-            </a:r>
-            <a:endParaRPr lang="en-US" sz="1200" dirty="0"/>
-          </a:p>
-        </p:txBody>
-      </p:sp>
-      <p:sp>
-        <p:nvSpPr>
-          <p:cNvPr id="71" name="Text 44"/>
-          <p:cNvSpPr txBox="1"/>
-          <p:nvPr/>
-        </p:nvSpPr>
-        <p:spPr>
-          <a:xfrm>
-            <a:off x="1783080" y="4105656"/>
-            <a:ext cx="2834640" cy="384048"/>
-          </a:xfrm>
-          <a:prstGeom prst="rect">
-            <a:avLst/>
-          </a:prstGeom>
-          <a:noFill/>
-          <a:ln/>
-        </p:spPr>
-        <p:txBody>
-          <a:bodyPr wrap="square" lIns="0" tIns="0" rIns="0" bIns="0" rtlCol="0" anchor="ctr"/>
-          <a:lstStyle/>
-          <a:p>
-            <a:pPr marL="0" indent="0">
-              <a:buNone/>
-            </a:pPr>
-            <a:r>
-              <a:rPr lang="en-US" sz="1300" b="1" dirty="0">
-                <a:solidFill>
-                  <a:srgbClr val="000000"/>
-                </a:solidFill>
-                <a:latin typeface="General Sans" pitchFamily="34" charset="0"/>
-                <a:ea typeface="General Sans" pitchFamily="34" charset="-122"/>
-                <a:cs typeface="General Sans" pitchFamily="34" charset="-120"/>
-              </a:rPr>
-              <a:t>Spiegelmoment 1</a:t>
-            </a:r>
-            <a:endParaRPr lang="en-US" sz="1300" dirty="0"/>
-          </a:p>
-        </p:txBody>
-      </p:sp>
-      <p:sp>
-        <p:nvSpPr>
-          <p:cNvPr id="72" name="Text 45"/>
-          <p:cNvSpPr txBox="1"/>
-          <p:nvPr/>
-        </p:nvSpPr>
-        <p:spPr>
-          <a:xfrm>
-            <a:off x="4617720" y="4105656"/>
-            <a:ext cx="640080" cy="384048"/>
-          </a:xfrm>
-          <a:prstGeom prst="rect">
-            <a:avLst/>
-          </a:prstGeom>
-          <a:noFill/>
-          <a:ln/>
-        </p:spPr>
-        <p:txBody>
-          <a:bodyPr wrap="square" lIns="0" tIns="0" rIns="0" bIns="0" rtlCol="0" anchor="ctr"/>
-          <a:lstStyle/>
-          <a:p>
-            <a:pPr marL="0" indent="0">
-              <a:buNone/>
-            </a:pPr>
-            <a:r>
-              <a:rPr lang="en-US" sz="1200" dirty="0">
-                <a:solidFill>
-                  <a:srgbClr val="3D68EC"/>
-                </a:solidFill>
-                <a:latin typeface="General Sans" pitchFamily="34" charset="0"/>
-                <a:ea typeface="General Sans" pitchFamily="34" charset="-122"/>
-                <a:cs typeface="General Sans" pitchFamily="34" charset="-120"/>
-              </a:rPr>
-              <a:t>15 min</a:t>
-            </a:r>
-            <a:endParaRPr lang="en-US" sz="1200" dirty="0"/>
-          </a:p>
-        </p:txBody>
-      </p:sp>
-      <p:sp>
-        <p:nvSpPr>
-          <p:cNvPr id="73" name="Text 46"/>
-          <p:cNvSpPr txBox="1"/>
-          <p:nvPr/>
-        </p:nvSpPr>
-        <p:spPr>
-          <a:xfrm>
-            <a:off x="5303520" y="4105656"/>
-            <a:ext cx="4297680" cy="384048"/>
-          </a:xfrm>
-          <a:prstGeom prst="rect">
-            <a:avLst/>
-          </a:prstGeom>
-          <a:noFill/>
-          <a:ln/>
-        </p:spPr>
-        <p:txBody>
-          <a:bodyPr wrap="square" lIns="0" tIns="0" rIns="0" bIns="0" rtlCol="0" anchor="ctr"/>
-          <a:lstStyle/>
-          <a:p>
-            <a:pPr marL="0" indent="0">
-              <a:buNone/>
-            </a:pPr>
-            <a:r>
-              <a:rPr lang="en-US" sz="1100" dirty="0">
-                <a:solidFill>
-                  <a:srgbClr val="000000"/>
-                </a:solidFill>
-                <a:latin typeface="General Sans" pitchFamily="34" charset="0"/>
-                <a:ea typeface="General Sans" pitchFamily="34" charset="-122"/>
-                <a:cs typeface="General Sans" pitchFamily="34" charset="-120"/>
-              </a:rPr>
-              <a:t>2-3 tweetallen delen hun aanpak, daarna de skill live</a:t>
-            </a:r>
-            <a:endParaRPr lang="en-US" sz="1100" dirty="0"/>
-          </a:p>
-        </p:txBody>
-      </p:sp>
-      <p:sp>
-        <p:nvSpPr>
-          <p:cNvPr id="74" name="Shape 47"/>
-          <p:cNvSpPr/>
-          <p:nvPr/>
-        </p:nvSpPr>
-        <p:spPr>
-          <a:xfrm>
-            <a:off x="9646920" y="4165092"/>
-            <a:ext cx="1874520" cy="265176"/>
-          </a:xfrm>
-          <a:prstGeom prst="roundRect">
-            <a:avLst>
-              <a:gd name="adj" fmla="val 50000"/>
-            </a:avLst>
-          </a:prstGeom>
-          <a:solidFill>
-            <a:srgbClr val="3D68EC"/>
-          </a:solidFill>
-          <a:ln w="12700">
-            <a:solidFill>
-              <a:srgbClr val="3D68EC"/>
-            </a:solidFill>
-            <a:prstDash val="solid"/>
-          </a:ln>
-        </p:spPr>
-        <p:txBody>
-          <a:bodyPr/>
-          <a:lstStyle/>
-          <a:p>
-            <a:endParaRPr lang="en-NL"/>
-          </a:p>
-        </p:txBody>
-      </p:sp>
-      <p:sp>
-        <p:nvSpPr>
-          <p:cNvPr id="75" name="Text 48"/>
-          <p:cNvSpPr txBox="1"/>
-          <p:nvPr/>
-        </p:nvSpPr>
-        <p:spPr>
-          <a:xfrm>
-            <a:off x="9646920" y="4165092"/>
-            <a:ext cx="1874520" cy="265176"/>
-          </a:xfrm>
-          <a:prstGeom prst="rect">
-            <a:avLst/>
-          </a:prstGeom>
-          <a:noFill/>
-          <a:ln/>
-        </p:spPr>
-        <p:txBody>
-          <a:bodyPr wrap="square" lIns="0" tIns="0" rIns="0" bIns="0" rtlCol="0" anchor="ctr"/>
-          <a:lstStyle/>
-          <a:p>
-            <a:pPr marL="0" indent="0" algn="ctr">
-              <a:buNone/>
-            </a:pPr>
-            <a:r>
-              <a:rPr lang="en-US" sz="1000" b="1" dirty="0">
-                <a:solidFill>
-                  <a:srgbClr val="F4D74B"/>
-                </a:solidFill>
-                <a:latin typeface="General Sans" pitchFamily="34" charset="0"/>
-                <a:ea typeface="General Sans" pitchFamily="34" charset="-122"/>
-                <a:cs typeface="General Sans" pitchFamily="34" charset="-120"/>
-              </a:rPr>
-              <a:t>Skill 1 doet ronde 1</a:t>
-            </a:r>
-            <a:endParaRPr lang="en-US" sz="1000" dirty="0"/>
-          </a:p>
-        </p:txBody>
-      </p:sp>
-      <p:sp>
-        <p:nvSpPr>
-          <p:cNvPr id="76" name="Shape 33"/>
-          <p:cNvSpPr/>
-          <p:nvPr/>
-        </p:nvSpPr>
-        <p:spPr>
-          <a:xfrm>
-            <a:off x="548640" y="4507991"/>
-            <a:ext cx="11091672" cy="384048"/>
-          </a:xfrm>
-          <a:prstGeom prst="roundRect">
-            <a:avLst>
-              <a:gd name="adj" fmla="val 31818"/>
-            </a:avLst>
-          </a:prstGeom>
-          <a:solidFill>
-            <a:srgbClr val="FFFFFF"/>
-          </a:solidFill>
-          <a:ln w="12700">
-            <a:solidFill>
-              <a:srgbClr val="FFFFFF"/>
-            </a:solidFill>
-            <a:prstDash val="solid"/>
-          </a:ln>
-        </p:spPr>
-        <p:txBody>
-          <a:bodyPr/>
-          <a:lstStyle/>
-          <a:p>
-            <a:endParaRPr lang="en-NL"/>
-          </a:p>
-        </p:txBody>
-      </p:sp>
-      <p:sp>
-        <p:nvSpPr>
-          <p:cNvPr id="77" name="Shape 34"/>
-          <p:cNvSpPr/>
-          <p:nvPr/>
-        </p:nvSpPr>
-        <p:spPr>
-          <a:xfrm>
-            <a:off x="640080" y="4553711"/>
-            <a:ext cx="292608" cy="292608"/>
-          </a:xfrm>
-          <a:prstGeom prst="ellipse">
-            <a:avLst/>
-          </a:prstGeom>
-          <a:solidFill>
-            <a:srgbClr val="3D68EC"/>
-          </a:solidFill>
-          <a:ln w="12700">
-            <a:solidFill>
-              <a:srgbClr val="3D68EC"/>
-            </a:solidFill>
-            <a:prstDash val="solid"/>
-          </a:ln>
-        </p:spPr>
-        <p:txBody>
-          <a:bodyPr/>
-          <a:lstStyle/>
-          <a:p>
-            <a:endParaRPr lang="en-NL"/>
-          </a:p>
-        </p:txBody>
-      </p:sp>
-      <p:sp>
-        <p:nvSpPr>
-          <p:cNvPr id="78" name="Text 35"/>
-          <p:cNvSpPr txBox="1"/>
-          <p:nvPr/>
-        </p:nvSpPr>
-        <p:spPr>
-          <a:xfrm>
-            <a:off x="640080" y="4553711"/>
-            <a:ext cx="292608" cy="292608"/>
-          </a:xfrm>
-          <a:prstGeom prst="rect">
-            <a:avLst/>
-          </a:prstGeom>
-          <a:noFill/>
-          <a:ln/>
-        </p:spPr>
-        <p:txBody>
-          <a:bodyPr wrap="square" lIns="0" tIns="0" rIns="0" bIns="0" rtlCol="0" anchor="ctr"/>
-          <a:lstStyle/>
-          <a:p>
-            <a:pPr marL="0" indent="0" algn="ctr">
-              <a:buNone/>
-            </a:pPr>
-            <a:r>
-              <a:rPr lang="en-US" sz="1100" b="1" dirty="0">
-                <a:solidFill>
-                  <a:srgbClr val="F4D74B"/>
-                </a:solidFill>
-                <a:latin typeface="General Sans" pitchFamily="34" charset="0"/>
-                <a:ea typeface="General Sans" pitchFamily="34" charset="-122"/>
-                <a:cs typeface="General Sans" pitchFamily="34" charset="-120"/>
-              </a:rPr>
-              <a:t>8</a:t>
-            </a:r>
-            <a:endParaRPr lang="en-US" sz="1100" dirty="0"/>
-          </a:p>
-        </p:txBody>
-      </p:sp>
-      <p:sp>
-        <p:nvSpPr>
-          <p:cNvPr id="79" name="Text 36"/>
-          <p:cNvSpPr txBox="1"/>
-          <p:nvPr/>
-        </p:nvSpPr>
-        <p:spPr>
-          <a:xfrm>
-            <a:off x="1097280" y="4507991"/>
-            <a:ext cx="640080" cy="384048"/>
-          </a:xfrm>
-          <a:prstGeom prst="rect">
-            <a:avLst/>
-          </a:prstGeom>
-          <a:noFill/>
-          <a:ln/>
-        </p:spPr>
-        <p:txBody>
-          <a:bodyPr wrap="square" lIns="0" tIns="0" rIns="0" bIns="0" rtlCol="0" anchor="ctr"/>
-          <a:lstStyle/>
-          <a:p>
-            <a:pPr marL="0" indent="0">
-              <a:buNone/>
-            </a:pPr>
-            <a:r>
-              <a:rPr lang="en-US" sz="1200" b="1" dirty="0">
-                <a:solidFill>
-                  <a:srgbClr val="3D68EC"/>
-                </a:solidFill>
-                <a:latin typeface="General Sans" pitchFamily="34" charset="0"/>
-                <a:ea typeface="General Sans" pitchFamily="34" charset="-122"/>
-                <a:cs typeface="General Sans" pitchFamily="34" charset="-120"/>
-              </a:rPr>
-              <a:t>1:07</a:t>
-            </a:r>
-            <a:endParaRPr lang="en-US" sz="1200" dirty="0"/>
-          </a:p>
-        </p:txBody>
-      </p:sp>
-      <p:sp>
-        <p:nvSpPr>
-          <p:cNvPr id="80" name="Text 37"/>
-          <p:cNvSpPr txBox="1"/>
-          <p:nvPr/>
-        </p:nvSpPr>
-        <p:spPr>
-          <a:xfrm>
-            <a:off x="1783080" y="4507991"/>
-            <a:ext cx="2834640" cy="384048"/>
-          </a:xfrm>
-          <a:prstGeom prst="rect">
-            <a:avLst/>
-          </a:prstGeom>
-          <a:noFill/>
-          <a:ln/>
-        </p:spPr>
-        <p:txBody>
-          <a:bodyPr wrap="square" lIns="0" tIns="0" rIns="0" bIns="0" rtlCol="0" anchor="ctr"/>
-          <a:lstStyle/>
-          <a:p>
-            <a:pPr marL="0" indent="0">
-              <a:buNone/>
-            </a:pPr>
-            <a:r>
-              <a:rPr lang="en-US" sz="1300" b="1" dirty="0">
-                <a:solidFill>
-                  <a:srgbClr val="000000"/>
-                </a:solidFill>
-                <a:latin typeface="General Sans" pitchFamily="34" charset="0"/>
-                <a:ea typeface="General Sans" pitchFamily="34" charset="-122"/>
-                <a:cs typeface="General Sans" pitchFamily="34" charset="-120"/>
-              </a:rPr>
-              <a:t>Ronde 2: dashboard bouwen</a:t>
-            </a:r>
-            <a:endParaRPr lang="en-US" sz="1300" dirty="0"/>
-          </a:p>
-        </p:txBody>
-      </p:sp>
-      <p:sp>
-        <p:nvSpPr>
-          <p:cNvPr id="81" name="Text 38"/>
-          <p:cNvSpPr txBox="1"/>
-          <p:nvPr/>
-        </p:nvSpPr>
-        <p:spPr>
-          <a:xfrm>
-            <a:off x="4617720" y="4507991"/>
-            <a:ext cx="640080" cy="384048"/>
-          </a:xfrm>
-          <a:prstGeom prst="rect">
-            <a:avLst/>
-          </a:prstGeom>
-          <a:noFill/>
-          <a:ln/>
-        </p:spPr>
-        <p:txBody>
-          <a:bodyPr wrap="square" lIns="0" tIns="0" rIns="0" bIns="0" rtlCol="0" anchor="ctr"/>
-          <a:lstStyle/>
-          <a:p>
-            <a:pPr marL="0" indent="0">
-              <a:buNone/>
-            </a:pPr>
-            <a:r>
-              <a:rPr lang="en-US" sz="1200" dirty="0">
-                <a:solidFill>
-                  <a:srgbClr val="3D68EC"/>
-                </a:solidFill>
-                <a:latin typeface="General Sans" pitchFamily="34" charset="0"/>
-                <a:ea typeface="General Sans" pitchFamily="34" charset="-122"/>
-                <a:cs typeface="General Sans" pitchFamily="34" charset="-120"/>
-              </a:rPr>
-              <a:t>22 min</a:t>
-            </a:r>
-            <a:endParaRPr lang="en-US" sz="1200" dirty="0"/>
-          </a:p>
-        </p:txBody>
-      </p:sp>
-      <p:sp>
-        <p:nvSpPr>
-          <p:cNvPr id="82" name="Text 39"/>
-          <p:cNvSpPr txBox="1"/>
-          <p:nvPr/>
-        </p:nvSpPr>
-        <p:spPr>
-          <a:xfrm>
-            <a:off x="5303520" y="4507991"/>
-            <a:ext cx="6245352" cy="384048"/>
-          </a:xfrm>
-          <a:prstGeom prst="rect">
-            <a:avLst/>
-          </a:prstGeom>
-          <a:noFill/>
-          <a:ln/>
-        </p:spPr>
-        <p:txBody>
-          <a:bodyPr wrap="square" lIns="0" tIns="0" rIns="0" bIns="0" rtlCol="0" anchor="ctr"/>
-          <a:lstStyle/>
-          <a:p>
-            <a:pPr marL="0" indent="0">
-              <a:buNone/>
-            </a:pPr>
-            <a:r>
-              <a:rPr lang="en-US" sz="1100" dirty="0">
-                <a:solidFill>
-                  <a:srgbClr val="000000"/>
-                </a:solidFill>
-                <a:latin typeface="General Sans" pitchFamily="34" charset="0"/>
-                <a:ea typeface="General Sans" pitchFamily="34" charset="-122"/>
-                <a:cs typeface="General Sans" pitchFamily="34" charset="-120"/>
-              </a:rPr>
-              <a:t>Bouw het dashboard met eerlijke framing en toegankelijke grafieken</a:t>
-            </a:r>
-            <a:endParaRPr lang="en-US" sz="1100" dirty="0"/>
-          </a:p>
-        </p:txBody>
-      </p:sp>
-      <p:sp>
-        <p:nvSpPr>
-          <p:cNvPr id="83" name="Shape 40"/>
-          <p:cNvSpPr/>
-          <p:nvPr/>
-        </p:nvSpPr>
-        <p:spPr>
-          <a:xfrm>
-            <a:off x="548640" y="4910328"/>
-            <a:ext cx="11091672" cy="384048"/>
-          </a:xfrm>
-          <a:prstGeom prst="roundRect">
-            <a:avLst>
-              <a:gd name="adj" fmla="val 31818"/>
-            </a:avLst>
-          </a:prstGeom>
-          <a:solidFill>
-            <a:srgbClr val="FFFFFF"/>
-          </a:solidFill>
-          <a:ln w="12700">
-            <a:solidFill>
-              <a:srgbClr val="FFFFFF"/>
-            </a:solidFill>
-            <a:prstDash val="solid"/>
-          </a:ln>
-        </p:spPr>
-        <p:txBody>
-          <a:bodyPr/>
-          <a:lstStyle/>
-          <a:p>
-            <a:endParaRPr lang="en-NL"/>
-          </a:p>
-        </p:txBody>
-      </p:sp>
-      <p:sp>
-        <p:nvSpPr>
-          <p:cNvPr id="84" name="Shape 41"/>
-          <p:cNvSpPr/>
-          <p:nvPr/>
-        </p:nvSpPr>
-        <p:spPr>
-          <a:xfrm>
-            <a:off x="640080" y="4956048"/>
-            <a:ext cx="292608" cy="292608"/>
-          </a:xfrm>
-          <a:prstGeom prst="ellipse">
-            <a:avLst/>
-          </a:prstGeom>
-          <a:solidFill>
-            <a:srgbClr val="DD784B"/>
-          </a:solidFill>
-          <a:ln w="12700">
-            <a:solidFill>
-              <a:srgbClr val="DD784B"/>
-            </a:solidFill>
-            <a:prstDash val="solid"/>
-          </a:ln>
-        </p:spPr>
-        <p:txBody>
-          <a:bodyPr/>
-          <a:lstStyle/>
-          <a:p>
-            <a:endParaRPr lang="en-NL"/>
-          </a:p>
-        </p:txBody>
-      </p:sp>
-      <p:sp>
-        <p:nvSpPr>
-          <p:cNvPr id="85" name="Text 42"/>
-          <p:cNvSpPr txBox="1"/>
-          <p:nvPr/>
-        </p:nvSpPr>
-        <p:spPr>
-          <a:xfrm>
-            <a:off x="640080" y="4956048"/>
-            <a:ext cx="292608" cy="292608"/>
-          </a:xfrm>
-          <a:prstGeom prst="rect">
-            <a:avLst/>
-          </a:prstGeom>
-          <a:noFill/>
-          <a:ln/>
-        </p:spPr>
-        <p:txBody>
-          <a:bodyPr wrap="square" lIns="0" tIns="0" rIns="0" bIns="0" rtlCol="0" anchor="ctr"/>
-          <a:lstStyle/>
-          <a:p>
-            <a:pPr marL="0" indent="0" algn="ctr">
-              <a:buNone/>
-            </a:pPr>
-            <a:r>
-              <a:rPr lang="en-US" sz="1100" b="1" dirty="0">
-                <a:solidFill>
-                  <a:srgbClr val="000000"/>
-                </a:solidFill>
-                <a:latin typeface="General Sans" pitchFamily="34" charset="0"/>
-                <a:ea typeface="General Sans" pitchFamily="34" charset="-122"/>
-                <a:cs typeface="General Sans" pitchFamily="34" charset="-120"/>
-              </a:rPr>
-              <a:t>9</a:t>
-            </a:r>
-            <a:endParaRPr lang="en-US" sz="1100" dirty="0"/>
-          </a:p>
-        </p:txBody>
-      </p:sp>
-      <p:sp>
-        <p:nvSpPr>
-          <p:cNvPr id="86" name="Text 43"/>
-          <p:cNvSpPr txBox="1"/>
-          <p:nvPr/>
-        </p:nvSpPr>
-        <p:spPr>
-          <a:xfrm>
-            <a:off x="1097280" y="4910328"/>
-            <a:ext cx="640080" cy="384048"/>
-          </a:xfrm>
-          <a:prstGeom prst="rect">
-            <a:avLst/>
-          </a:prstGeom>
-          <a:noFill/>
-          <a:ln/>
-        </p:spPr>
-        <p:txBody>
-          <a:bodyPr wrap="square" lIns="0" tIns="0" rIns="0" bIns="0" rtlCol="0" anchor="ctr"/>
-          <a:lstStyle/>
-          <a:p>
-            <a:pPr marL="0" indent="0">
-              <a:buNone/>
-            </a:pPr>
-            <a:r>
-              <a:rPr lang="en-US" sz="1200" b="1" dirty="0">
-                <a:solidFill>
-                  <a:srgbClr val="3D68EC"/>
-                </a:solidFill>
-                <a:latin typeface="General Sans" pitchFamily="34" charset="0"/>
-                <a:ea typeface="General Sans" pitchFamily="34" charset="-122"/>
-                <a:cs typeface="General Sans" pitchFamily="34" charset="-120"/>
-              </a:rPr>
-              <a:t>1:29</a:t>
-            </a:r>
-            <a:endParaRPr lang="en-US" sz="1200" dirty="0"/>
-          </a:p>
-        </p:txBody>
-      </p:sp>
-      <p:sp>
-        <p:nvSpPr>
-          <p:cNvPr id="87" name="Text 44"/>
-          <p:cNvSpPr txBox="1"/>
-          <p:nvPr/>
-        </p:nvSpPr>
-        <p:spPr>
-          <a:xfrm>
-            <a:off x="1783080" y="4910328"/>
-            <a:ext cx="2834640" cy="384048"/>
-          </a:xfrm>
-          <a:prstGeom prst="rect">
-            <a:avLst/>
-          </a:prstGeom>
-          <a:noFill/>
-          <a:ln/>
-        </p:spPr>
-        <p:txBody>
-          <a:bodyPr wrap="square" lIns="0" tIns="0" rIns="0" bIns="0" rtlCol="0" anchor="ctr"/>
-          <a:lstStyle/>
-          <a:p>
-            <a:pPr marL="0" indent="0">
-              <a:buNone/>
-            </a:pPr>
-            <a:r>
-              <a:rPr lang="en-US" sz="1300" b="1" dirty="0">
-                <a:solidFill>
-                  <a:srgbClr val="000000"/>
-                </a:solidFill>
-                <a:latin typeface="General Sans" pitchFamily="34" charset="0"/>
-                <a:ea typeface="General Sans" pitchFamily="34" charset="-122"/>
-                <a:cs typeface="General Sans" pitchFamily="34" charset="-120"/>
-              </a:rPr>
-              <a:t>Spiegelmoment 2</a:t>
-            </a:r>
-            <a:endParaRPr lang="en-US" sz="1300" dirty="0"/>
-          </a:p>
-        </p:txBody>
-      </p:sp>
-      <p:sp>
-        <p:nvSpPr>
-          <p:cNvPr id="88" name="Text 45"/>
-          <p:cNvSpPr txBox="1"/>
-          <p:nvPr/>
-        </p:nvSpPr>
-        <p:spPr>
-          <a:xfrm>
-            <a:off x="4617720" y="4910328"/>
-            <a:ext cx="640080" cy="384048"/>
-          </a:xfrm>
-          <a:prstGeom prst="rect">
-            <a:avLst/>
-          </a:prstGeom>
-          <a:noFill/>
-          <a:ln/>
-        </p:spPr>
-        <p:txBody>
-          <a:bodyPr wrap="square" lIns="0" tIns="0" rIns="0" bIns="0" rtlCol="0" anchor="ctr"/>
-          <a:lstStyle/>
-          <a:p>
-            <a:pPr marL="0" indent="0">
-              <a:buNone/>
-            </a:pPr>
-            <a:r>
-              <a:rPr lang="en-US" sz="1200" dirty="0">
-                <a:solidFill>
-                  <a:srgbClr val="3D68EC"/>
-                </a:solidFill>
-                <a:latin typeface="General Sans" pitchFamily="34" charset="0"/>
-                <a:ea typeface="General Sans" pitchFamily="34" charset="-122"/>
-                <a:cs typeface="General Sans" pitchFamily="34" charset="-120"/>
-              </a:rPr>
-              <a:t>15 min</a:t>
-            </a:r>
-            <a:endParaRPr lang="en-US" sz="1200" dirty="0"/>
-          </a:p>
-        </p:txBody>
-      </p:sp>
-      <p:sp>
-        <p:nvSpPr>
-          <p:cNvPr id="89" name="Text 46"/>
-          <p:cNvSpPr txBox="1"/>
-          <p:nvPr/>
-        </p:nvSpPr>
-        <p:spPr>
-          <a:xfrm>
-            <a:off x="5303520" y="4910328"/>
-            <a:ext cx="4297680" cy="384048"/>
-          </a:xfrm>
-          <a:prstGeom prst="rect">
-            <a:avLst/>
-          </a:prstGeom>
-          <a:noFill/>
-          <a:ln/>
-        </p:spPr>
-        <p:txBody>
-          <a:bodyPr wrap="square" lIns="0" tIns="0" rIns="0" bIns="0" rtlCol="0" anchor="ctr"/>
-          <a:lstStyle/>
-          <a:p>
-            <a:pPr marL="0" indent="0">
-              <a:buNone/>
-            </a:pPr>
-            <a:r>
-              <a:rPr lang="en-US" sz="1100" dirty="0">
-                <a:solidFill>
-                  <a:srgbClr val="000000"/>
-                </a:solidFill>
-                <a:latin typeface="General Sans" pitchFamily="34" charset="0"/>
-                <a:ea typeface="General Sans" pitchFamily="34" charset="-122"/>
-                <a:cs typeface="General Sans" pitchFamily="34" charset="-120"/>
-              </a:rPr>
-              <a:t>Toon 2-3 dashboards: wat deed jij anders, wat miste de agent?</a:t>
-            </a:r>
-            <a:endParaRPr lang="en-US" sz="1100" dirty="0"/>
-          </a:p>
-        </p:txBody>
-      </p:sp>
-      <p:sp>
-        <p:nvSpPr>
-          <p:cNvPr id="90" name="Shape 47"/>
-          <p:cNvSpPr/>
-          <p:nvPr/>
-        </p:nvSpPr>
-        <p:spPr>
-          <a:xfrm>
-            <a:off x="9646920" y="4969764"/>
-            <a:ext cx="1874520" cy="265176"/>
-          </a:xfrm>
-          <a:prstGeom prst="roundRect">
-            <a:avLst>
-              <a:gd name="adj" fmla="val 50000"/>
-            </a:avLst>
-          </a:prstGeom>
-          <a:solidFill>
-            <a:srgbClr val="3D68EC"/>
-          </a:solidFill>
-          <a:ln w="12700">
-            <a:solidFill>
-              <a:srgbClr val="3D68EC"/>
-            </a:solidFill>
-            <a:prstDash val="solid"/>
-          </a:ln>
-        </p:spPr>
-        <p:txBody>
-          <a:bodyPr/>
-          <a:lstStyle/>
-          <a:p>
-            <a:endParaRPr lang="en-NL"/>
-          </a:p>
-        </p:txBody>
-      </p:sp>
-      <p:sp>
-        <p:nvSpPr>
-          <p:cNvPr id="91" name="Text 48"/>
-          <p:cNvSpPr txBox="1"/>
-          <p:nvPr/>
-        </p:nvSpPr>
-        <p:spPr>
-          <a:xfrm>
-            <a:off x="9646920" y="4969764"/>
-            <a:ext cx="1874520" cy="265176"/>
-          </a:xfrm>
-          <a:prstGeom prst="rect">
-            <a:avLst/>
-          </a:prstGeom>
-          <a:noFill/>
-          <a:ln/>
-        </p:spPr>
-        <p:txBody>
-          <a:bodyPr wrap="square" lIns="0" tIns="0" rIns="0" bIns="0" rtlCol="0" anchor="ctr"/>
-          <a:lstStyle/>
-          <a:p>
-            <a:pPr marL="0" indent="0" algn="ctr">
-              <a:buNone/>
-            </a:pPr>
-            <a:r>
-              <a:rPr lang="en-US" sz="1000" b="1" dirty="0">
-                <a:solidFill>
-                  <a:srgbClr val="F4D74B"/>
-                </a:solidFill>
-                <a:latin typeface="General Sans" pitchFamily="34" charset="0"/>
-                <a:ea typeface="General Sans" pitchFamily="34" charset="-122"/>
-                <a:cs typeface="General Sans" pitchFamily="34" charset="-120"/>
-              </a:rPr>
-              <a:t>Skill 2 doet ronde 2</a:t>
-            </a:r>
-            <a:endParaRPr lang="en-US" sz="1000" dirty="0"/>
-          </a:p>
-        </p:txBody>
-      </p:sp>
-      <p:sp>
-        <p:nvSpPr>
-          <p:cNvPr id="92" name="Shape 81"/>
-          <p:cNvSpPr/>
-          <p:nvPr/>
-        </p:nvSpPr>
-        <p:spPr>
-          <a:xfrm>
-            <a:off x="548640" y="5312664"/>
-            <a:ext cx="11091672" cy="384048"/>
-          </a:xfrm>
-          <a:prstGeom prst="roundRect">
-            <a:avLst>
-              <a:gd name="adj" fmla="val 31818"/>
-            </a:avLst>
-          </a:prstGeom>
-          <a:solidFill>
-            <a:srgbClr val="FFFFFF"/>
-          </a:solidFill>
-          <a:ln w="12700">
-            <a:solidFill>
-              <a:srgbClr val="FFFFFF"/>
-            </a:solidFill>
-            <a:prstDash val="solid"/>
-          </a:ln>
-        </p:spPr>
-        <p:txBody>
-          <a:bodyPr/>
-          <a:lstStyle/>
-          <a:p>
-            <a:endParaRPr lang="en-NL"/>
-          </a:p>
-        </p:txBody>
-      </p:sp>
-      <p:sp>
-        <p:nvSpPr>
-          <p:cNvPr id="93" name="Shape 82"/>
-          <p:cNvSpPr/>
-          <p:nvPr/>
-        </p:nvSpPr>
-        <p:spPr>
-          <a:xfrm>
-            <a:off x="640080" y="5358384"/>
-            <a:ext cx="292608" cy="292608"/>
-          </a:xfrm>
-          <a:prstGeom prst="ellipse">
-            <a:avLst/>
-          </a:prstGeom>
-          <a:solidFill>
-            <a:srgbClr val="00AF81"/>
-          </a:solidFill>
-          <a:ln w="12700">
-            <a:solidFill>
-              <a:srgbClr val="00AF81"/>
-            </a:solidFill>
-            <a:prstDash val="solid"/>
-          </a:ln>
-        </p:spPr>
-        <p:txBody>
-          <a:bodyPr/>
-          <a:lstStyle/>
-          <a:p>
-            <a:endParaRPr lang="en-NL"/>
-          </a:p>
-        </p:txBody>
-      </p:sp>
-      <p:sp>
-        <p:nvSpPr>
-          <p:cNvPr id="94" name="Text 83"/>
-          <p:cNvSpPr txBox="1"/>
-          <p:nvPr/>
-        </p:nvSpPr>
-        <p:spPr>
-          <a:xfrm>
-            <a:off x="640080" y="5358384"/>
-            <a:ext cx="292608" cy="292608"/>
-          </a:xfrm>
-          <a:prstGeom prst="rect">
-            <a:avLst/>
-          </a:prstGeom>
-          <a:noFill/>
-          <a:ln/>
-        </p:spPr>
-        <p:txBody>
-          <a:bodyPr wrap="square" lIns="0" tIns="0" rIns="0" bIns="0" rtlCol="0" anchor="ctr"/>
-          <a:lstStyle/>
-          <a:p>
-            <a:pPr marL="0" indent="0" algn="ctr">
-              <a:buNone/>
-            </a:pPr>
-            <a:r>
-              <a:rPr lang="en-US" sz="1100" b="1" dirty="0">
-                <a:solidFill>
-                  <a:srgbClr val="F4D9DC"/>
-                </a:solidFill>
-                <a:latin typeface="General Sans" pitchFamily="34" charset="0"/>
-                <a:ea typeface="General Sans" pitchFamily="34" charset="-122"/>
-                <a:cs typeface="General Sans" pitchFamily="34" charset="-120"/>
-              </a:rPr>
-              <a:t>10</a:t>
-            </a:r>
-            <a:endParaRPr lang="en-US" sz="1100" dirty="0"/>
-          </a:p>
-        </p:txBody>
-      </p:sp>
-      <p:sp>
-        <p:nvSpPr>
-          <p:cNvPr id="95" name="Text 84"/>
-          <p:cNvSpPr txBox="1"/>
-          <p:nvPr/>
-        </p:nvSpPr>
-        <p:spPr>
-          <a:xfrm>
-            <a:off x="1097280" y="5312664"/>
-            <a:ext cx="640080" cy="384048"/>
-          </a:xfrm>
-          <a:prstGeom prst="rect">
-            <a:avLst/>
-          </a:prstGeom>
-          <a:noFill/>
-          <a:ln/>
-        </p:spPr>
-        <p:txBody>
-          <a:bodyPr wrap="square" lIns="0" tIns="0" rIns="0" bIns="0" rtlCol="0" anchor="ctr"/>
-          <a:lstStyle/>
-          <a:p>
-            <a:pPr marL="0" indent="0">
-              <a:buNone/>
-            </a:pPr>
-            <a:r>
-              <a:rPr lang="en-US" sz="1200" b="1" dirty="0">
-                <a:solidFill>
-                  <a:srgbClr val="3D68EC"/>
-                </a:solidFill>
-                <a:latin typeface="General Sans" pitchFamily="34" charset="0"/>
-                <a:ea typeface="General Sans" pitchFamily="34" charset="-122"/>
-                <a:cs typeface="General Sans" pitchFamily="34" charset="-120"/>
-              </a:rPr>
-              <a:t>1:44</a:t>
-            </a:r>
-            <a:endParaRPr lang="en-US" sz="1200" dirty="0"/>
-          </a:p>
-        </p:txBody>
-      </p:sp>
-      <p:sp>
-        <p:nvSpPr>
-          <p:cNvPr id="96" name="Text 85"/>
-          <p:cNvSpPr txBox="1"/>
-          <p:nvPr/>
-        </p:nvSpPr>
-        <p:spPr>
-          <a:xfrm>
-            <a:off x="1783080" y="5312664"/>
-            <a:ext cx="2834640" cy="384048"/>
-          </a:xfrm>
-          <a:prstGeom prst="rect">
-            <a:avLst/>
-          </a:prstGeom>
-          <a:noFill/>
-          <a:ln/>
-        </p:spPr>
-        <p:txBody>
-          <a:bodyPr wrap="square" lIns="0" tIns="0" rIns="0" bIns="0" rtlCol="0" anchor="ctr"/>
-          <a:lstStyle/>
-          <a:p>
-            <a:pPr marL="0" indent="0">
-              <a:buNone/>
-            </a:pPr>
-            <a:r>
-              <a:rPr lang="en-US" sz="1300" b="1" dirty="0">
-                <a:solidFill>
-                  <a:srgbClr val="000000"/>
-                </a:solidFill>
-                <a:latin typeface="General Sans" pitchFamily="34" charset="0"/>
-                <a:ea typeface="General Sans" pitchFamily="34" charset="-122"/>
-                <a:cs typeface="General Sans" pitchFamily="34" charset="-120"/>
-              </a:rPr>
-              <a:t>Evaluatie en vervolg</a:t>
-            </a:r>
-            <a:endParaRPr lang="en-US" sz="1300" dirty="0"/>
-          </a:p>
-        </p:txBody>
-      </p:sp>
-      <p:sp>
-        <p:nvSpPr>
-          <p:cNvPr id="97" name="Text 86"/>
-          <p:cNvSpPr txBox="1"/>
-          <p:nvPr/>
-        </p:nvSpPr>
-        <p:spPr>
-          <a:xfrm>
-            <a:off x="4617720" y="5312664"/>
-            <a:ext cx="640080" cy="384048"/>
-          </a:xfrm>
-          <a:prstGeom prst="rect">
-            <a:avLst/>
-          </a:prstGeom>
-          <a:noFill/>
-          <a:ln/>
-        </p:spPr>
-        <p:txBody>
-          <a:bodyPr wrap="square" lIns="0" tIns="0" rIns="0" bIns="0" rtlCol="0" anchor="ctr"/>
-          <a:lstStyle/>
-          <a:p>
-            <a:pPr marL="0" indent="0">
-              <a:buNone/>
-            </a:pPr>
-            <a:r>
-              <a:rPr lang="en-US" sz="1200" dirty="0">
-                <a:solidFill>
-                  <a:srgbClr val="3D68EC"/>
-                </a:solidFill>
-                <a:latin typeface="General Sans" pitchFamily="34" charset="0"/>
-                <a:ea typeface="General Sans" pitchFamily="34" charset="-122"/>
-                <a:cs typeface="General Sans" pitchFamily="34" charset="-120"/>
-              </a:rPr>
-              <a:t>8 min</a:t>
-            </a:r>
-            <a:endParaRPr lang="en-US" sz="1200" dirty="0"/>
-          </a:p>
-        </p:txBody>
-      </p:sp>
-      <p:sp>
-        <p:nvSpPr>
-          <p:cNvPr id="98" name="Text 87"/>
-          <p:cNvSpPr txBox="1"/>
-          <p:nvPr/>
-        </p:nvSpPr>
-        <p:spPr>
-          <a:xfrm>
-            <a:off x="5303520" y="5312664"/>
-            <a:ext cx="6245352" cy="384048"/>
-          </a:xfrm>
-          <a:prstGeom prst="rect">
-            <a:avLst/>
-          </a:prstGeom>
-          <a:noFill/>
-          <a:ln/>
-        </p:spPr>
-        <p:txBody>
-          <a:bodyPr wrap="square" lIns="0" tIns="0" rIns="0" bIns="0" rtlCol="0" anchor="ctr"/>
-          <a:lstStyle/>
-          <a:p>
-            <a:pPr marL="0" indent="0">
-              <a:buNone/>
-            </a:pPr>
-            <a:r>
-              <a:rPr lang="en-US" sz="1100" dirty="0">
-                <a:solidFill>
-                  <a:srgbClr val="000000"/>
-                </a:solidFill>
-                <a:latin typeface="General Sans" pitchFamily="34" charset="0"/>
-                <a:ea typeface="General Sans" pitchFamily="34" charset="-122"/>
-                <a:cs typeface="General Sans" pitchFamily="34" charset="-120"/>
-              </a:rPr>
-              <a:t>Terugblik, interesse in een training en wat je wilt leren</a:t>
-            </a:r>
-            <a:endParaRPr lang="en-US" sz="1100" dirty="0"/>
-          </a:p>
-        </p:txBody>
-      </p:sp>
-      <p:sp>
-        <p:nvSpPr>
-          <p:cNvPr id="92" name="Shape 81"/>
-          <p:cNvSpPr/>
-          <p:nvPr/>
-        </p:nvSpPr>
-        <p:spPr>
-          <a:xfrm>
-            <a:off x="548640" y="5715000"/>
-            <a:ext cx="11091672" cy="384048"/>
-          </a:xfrm>
-          <a:prstGeom prst="roundRect">
-            <a:avLst>
-              <a:gd name="adj" fmla="val 31818"/>
-            </a:avLst>
-          </a:prstGeom>
-          <a:solidFill>
-            <a:srgbClr val="FFFFFF"/>
-          </a:solidFill>
-          <a:ln w="12700">
-            <a:solidFill>
-              <a:srgbClr val="FFFFFF"/>
-            </a:solidFill>
-            <a:prstDash val="solid"/>
-          </a:ln>
-        </p:spPr>
-        <p:txBody>
-          <a:bodyPr/>
-          <a:lstStyle/>
-          <a:p>
-            <a:endParaRPr lang="en-NL"/>
-          </a:p>
-        </p:txBody>
-      </p:sp>
-      <p:sp>
-        <p:nvSpPr>
-          <p:cNvPr id="93" name="Shape 82"/>
-          <p:cNvSpPr/>
-          <p:nvPr/>
-        </p:nvSpPr>
-        <p:spPr>
-          <a:xfrm>
-            <a:off x="640080" y="5760720"/>
-            <a:ext cx="292608" cy="292608"/>
-          </a:xfrm>
-          <a:prstGeom prst="ellipse">
-            <a:avLst/>
-          </a:prstGeom>
-          <a:solidFill>
-            <a:srgbClr val="00AF81"/>
-          </a:solidFill>
-          <a:ln w="12700">
-            <a:solidFill>
-              <a:srgbClr val="00AF81"/>
-            </a:solidFill>
-            <a:prstDash val="solid"/>
-          </a:ln>
-        </p:spPr>
-        <p:txBody>
-          <a:bodyPr/>
-          <a:lstStyle/>
-          <a:p>
-            <a:endParaRPr lang="en-NL"/>
-          </a:p>
-        </p:txBody>
-      </p:sp>
-      <p:sp>
-        <p:nvSpPr>
-          <p:cNvPr id="94" name="Text 83"/>
-          <p:cNvSpPr txBox="1"/>
-          <p:nvPr/>
-        </p:nvSpPr>
-        <p:spPr>
-          <a:xfrm>
-            <a:off x="640080" y="5760720"/>
-            <a:ext cx="292608" cy="292608"/>
-          </a:xfrm>
-          <a:prstGeom prst="rect">
-            <a:avLst/>
-          </a:prstGeom>
-          <a:noFill/>
-          <a:ln/>
-        </p:spPr>
-        <p:txBody>
-          <a:bodyPr wrap="square" lIns="0" tIns="0" rIns="0" bIns="0" rtlCol="0" anchor="ctr"/>
-          <a:lstStyle/>
-          <a:p>
-            <a:pPr marL="0" indent="0" algn="ctr">
-              <a:buNone/>
-            </a:pPr>
-            <a:r>
-              <a:rPr lang="en-US" sz="1100" b="1" dirty="0">
-                <a:solidFill>
-                  <a:srgbClr val="F4D9DC"/>
-                </a:solidFill>
-                <a:latin typeface="General Sans" pitchFamily="34" charset="0"/>
-                <a:ea typeface="General Sans" pitchFamily="34" charset="-122"/>
-                <a:cs typeface="General Sans" pitchFamily="34" charset="-120"/>
-              </a:rPr>
-              <a:t>11</a:t>
-            </a:r>
-            <a:endParaRPr lang="en-US" sz="1100" dirty="0"/>
-          </a:p>
-        </p:txBody>
-      </p:sp>
-      <p:sp>
-        <p:nvSpPr>
-          <p:cNvPr id="95" name="Text 84"/>
-          <p:cNvSpPr txBox="1"/>
-          <p:nvPr/>
-        </p:nvSpPr>
-        <p:spPr>
-          <a:xfrm>
-            <a:off x="1097280" y="5715000"/>
-            <a:ext cx="640080" cy="384048"/>
-          </a:xfrm>
-          <a:prstGeom prst="rect">
-            <a:avLst/>
-          </a:prstGeom>
-          <a:noFill/>
-          <a:ln/>
-        </p:spPr>
-        <p:txBody>
-          <a:bodyPr wrap="square" lIns="0" tIns="0" rIns="0" bIns="0" rtlCol="0" anchor="ctr"/>
-          <a:lstStyle/>
-          <a:p>
-            <a:pPr marL="0" indent="0">
-              <a:buNone/>
-            </a:pPr>
-            <a:r>
-              <a:rPr lang="en-US" sz="1200" b="1" dirty="0">
-                <a:solidFill>
-                  <a:srgbClr val="3D68EC"/>
-                </a:solidFill>
-                <a:latin typeface="General Sans" pitchFamily="34" charset="0"/>
-                <a:ea typeface="General Sans" pitchFamily="34" charset="-122"/>
-                <a:cs typeface="General Sans" pitchFamily="34" charset="-120"/>
-              </a:rPr>
-              <a:t>1:52</a:t>
-            </a:r>
-            <a:endParaRPr lang="en-US" sz="1200" dirty="0"/>
-          </a:p>
-        </p:txBody>
-      </p:sp>
-      <p:sp>
-        <p:nvSpPr>
-          <p:cNvPr id="96" name="Text 85"/>
-          <p:cNvSpPr txBox="1"/>
-          <p:nvPr/>
-        </p:nvSpPr>
-        <p:spPr>
-          <a:xfrm>
-            <a:off x="1783080" y="5715000"/>
-            <a:ext cx="2834640" cy="384048"/>
-          </a:xfrm>
-          <a:prstGeom prst="rect">
-            <a:avLst/>
-          </a:prstGeom>
-          <a:noFill/>
-          <a:ln/>
-        </p:spPr>
-        <p:txBody>
-          <a:bodyPr wrap="square" lIns="0" tIns="0" rIns="0" bIns="0" rtlCol="0" anchor="ctr"/>
-          <a:lstStyle/>
-          <a:p>
-            <a:pPr marL="0" indent="0">
-              <a:buNone/>
-            </a:pPr>
-            <a:r>
-              <a:rPr lang="en-US" sz="1300" b="1" dirty="0">
-                <a:solidFill>
-                  <a:srgbClr val="000000"/>
-                </a:solidFill>
-                <a:latin typeface="General Sans" pitchFamily="34" charset="0"/>
-                <a:ea typeface="General Sans" pitchFamily="34" charset="-122"/>
-                <a:cs typeface="General Sans" pitchFamily="34" charset="-120"/>
-              </a:rPr>
-              <a:t>Afsluiting</a:t>
-            </a:r>
-            <a:endParaRPr lang="en-US" sz="1300" dirty="0"/>
-          </a:p>
-        </p:txBody>
-      </p:sp>
-      <p:sp>
-        <p:nvSpPr>
-          <p:cNvPr id="97" name="Text 86"/>
-          <p:cNvSpPr txBox="1"/>
-          <p:nvPr/>
-        </p:nvSpPr>
-        <p:spPr>
-          <a:xfrm>
-            <a:off x="4617720" y="5715000"/>
-            <a:ext cx="640080" cy="384048"/>
-          </a:xfrm>
-          <a:prstGeom prst="rect">
-            <a:avLst/>
-          </a:prstGeom>
-          <a:noFill/>
-          <a:ln/>
-        </p:spPr>
-        <p:txBody>
-          <a:bodyPr wrap="square" lIns="0" tIns="0" rIns="0" bIns="0" rtlCol="0" anchor="ctr"/>
-          <a:lstStyle/>
-          <a:p>
-            <a:pPr marL="0" indent="0">
-              <a:buNone/>
-            </a:pPr>
-            <a:r>
-              <a:rPr lang="en-US" sz="1200" dirty="0">
-                <a:solidFill>
-                  <a:srgbClr val="3D68EC"/>
-                </a:solidFill>
-                <a:latin typeface="General Sans" pitchFamily="34" charset="0"/>
-                <a:ea typeface="General Sans" pitchFamily="34" charset="-122"/>
-                <a:cs typeface="General Sans" pitchFamily="34" charset="-120"/>
-              </a:rPr>
-              <a:t>8 min</a:t>
-            </a:r>
-            <a:endParaRPr lang="en-US" sz="1200" dirty="0"/>
-          </a:p>
-        </p:txBody>
-      </p:sp>
-      <p:sp>
-        <p:nvSpPr>
-          <p:cNvPr id="98" name="Text 87"/>
-          <p:cNvSpPr txBox="1"/>
-          <p:nvPr/>
-        </p:nvSpPr>
-        <p:spPr>
-          <a:xfrm>
-            <a:off x="5303520" y="5715000"/>
-            <a:ext cx="6245352" cy="384048"/>
-          </a:xfrm>
-          <a:prstGeom prst="rect">
-            <a:avLst/>
-          </a:prstGeom>
-          <a:noFill/>
-          <a:ln/>
-        </p:spPr>
-        <p:txBody>
-          <a:bodyPr wrap="square" lIns="0" tIns="0" rIns="0" bIns="0" rtlCol="0" anchor="ctr"/>
-          <a:lstStyle/>
-          <a:p>
-            <a:pPr marL="0" indent="0">
-              <a:buNone/>
-            </a:pPr>
-            <a:r>
-              <a:rPr lang="en-US" sz="1100" dirty="0">
-                <a:solidFill>
-                  <a:srgbClr val="000000"/>
-                </a:solidFill>
-                <a:latin typeface="General Sans" pitchFamily="34" charset="0"/>
-                <a:ea typeface="General Sans" pitchFamily="34" charset="-122"/>
-                <a:cs typeface="General Sans" pitchFamily="34" charset="-120"/>
-              </a:rPr>
-              <a:t>Reflecteer: wat verloor en won je? Wat neem je mee?</a:t>
-            </a:r>
-            <a:endParaRPr lang="en-US" sz="1100" dirty="0"/>
-          </a:p>
-        </p:txBody>
-      </p:sp>
-      <p:sp>
-        <p:nvSpPr>
           <p:cNvPr id="99" name="Text 88"/>
           <p:cNvSpPr txBox="1"/>
           <p:nvPr/>
         </p:nvSpPr>
         <p:spPr>
           <a:xfrm>
-            <a:off x="548640" y="6190488"/>
-            <a:ext cx="11091672" cy="457200"/>
+            <a:off x="548640" y="5989320"/>
+            <a:ext cx="11091672" cy="502920"/>
           </a:xfrm>
           <a:prstGeom prst="rect">
             <a:avLst/>

--- a/workshop-rad/exports/workshop-voorstel-RAD_120min.pptx
+++ b/workshop-rad/exports/workshop-voorstel-RAD_120min.pptx
@@ -2776,7 +2776,7 @@
                 <a:ea typeface="General Sans" pitchFamily="34" charset="-122"/>
                 <a:cs typeface="General Sans" pitchFamily="34" charset="-120"/>
               </a:rPr>
-              <a:t>Data en codebook verkennen met de agent, de code controleren en kleine groepen en definities vastleggen.</a:t>
+              <a:t>Data en codebook verkennen met de agent, de uitkomsten controleren en kleine groepen en definities vastleggen.</a:t>
             </a:r>
             <a:endParaRPr lang="en-US" sz="1400" dirty="0"/>
           </a:p>
@@ -4021,7 +4021,7 @@
                 <a:ea typeface="General Sans" pitchFamily="34" charset="-122"/>
                 <a:cs typeface="General Sans" pitchFamily="34" charset="-120"/>
               </a:rPr>
-              <a:t>Skills werken via vaste tussenproducten (bijvoorbeeld data.csv en schets.md), zodat elke stap na te lopen is. Responsible-checks zitten in beide skills verweven. De skills zijn bestanden in de repo en kosten €0.</a:t>
+              <a:t>/workshop-verkennen en /workshop-dashboard, plus /workshop-reflectie voor de evaluatie. Deelnemers prompten zelf; de leider draait de skills live (gemeten: ongeveer 1 en 2 tot 2,5 minuut). Vaste tussenproducten, kosten €0.</a:t>
             </a:r>
             <a:endParaRPr lang="en-US" sz="1300" dirty="0"/>
           </a:p>
@@ -4514,7 +4514,7 @@
                 <a:ea typeface="General Sans" pitchFamily="34" charset="-122"/>
                 <a:cs typeface="General Sans" pitchFamily="34" charset="-120"/>
               </a:rPr>
-              <a:t>Drempel voor kleine aantallen (bijvoorbeeld n&lt;5) en herleidbare combinaties van uitsplitsingen.</a:t>
+              <a:t>Groepen onder 30 studenten en percentages onder 5 niet tonen, en herleidbare combinaties van uitsplitsingen.</a:t>
             </a:r>
             <a:endParaRPr lang="en-US" sz="1300" dirty="0"/>
           </a:p>
@@ -5445,7 +5445,7 @@
                 <a:ea typeface="General Sans" pitchFamily="34" charset="-122"/>
                 <a:cs typeface="General Sans" pitchFamily="34" charset="-120"/>
               </a:rPr>
-              <a:t>Kanttekening devcontainer: deelnemers werken alleen via de AI-agent. De devcontainer bevat Python, DuckDB en Streamlit, en de skills en checkpoints staan al klaar. De data is een synthetisch 1CHO-CSV met gelabelde waarden en codebook.</a:t>
+              <a:t>Kanttekening devcontainer: deelnemers werken alleen via de AI-agent, in de Codespaces-omgeving dair-agentic-coding (Claude via Foundry). Python en uv staan erin; DuckDB, Streamlit en Plotly nog niet (voorstel: issue #10). Welk model deelnemers krijgen is nog open (issue #11).</a:t>
             </a:r>
             <a:endParaRPr lang="en-US" sz="1400" dirty="0"/>
           </a:p>
@@ -6057,7 +6057,7 @@
                 <a:ea typeface="General Sans" pitchFamily="34" charset="-122"/>
                 <a:cs typeface="General Sans" pitchFamily="34" charset="-120"/>
               </a:rPr>
-              <a:t>Skills uitdelen kost tijd</a:t>
+              <a:t>De skill duurt langer dan gepland</a:t>
             </a:r>
             <a:endParaRPr lang="en-US" sz="1250" dirty="0"/>
           </a:p>
@@ -6096,7 +6096,7 @@
                 <a:ea typeface="General Sans" pitchFamily="34" charset="-122"/>
                 <a:cs typeface="General Sans" pitchFamily="34" charset="-120"/>
               </a:rPr>
-              <a:t>Skills staan klaar in de devcontainer en activeren met één commando (maximaal 1 minuut).</a:t>
+              <a:t>Gemeten: ongeveer 1 en 2 tot 2,5 minuut, met een ander model dan in de devcontainer. Opnieuw meten in de echte omgeving en ruim marge nemen.</a:t>
             </a:r>
             <a:endParaRPr lang="en-US" sz="1150" dirty="0"/>
           </a:p>
@@ -6462,7 +6462,7 @@
                 <a:ea typeface="General Sans" pitchFamily="34" charset="-122"/>
                 <a:cs typeface="General Sans" pitchFamily="34" charset="-120"/>
               </a:rPr>
-              <a:t>Vooraf controleren en zo nodig een patroon en enkele kleine groepen inbouwen, zodat er iets te vinden is én te blokkeren.</a:t>
+              <a:t>Patroon (sector) en kleine groepen zijn ingebouwd en vooraf gecontroleerd met een antwoordsleutel.</a:t>
             </a:r>
             <a:endParaRPr lang="en-US" sz="1150" dirty="0"/>
           </a:p>
@@ -6752,8 +6752,8 @@
         </p:nvSpPr>
         <p:spPr>
           <a:xfrm>
-            <a:off x="5852160" y="2103120"/>
-            <a:ext cx="5788152" cy="1234440"/>
+            <a:off x="5852160" y="2011680"/>
+            <a:ext cx="5788152" cy="1005840"/>
           </a:xfrm>
           <a:prstGeom prst="roundRect">
             <a:avLst>
@@ -6786,7 +6786,7 @@
         </p:nvSpPr>
         <p:spPr>
           <a:xfrm>
-            <a:off x="6126480" y="2304288"/>
+            <a:off x="6126480" y="2139696"/>
             <a:ext cx="1051560" cy="310896"/>
           </a:xfrm>
           <a:prstGeom prst="roundRect">
@@ -6820,7 +6820,7 @@
         </p:nvSpPr>
         <p:spPr>
           <a:xfrm>
-            <a:off x="6126480" y="2304288"/>
+            <a:off x="6126480" y="2139696"/>
             <a:ext cx="1051560" cy="310896"/>
           </a:xfrm>
           <a:prstGeom prst="rect">
@@ -6859,8 +6859,8 @@
         </p:nvSpPr>
         <p:spPr>
           <a:xfrm>
-            <a:off x="6126480" y="2706624"/>
-            <a:ext cx="5257800" cy="548640"/>
+            <a:off x="6126480" y="2487168"/>
+            <a:ext cx="5257800" cy="457200"/>
           </a:xfrm>
           <a:prstGeom prst="rect">
             <a:avLst/>
@@ -6884,7 +6884,445 @@
                 <a:ea typeface="General Sans" pitchFamily="34" charset="-122"/>
                 <a:cs typeface="General Sans" pitchFamily="34" charset="-120"/>
               </a:rPr>
-              <a:t>Nog open: kies A, B of C. Alle drie draaien op het 1CHO-inschrijvingenbestand.</a:t>
+              <a:t>Voorstel: casus A. Casus C vraagt het VO-eindcijfer, dat niet in het synthetische bestand zit.</a:t>
+            </a:r>
+            <a:endParaRPr lang="en-US" sz="1300" dirty="0"/>
+          </a:p>
+        </p:txBody>
+      </p:sp>
+      <p:sp>
+        <p:nvSpPr>
+          <p:cNvPr id="10" name="Shape 5"/>
+          <p:cNvSpPr/>
+          <p:nvPr/>
+        </p:nvSpPr>
+        <p:spPr>
+          <a:xfrm>
+            <a:off x="5852160" y="3108960"/>
+            <a:ext cx="5788152" cy="1005840"/>
+          </a:xfrm>
+          <a:prstGeom prst="roundRect">
+            <a:avLst>
+              <a:gd name="adj" fmla="val 20741"/>
+            </a:avLst>
+          </a:prstGeom>
+          <a:solidFill>
+            <a:srgbClr val="F4D9DC"/>
+          </a:solidFill>
+          <a:ln w="12700">
+            <a:solidFill>
+              <a:srgbClr val="F4D9DC"/>
+            </a:solidFill>
+            <a:prstDash val="solid"/>
+          </a:ln>
+        </p:spPr>
+        <p:txBody>
+          <a:bodyPr/>
+          <a:lstStyle/>
+          <a:p>
+            <a:endParaRPr lang="en-NL"/>
+          </a:p>
+        </p:txBody>
+      </p:sp>
+      <p:sp>
+        <p:nvSpPr>
+          <p:cNvPr id="11" name="Shape 6"/>
+          <p:cNvSpPr/>
+          <p:nvPr/>
+        </p:nvSpPr>
+        <p:spPr>
+          <a:xfrm>
+            <a:off x="6126480" y="3236976"/>
+            <a:ext cx="1051560" cy="310896"/>
+          </a:xfrm>
+          <a:prstGeom prst="roundRect">
+            <a:avLst>
+              <a:gd name="adj" fmla="val 50000"/>
+            </a:avLst>
+          </a:prstGeom>
+          <a:solidFill>
+            <a:srgbClr val="3D68EC"/>
+          </a:solidFill>
+          <a:ln w="12700">
+            <a:solidFill>
+              <a:srgbClr val="3D68EC"/>
+            </a:solidFill>
+            <a:prstDash val="solid"/>
+          </a:ln>
+        </p:spPr>
+        <p:txBody>
+          <a:bodyPr/>
+          <a:lstStyle/>
+          <a:p>
+            <a:endParaRPr lang="en-NL"/>
+          </a:p>
+        </p:txBody>
+      </p:sp>
+      <p:sp>
+        <p:nvSpPr>
+          <p:cNvPr id="12" name="Text 7"/>
+          <p:cNvSpPr txBox="1"/>
+          <p:nvPr/>
+        </p:nvSpPr>
+        <p:spPr>
+          <a:xfrm>
+            <a:off x="6126480" y="3236976"/>
+            <a:ext cx="1051560" cy="310896"/>
+          </a:xfrm>
+          <a:prstGeom prst="rect">
+            <a:avLst/>
+          </a:prstGeom>
+          <a:noFill/>
+          <a:ln/>
+        </p:spPr>
+        <p:txBody>
+          <a:bodyPr wrap="square" lIns="0" tIns="0" rIns="0" bIns="0" rtlCol="0" anchor="ctr"/>
+          <a:lstStyle/>
+          <a:p>
+            <a:pPr marL="0" indent="0" algn="ctr">
+              <a:buNone/>
+            </a:pPr>
+            <a:r>
+              <a:rPr lang="en-US" sz="1200" b="1" dirty="0">
+                <a:solidFill>
+                  <a:srgbClr val="F4D9DC"/>
+                </a:solidFill>
+                <a:latin typeface="General Sans" pitchFamily="34" charset="0"/>
+                <a:ea typeface="General Sans" pitchFamily="34" charset="-122"/>
+                <a:cs typeface="General Sans" pitchFamily="34" charset="-120"/>
+              </a:rPr>
+              <a:t>Omgeving</a:t>
+            </a:r>
+            <a:endParaRPr lang="en-US" sz="1200" dirty="0"/>
+          </a:p>
+        </p:txBody>
+      </p:sp>
+      <p:sp>
+        <p:nvSpPr>
+          <p:cNvPr id="13" name="Text 8"/>
+          <p:cNvSpPr txBox="1"/>
+          <p:nvPr/>
+        </p:nvSpPr>
+        <p:spPr>
+          <a:xfrm>
+            <a:off x="6126480" y="3584448"/>
+            <a:ext cx="5257800" cy="457200"/>
+          </a:xfrm>
+          <a:prstGeom prst="rect">
+            <a:avLst/>
+          </a:prstGeom>
+          <a:noFill/>
+          <a:ln/>
+        </p:spPr>
+        <p:txBody>
+          <a:bodyPr wrap="square" lIns="0" tIns="0" rIns="0" bIns="0" rtlCol="0" anchor="t"/>
+          <a:lstStyle/>
+          <a:p>
+            <a:pPr marL="0" indent="0">
+              <a:buNone/>
+            </a:pPr>
+            <a:r>
+              <a:rPr lang="en-US" sz="1300" dirty="0">
+                <a:solidFill>
+                  <a:srgbClr val="000000"/>
+                </a:solidFill>
+                <a:latin typeface="General Sans" pitchFamily="34" charset="0"/>
+                <a:ea typeface="General Sans" pitchFamily="34" charset="-122"/>
+                <a:cs typeface="General Sans" pitchFamily="34" charset="-120"/>
+              </a:rPr>
+              <a:t>Pakketten in het image (issue #10) en welk Claude-model deelnemers krijgen (issue #11), bij Tomer.</a:t>
+            </a:r>
+            <a:endParaRPr lang="en-US" sz="1300" dirty="0"/>
+          </a:p>
+        </p:txBody>
+      </p:sp>
+      <p:sp>
+        <p:nvSpPr>
+          <p:cNvPr id="10" name="Shape 5"/>
+          <p:cNvSpPr/>
+          <p:nvPr/>
+        </p:nvSpPr>
+        <p:spPr>
+          <a:xfrm>
+            <a:off x="5852160" y="4206240"/>
+            <a:ext cx="5788152" cy="1005840"/>
+          </a:xfrm>
+          <a:prstGeom prst="roundRect">
+            <a:avLst>
+              <a:gd name="adj" fmla="val 20741"/>
+            </a:avLst>
+          </a:prstGeom>
+          <a:solidFill>
+            <a:srgbClr val="F4D9DC"/>
+          </a:solidFill>
+          <a:ln w="12700">
+            <a:solidFill>
+              <a:srgbClr val="F4D9DC"/>
+            </a:solidFill>
+            <a:prstDash val="solid"/>
+          </a:ln>
+        </p:spPr>
+        <p:txBody>
+          <a:bodyPr/>
+          <a:lstStyle/>
+          <a:p>
+            <a:endParaRPr lang="en-NL"/>
+          </a:p>
+        </p:txBody>
+      </p:sp>
+      <p:sp>
+        <p:nvSpPr>
+          <p:cNvPr id="11" name="Shape 6"/>
+          <p:cNvSpPr/>
+          <p:nvPr/>
+        </p:nvSpPr>
+        <p:spPr>
+          <a:xfrm>
+            <a:off x="6126480" y="4334255"/>
+            <a:ext cx="1051560" cy="310896"/>
+          </a:xfrm>
+          <a:prstGeom prst="roundRect">
+            <a:avLst>
+              <a:gd name="adj" fmla="val 50000"/>
+            </a:avLst>
+          </a:prstGeom>
+          <a:solidFill>
+            <a:srgbClr val="3D68EC"/>
+          </a:solidFill>
+          <a:ln w="12700">
+            <a:solidFill>
+              <a:srgbClr val="3D68EC"/>
+            </a:solidFill>
+            <a:prstDash val="solid"/>
+          </a:ln>
+        </p:spPr>
+        <p:txBody>
+          <a:bodyPr/>
+          <a:lstStyle/>
+          <a:p>
+            <a:endParaRPr lang="en-NL"/>
+          </a:p>
+        </p:txBody>
+      </p:sp>
+      <p:sp>
+        <p:nvSpPr>
+          <p:cNvPr id="12" name="Text 7"/>
+          <p:cNvSpPr txBox="1"/>
+          <p:nvPr/>
+        </p:nvSpPr>
+        <p:spPr>
+          <a:xfrm>
+            <a:off x="6126480" y="4334255"/>
+            <a:ext cx="1051560" cy="310896"/>
+          </a:xfrm>
+          <a:prstGeom prst="rect">
+            <a:avLst/>
+          </a:prstGeom>
+          <a:noFill/>
+          <a:ln/>
+        </p:spPr>
+        <p:txBody>
+          <a:bodyPr wrap="square" lIns="0" tIns="0" rIns="0" bIns="0" rtlCol="0" anchor="ctr"/>
+          <a:lstStyle/>
+          <a:p>
+            <a:pPr marL="0" indent="0" algn="ctr">
+              <a:buNone/>
+            </a:pPr>
+            <a:r>
+              <a:rPr lang="en-US" sz="1200" b="1" dirty="0">
+                <a:solidFill>
+                  <a:srgbClr val="F4D9DC"/>
+                </a:solidFill>
+                <a:latin typeface="General Sans" pitchFamily="34" charset="0"/>
+                <a:ea typeface="General Sans" pitchFamily="34" charset="-122"/>
+                <a:cs typeface="General Sans" pitchFamily="34" charset="-120"/>
+              </a:rPr>
+              <a:t>Skills</a:t>
+            </a:r>
+            <a:endParaRPr lang="en-US" sz="1200" dirty="0"/>
+          </a:p>
+        </p:txBody>
+      </p:sp>
+      <p:sp>
+        <p:nvSpPr>
+          <p:cNvPr id="13" name="Text 8"/>
+          <p:cNvSpPr txBox="1"/>
+          <p:nvPr/>
+        </p:nvSpPr>
+        <p:spPr>
+          <a:xfrm>
+            <a:off x="6126480" y="4681727"/>
+            <a:ext cx="5257800" cy="457200"/>
+          </a:xfrm>
+          <a:prstGeom prst="rect">
+            <a:avLst/>
+          </a:prstGeom>
+          <a:noFill/>
+          <a:ln/>
+        </p:spPr>
+        <p:txBody>
+          <a:bodyPr wrap="square" lIns="0" tIns="0" rIns="0" bIns="0" rtlCol="0" anchor="t"/>
+          <a:lstStyle/>
+          <a:p>
+            <a:pPr marL="0" indent="0">
+              <a:buNone/>
+            </a:pPr>
+            <a:r>
+              <a:rPr lang="en-US" sz="1300" dirty="0">
+                <a:solidFill>
+                  <a:srgbClr val="000000"/>
+                </a:solidFill>
+                <a:latin typeface="General Sans" pitchFamily="34" charset="0"/>
+                <a:ea typeface="General Sans" pitchFamily="34" charset="-122"/>
+                <a:cs typeface="General Sans" pitchFamily="34" charset="-120"/>
+              </a:rPr>
+              <a:t>De skills staan in een pull request (#9) en moeten nog gereviewd worden. De data volgt apart.</a:t>
+            </a:r>
+            <a:endParaRPr lang="en-US" sz="1300" dirty="0"/>
+          </a:p>
+        </p:txBody>
+      </p:sp>
+      <p:sp>
+        <p:nvSpPr>
+          <p:cNvPr id="10" name="Shape 5"/>
+          <p:cNvSpPr/>
+          <p:nvPr/>
+        </p:nvSpPr>
+        <p:spPr>
+          <a:xfrm>
+            <a:off x="5852160" y="5303520"/>
+            <a:ext cx="5788152" cy="1005840"/>
+          </a:xfrm>
+          <a:prstGeom prst="roundRect">
+            <a:avLst>
+              <a:gd name="adj" fmla="val 20741"/>
+            </a:avLst>
+          </a:prstGeom>
+          <a:solidFill>
+            <a:srgbClr val="F4D9DC"/>
+          </a:solidFill>
+          <a:ln w="12700">
+            <a:solidFill>
+              <a:srgbClr val="F4D9DC"/>
+            </a:solidFill>
+            <a:prstDash val="solid"/>
+          </a:ln>
+        </p:spPr>
+        <p:txBody>
+          <a:bodyPr/>
+          <a:lstStyle/>
+          <a:p>
+            <a:endParaRPr lang="en-NL"/>
+          </a:p>
+        </p:txBody>
+      </p:sp>
+      <p:sp>
+        <p:nvSpPr>
+          <p:cNvPr id="11" name="Shape 6"/>
+          <p:cNvSpPr/>
+          <p:nvPr/>
+        </p:nvSpPr>
+        <p:spPr>
+          <a:xfrm>
+            <a:off x="6126480" y="5431536"/>
+            <a:ext cx="1051560" cy="310896"/>
+          </a:xfrm>
+          <a:prstGeom prst="roundRect">
+            <a:avLst>
+              <a:gd name="adj" fmla="val 50000"/>
+            </a:avLst>
+          </a:prstGeom>
+          <a:solidFill>
+            <a:srgbClr val="3D68EC"/>
+          </a:solidFill>
+          <a:ln w="12700">
+            <a:solidFill>
+              <a:srgbClr val="3D68EC"/>
+            </a:solidFill>
+            <a:prstDash val="solid"/>
+          </a:ln>
+        </p:spPr>
+        <p:txBody>
+          <a:bodyPr/>
+          <a:lstStyle/>
+          <a:p>
+            <a:endParaRPr lang="en-NL"/>
+          </a:p>
+        </p:txBody>
+      </p:sp>
+      <p:sp>
+        <p:nvSpPr>
+          <p:cNvPr id="12" name="Text 7"/>
+          <p:cNvSpPr txBox="1"/>
+          <p:nvPr/>
+        </p:nvSpPr>
+        <p:spPr>
+          <a:xfrm>
+            <a:off x="6126480" y="5431536"/>
+            <a:ext cx="1051560" cy="310896"/>
+          </a:xfrm>
+          <a:prstGeom prst="rect">
+            <a:avLst/>
+          </a:prstGeom>
+          <a:noFill/>
+          <a:ln/>
+        </p:spPr>
+        <p:txBody>
+          <a:bodyPr wrap="square" lIns="0" tIns="0" rIns="0" bIns="0" rtlCol="0" anchor="ctr"/>
+          <a:lstStyle/>
+          <a:p>
+            <a:pPr marL="0" indent="0" algn="ctr">
+              <a:buNone/>
+            </a:pPr>
+            <a:r>
+              <a:rPr lang="en-US" sz="1200" b="1" dirty="0">
+                <a:solidFill>
+                  <a:srgbClr val="F4D9DC"/>
+                </a:solidFill>
+                <a:latin typeface="General Sans" pitchFamily="34" charset="0"/>
+                <a:ea typeface="General Sans" pitchFamily="34" charset="-122"/>
+                <a:cs typeface="General Sans" pitchFamily="34" charset="-120"/>
+              </a:rPr>
+              <a:t>Planning</a:t>
+            </a:r>
+            <a:endParaRPr lang="en-US" sz="1200" dirty="0"/>
+          </a:p>
+        </p:txBody>
+      </p:sp>
+      <p:sp>
+        <p:nvSpPr>
+          <p:cNvPr id="13" name="Text 8"/>
+          <p:cNvSpPr txBox="1"/>
+          <p:nvPr/>
+        </p:nvSpPr>
+        <p:spPr>
+          <a:xfrm>
+            <a:off x="6126480" y="5779008"/>
+            <a:ext cx="5257800" cy="457200"/>
+          </a:xfrm>
+          <a:prstGeom prst="rect">
+            <a:avLst/>
+          </a:prstGeom>
+          <a:noFill/>
+          <a:ln/>
+        </p:spPr>
+        <p:txBody>
+          <a:bodyPr wrap="square" lIns="0" tIns="0" rIns="0" bIns="0" rtlCol="0" anchor="t"/>
+          <a:lstStyle/>
+          <a:p>
+            <a:pPr marL="0" indent="0">
+              <a:buNone/>
+            </a:pPr>
+            <a:r>
+              <a:rPr lang="en-US" sz="1300" dirty="0">
+                <a:solidFill>
+                  <a:srgbClr val="000000"/>
+                </a:solidFill>
+                <a:latin typeface="General Sans" pitchFamily="34" charset="0"/>
+                <a:ea typeface="General Sans" pitchFamily="34" charset="-122"/>
+                <a:cs typeface="General Sans" pitchFamily="34" charset="-120"/>
+              </a:rPr>
+              <a:t>Peiling-tool, datum en spreker invullen en de skills opnieuw meten in de echte omgeving.</a:t>
             </a:r>
             <a:endParaRPr lang="en-US" sz="1300" dirty="0"/>
           </a:p>
@@ -14745,7 +15183,7 @@
                 <a:ea typeface="General Sans" pitchFamily="34" charset="-122"/>
                 <a:cs typeface="General Sans" pitchFamily="34" charset="-120"/>
               </a:rPr>
-              <a:t>Eén stuurt de agent aan, de ander controleert code en uitkomst. Wissel per ronde.</a:t>
+              <a:t>Eén typt de opdrachten, de ander checkt of het antwoord klopt. Wissel per ronde.</a:t>
             </a:r>
             <a:endParaRPr lang="en-US" sz="1400" dirty="0"/>
           </a:p>
@@ -15736,7 +16174,7 @@
                 <a:ea typeface="General Sans" pitchFamily="34" charset="-122"/>
                 <a:cs typeface="General Sans" pitchFamily="34" charset="-120"/>
               </a:rPr>
-              <a:t>AI-TAAK</a:t>
+              <a:t>MET DE AGENT</a:t>
             </a:r>
             <a:endParaRPr lang="en-US" sz="1100" dirty="0"/>
           </a:p>
@@ -16148,7 +16586,7 @@
                 <a:ea typeface="General Sans" pitchFamily="34" charset="-122"/>
                 <a:cs typeface="General Sans" pitchFamily="34" charset="-120"/>
               </a:rPr>
-              <a:t>AI-TAAK</a:t>
+              <a:t>MET DE AGENT</a:t>
             </a:r>
             <a:endParaRPr lang="en-US" sz="1100" dirty="0"/>
           </a:p>
@@ -16560,7 +16998,7 @@
                 <a:ea typeface="General Sans" pitchFamily="34" charset="-122"/>
                 <a:cs typeface="General Sans" pitchFamily="34" charset="-120"/>
               </a:rPr>
-              <a:t>AI-TAAK</a:t>
+              <a:t>MET DE AGENT</a:t>
             </a:r>
             <a:endParaRPr lang="en-US" sz="1100" dirty="0"/>
           </a:p>
@@ -16688,7 +17126,7 @@
                 <a:ea typeface="General Sans" pitchFamily="34" charset="-122"/>
                 <a:cs typeface="General Sans" pitchFamily="34" charset="-120"/>
               </a:rPr>
-              <a:t>Alle drie draaien op het 1CHO-bestand (output van de 1cijferho-tool). Definities van uitval, rendement en studiewissel volgen het package staat1cho.</a:t>
+              <a:t>Voorstel: casus A. Casus C vraagt het VO-eindcijfer, dat niet in het synthetische inschrijvingenbestand zit (dat komt uit VAKHAVW). Definities volgen het package staat1cho.</a:t>
             </a:r>
             <a:endParaRPr lang="en-US" sz="1100" dirty="0"/>
           </a:p>
@@ -16997,7 +17435,7 @@
                 <a:ea typeface="General Sans" pitchFamily="34" charset="-122"/>
                 <a:cs typeface="General Sans" pitchFamily="34" charset="-120"/>
               </a:rPr>
-              <a:t>losse vraag</a:t>
+              <a:t>losse opdracht</a:t>
             </a:r>
             <a:endParaRPr lang="en-US" sz="1400" dirty="0"/>
           </a:p>
@@ -17036,7 +17474,7 @@
                 <a:ea typeface="General Sans" pitchFamily="34" charset="-122"/>
                 <a:cs typeface="General Sans" pitchFamily="34" charset="-120"/>
               </a:rPr>
-              <a:t>Je typt wat je wilt. Dat werkt, maar het resultaat is elke keer anders en de kennis zit alleen in jouw hoofd.</a:t>
+              <a:t>Wat jij zelf typt. Het resultaat is elke keer anders en hangt af van hoe je het vraagt.</a:t>
             </a:r>
             <a:endParaRPr lang="en-US" sz="1300" dirty="0"/>
           </a:p>
@@ -17322,7 +17760,7 @@
                 <a:ea typeface="General Sans" pitchFamily="34" charset="-122"/>
                 <a:cs typeface="General Sans" pitchFamily="34" charset="-120"/>
               </a:rPr>
-              <a:t>vastgelegd recept</a:t>
+              <a:t>vast stappenplan</a:t>
             </a:r>
             <a:endParaRPr lang="en-US" sz="1400" dirty="0"/>
           </a:p>
@@ -17361,7 +17799,7 @@
                 <a:ea typeface="General Sans" pitchFamily="34" charset="-122"/>
                 <a:cs typeface="General Sans" pitchFamily="34" charset="-120"/>
               </a:rPr>
-              <a:t>Een map met een SKILL.md: instructies, voorbeelden, scripts en checks. De agent pakt hem erbij zodra de taak erom vraagt.</a:t>
+              <a:t>Een tekstbestand (SKILL.md) met stappen en checks dat de agent volgt. Elke keer dezelfde werkwijze.</a:t>
             </a:r>
             <a:endParaRPr lang="en-US" sz="1300" dirty="0"/>
           </a:p>
@@ -17585,7 +18023,7 @@
                 <a:ea typeface="General Sans" pitchFamily="34" charset="-122"/>
                 <a:cs typeface="General Sans" pitchFamily="34" charset="-120"/>
               </a:rPr>
-              <a:t>voert uit</a:t>
+              <a:t>de uitvoerder</a:t>
             </a:r>
             <a:endParaRPr lang="en-US" sz="1400" dirty="0"/>
           </a:p>
@@ -17624,7 +18062,7 @@
                 <a:ea typeface="General Sans" pitchFamily="34" charset="-122"/>
                 <a:cs typeface="General Sans" pitchFamily="34" charset="-120"/>
               </a:rPr>
-              <a:t>Claude Code leest de skill, schrijft en draait de code en toetst het resultaat aan de checks uit de skill.</a:t>
+              <a:t>De AI die het werk doet: leest je opdracht of de skill, schrijft en draait de code. Wij gebruiken Claude Code.</a:t>
             </a:r>
             <a:endParaRPr lang="en-US" sz="1300" dirty="0"/>
           </a:p>
@@ -18256,7 +18694,7 @@
                 <a:ea typeface="General Sans" pitchFamily="34" charset="-122"/>
                 <a:cs typeface="General Sans" pitchFamily="34" charset="-120"/>
               </a:rPr>
-              <a:t>n&lt;5</a:t>
+              <a:t>n&lt;30</a:t>
             </a:r>
             <a:endParaRPr lang="en-US" sz="6400" dirty="0"/>
           </a:p>
@@ -19858,7 +20296,7 @@
                 <a:ea typeface="General Sans" pitchFamily="34" charset="-122"/>
                 <a:cs typeface="General Sans" pitchFamily="34" charset="-120"/>
               </a:rPr>
-              <a:t>Skills en checkpoints</a:t>
+              <a:t>Skills</a:t>
             </a:r>
             <a:endParaRPr lang="en-US" sz="1400" dirty="0"/>
           </a:p>
@@ -19897,7 +20335,7 @@
                 <a:ea typeface="General Sans" pitchFamily="34" charset="-122"/>
                 <a:cs typeface="General Sans" pitchFamily="34" charset="-120"/>
               </a:rPr>
-              <a:t>staan klaar, activeren met één commando</a:t>
+              <a:t>de leider laat ze live zien bij de spiegelmomenten</a:t>
             </a:r>
             <a:endParaRPr lang="en-US" sz="1100" dirty="0"/>
           </a:p>

--- a/workshop-rad/exports/workshop-voorstel-RAD_120min.pptx
+++ b/workshop-rad/exports/workshop-voorstel-RAD_120min.pptx
@@ -842,7 +842,7 @@
           <a:lstStyle/>
           <a:p>
             <a:r>
-              <a:t>Evaluatie en afsluiting (16 min, één blok). Vraag eerst toestemming: de antwoorden zijn anoniem en dienen om te bepalen of er een vervolg komt. Terugblik (4 min) via de reflectie-skill of de peiling; meerkeuzevraag (2 min); open vraag (4 min); daarna de afsluiting (6 min). Formulering: workshop-rad/skills/workshop-reflectie/references/vragenset.md.</a:t>
+              <a:t>Evaluatie en afsluiting (16 min, één blok). Vraag eerst toestemming: de antwoorden zijn anoniem en dienen om te bepalen of er een vervolg komt. Terugblik (4 min) via de peiling of een kort rondje; meerkeuzevraag (2 min); open vraag (4 min); daarna de afsluiting (6 min). Formulering: workshop-rad/docs/evaluatievragen.md.</a:t>
             </a:r>
           </a:p>
         </p:txBody>
@@ -4021,7 +4021,7 @@
                 <a:ea typeface="General Sans" pitchFamily="34" charset="-122"/>
                 <a:cs typeface="General Sans" pitchFamily="34" charset="-120"/>
               </a:rPr>
-              <a:t>/workshop-verkennen en /workshop-dashboard, plus /workshop-reflectie voor de evaluatie. Deelnemers prompten zelf; de leider draait de skills live (gemeten: ongeveer 1 en 2 tot 2,5 minuut). Vaste tussenproducten, kosten €0.</a:t>
+              <a:t>/workshop-verkennen en /workshop-dashboard. Deelnemers prompten zelf; de leider draait de skills live (gemeten: ongeveer 1 en 2 tot 2,5 minuut). Vaste tussenproducten, kosten €0.</a:t>
             </a:r>
             <a:endParaRPr lang="en-US" sz="1300" dirty="0"/>
           </a:p>
@@ -7706,7 +7706,7 @@
                 <a:ea typeface="General Sans" pitchFamily="34" charset="-122"/>
                 <a:cs typeface="General Sans" pitchFamily="34" charset="-120"/>
               </a:rPr>
-              <a:t>Wat ging goed, wat zag je nu pas, wat neem je mee? Via de reflectie-skill of de peiling.</a:t>
+              <a:t>Wat ging goed, wat zag je nu pas, wat neem je mee? Via de peiling of een kort rondje.</a:t>
             </a:r>
             <a:endParaRPr lang="en-US" sz="1400" dirty="0"/>
           </a:p>

--- a/workshop-rad/exports/workshop-voorstel-RAD_120min.pptx
+++ b/workshop-rad/exports/workshop-voorstel-RAD_120min.pptx
@@ -4021,7 +4021,7 @@
                 <a:ea typeface="General Sans" pitchFamily="34" charset="-122"/>
                 <a:cs typeface="General Sans" pitchFamily="34" charset="-120"/>
               </a:rPr>
-              <a:t>/workshop-verkennen en /workshop-dashboard. Deelnemers prompten zelf; de leider draait de skills live (gemeten: ongeveer 1 en 2 tot 2,5 minuut). Vaste tussenproducten, kosten €0.</a:t>
+              <a:t>/verkennen en /bouwen. Deelnemers prompten zelf; de leider draait de skills live (gemeten: ongeveer 1 tot 2 en 2 tot 3 minuut). Vaste tussenproducten, kosten €0.</a:t>
             </a:r>
             <a:endParaRPr lang="en-US" sz="1300" dirty="0"/>
           </a:p>
@@ -5445,7 +5445,7 @@
                 <a:ea typeface="General Sans" pitchFamily="34" charset="-122"/>
                 <a:cs typeface="General Sans" pitchFamily="34" charset="-120"/>
               </a:rPr>
-              <a:t>Kanttekening devcontainer: deelnemers werken alleen via de AI-agent, in de Codespaces-omgeving dair-agentic-coding (Claude via Foundry). Python en uv staan erin; DuckDB, Streamlit en Plotly nog niet (voorstel: issue #10). Welk model deelnemers krijgen is nog open (issue #11).</a:t>
+              <a:t>Kanttekening devcontainer: deelnemers werken alleen via de AI-agent, in de Codespaces-omgeving dair-agentic-coding (Claude via Foundry). Python en uv staan erin; DuckDB, Streamlit en Plotly installeert de skill zelf met uv (voorstel: ze vooraf in het image zetten, issue #10). Deelnemers krijgen Claude Sonnet 5.5.</a:t>
             </a:r>
             <a:endParaRPr lang="en-US" sz="1400" dirty="0"/>
           </a:p>
@@ -6096,7 +6096,7 @@
                 <a:ea typeface="General Sans" pitchFamily="34" charset="-122"/>
                 <a:cs typeface="General Sans" pitchFamily="34" charset="-120"/>
               </a:rPr>
-              <a:t>Gemeten: ongeveer 1 en 2 tot 2,5 minuut, met een ander model dan in de devcontainer. Opnieuw meten in de echte omgeving en ruim marge nemen.</a:t>
+              <a:t>Gemeten met hetzelfde model als de deelnemers: 1 tot 2 minuut en 2 tot 3 minuut. Opnieuw meten in de echte omgeving en ruim marge nemen.</a:t>
             </a:r>
             <a:endParaRPr lang="en-US" sz="1150" dirty="0"/>
           </a:p>
@@ -7030,7 +7030,7 @@
                 <a:ea typeface="General Sans" pitchFamily="34" charset="-122"/>
                 <a:cs typeface="General Sans" pitchFamily="34" charset="-120"/>
               </a:rPr>
-              <a:t>Pakketten in het image (issue #10) en welk Claude-model deelnemers krijgen (issue #11), bij Tomer.</a:t>
+              <a:t>Pakketten vooraf in het image (issue #10), bij Tomer. Het model is Sonnet 5.5.</a:t>
             </a:r>
             <a:endParaRPr lang="en-US" sz="1300" dirty="0"/>
           </a:p>
@@ -7176,7 +7176,7 @@
                 <a:ea typeface="General Sans" pitchFamily="34" charset="-122"/>
                 <a:cs typeface="General Sans" pitchFamily="34" charset="-120"/>
               </a:rPr>
-              <a:t>De skills staan in een pull request (#9) en moeten nog gereviewd worden. De data volgt apart.</a:t>
+              <a:t>De skills en de synthetische data staan in dair-agentic-coding, nog te mergen naar main.</a:t>
             </a:r>
             <a:endParaRPr lang="en-US" sz="1300" dirty="0"/>
           </a:p>
